--- a/docs/pptx/auc3/jx-auc3-linsubhr-sens-throm3.pptx
+++ b/docs/pptx/auc3/jx-auc3-linsubhr-sens-throm3.pptx
@@ -5108,7 +5108,7 @@
           <p:spPr>
             <a:xfrm>
               <a:off x="817517" y="1896563"/>
-              <a:ext cx="6299667" cy="82021"/>
+              <a:ext cx="6896679" cy="82021"/>
             </a:xfrm>
             <a:prstGeom prst="rect">
               <a:avLst/>
@@ -5140,7 +5140,7 @@
                   <a:latin typeface="Helvetica"/>
                   <a:cs typeface="Helvetica"/>
                 </a:rPr>
-                <a:t>subHR per 0.1 ratio decline: 2.15 (1.39-3.33), p = &lt;0.001  |  per IQR decline (Δ = 0.28): 8.61 (2.53-29.34)  |  IQR: [0.70, 0.98]</a:t>
+                <a:t>subHR per 0.1 ratio decline: 2.15 (1.39-3.33), p_Bonf = 0.003 (n = 6)  |  per IQR decline (Δ = 0.28): 8.61 (2.53-29.34)  |  IQR: [0.70, 0.98]</a:t>
               </a:r>
             </a:p>
           </p:txBody>

--- a/docs/pptx/auc3/jx-auc3-linsubhr-sens-throm3.pptx
+++ b/docs/pptx/auc3/jx-auc3-linsubhr-sens-throm3.pptx
@@ -4831,8 +4831,8 @@
           </p:nvSpPr>
           <p:spPr>
             <a:xfrm>
-              <a:off x="2137719" y="5785772"/>
-              <a:ext cx="155356" cy="80101"/>
+              <a:off x="2134610" y="5785772"/>
+              <a:ext cx="161574" cy="80101"/>
             </a:xfrm>
             <a:prstGeom prst="rect">
               <a:avLst/>
@@ -4864,7 +4864,7 @@
                   <a:latin typeface="Helvetica"/>
                   <a:cs typeface="Helvetica"/>
                 </a:rPr>
-                <a:t>0.6</a:t>
+                <a:t>-40</a:t>
               </a:r>
             </a:p>
           </p:txBody>
@@ -4877,8 +4877,8 @@
           </p:nvSpPr>
           <p:spPr>
             <a:xfrm>
-              <a:off x="3878840" y="5785772"/>
-              <a:ext cx="155356" cy="80101"/>
+              <a:off x="3875731" y="5785772"/>
+              <a:ext cx="161574" cy="80101"/>
             </a:xfrm>
             <a:prstGeom prst="rect">
               <a:avLst/>
@@ -4910,7 +4910,7 @@
                   <a:latin typeface="Helvetica"/>
                   <a:cs typeface="Helvetica"/>
                 </a:rPr>
-                <a:t>0.8</a:t>
+                <a:t>-20</a:t>
               </a:r>
             </a:p>
           </p:txBody>
@@ -4923,8 +4923,8 @@
           </p:nvSpPr>
           <p:spPr>
             <a:xfrm>
-              <a:off x="5619961" y="5785772"/>
-              <a:ext cx="155356" cy="80101"/>
+              <a:off x="5666549" y="5785772"/>
+              <a:ext cx="62179" cy="80101"/>
             </a:xfrm>
             <a:prstGeom prst="rect">
               <a:avLst/>
@@ -4956,7 +4956,7 @@
                   <a:latin typeface="Helvetica"/>
                   <a:cs typeface="Helvetica"/>
                 </a:rPr>
-                <a:t>1.0</a:t>
+                <a:t>0</a:t>
               </a:r>
             </a:p>
           </p:txBody>
@@ -4969,8 +4969,8 @@
           </p:nvSpPr>
           <p:spPr>
             <a:xfrm>
-              <a:off x="7361081" y="5785772"/>
-              <a:ext cx="155356" cy="80101"/>
+              <a:off x="7376580" y="5785772"/>
+              <a:ext cx="124358" cy="80101"/>
             </a:xfrm>
             <a:prstGeom prst="rect">
               <a:avLst/>
@@ -5002,7 +5002,7 @@
                   <a:latin typeface="Helvetica"/>
                   <a:cs typeface="Helvetica"/>
                 </a:rPr>
-                <a:t>1.2</a:t>
+                <a:t>20</a:t>
               </a:r>
             </a:p>
           </p:txBody>
@@ -5015,8 +5015,8 @@
           </p:nvSpPr>
           <p:spPr>
             <a:xfrm>
-              <a:off x="2691419" y="5925448"/>
-              <a:ext cx="4051889" cy="100218"/>
+              <a:off x="1561815" y="5925448"/>
+              <a:ext cx="6311097" cy="100218"/>
             </a:xfrm>
             <a:prstGeom prst="rect">
               <a:avLst/>
@@ -5048,7 +5048,7 @@
                   <a:latin typeface="Helvetica"/>
                   <a:cs typeface="Helvetica"/>
                 </a:rPr>
-                <a:t>Sensitivity eGFR Ratio (CKD-EPI 2012 CysC / CKD-EPI 2021 Cr)</a:t>
+                <a:t>Sensitivity eGFR Difference (%): 100 × (CKD-EPI 2012 CysC − CKD-EPI 2021 Cr) / CKD-EPI 2021 Cr</a:t>
               </a:r>
             </a:p>
           </p:txBody>
@@ -5108,7 +5108,7 @@
           <p:spPr>
             <a:xfrm>
               <a:off x="817517" y="1896563"/>
-              <a:ext cx="6896679" cy="82021"/>
+              <a:ext cx="7023414" cy="82021"/>
             </a:xfrm>
             <a:prstGeom prst="rect">
               <a:avLst/>
@@ -5140,7 +5140,7 @@
                   <a:latin typeface="Helvetica"/>
                   <a:cs typeface="Helvetica"/>
                 </a:rPr>
-                <a:t>subHR per 0.1 ratio decline: 2.15 (1.39-3.33), p_Bonf = 0.003 (n = 6)  |  per IQR decline (Δ = 0.28): 8.61 (2.53-29.34)  |  IQR: [0.70, 0.98]</a:t>
+                <a:t>subHR per 10 % decline: 2.15 (1.39-3.33), p_Bonf = 0.003 (n = 6)  |  per IQR decline (Δ = 28.1 %): 8.61 (2.53-29.34)  |  IQR: [-30.1, -2.1] %</a:t>
               </a:r>
             </a:p>
           </p:txBody>

--- a/docs/pptx/auc3/jx-auc3-linsubhr-sens-throm3.pptx
+++ b/docs/pptx/auc3/jx-auc3-linsubhr-sens-throm3.pptx
@@ -2265,27 +2265,62 @@
         </p:sp>
         <p:sp>
           <p:nvSpPr>
-            <p:cNvPr id="4" name="pl4"/>
-            <p:cNvSpPr/>
-            <p:nvPr/>
-          </p:nvSpPr>
-          <p:spPr>
-            <a:xfrm>
-              <a:off x="817517" y="5142518"/>
-              <a:ext cx="7799693" cy="0"/>
+            <p:cNvPr id="4" name="rc4"/>
+            <p:cNvSpPr/>
+            <p:nvPr/>
+          </p:nvSpPr>
+          <p:spPr>
+            <a:xfrm>
+              <a:off x="457200" y="1600200"/>
+              <a:ext cx="8229600" cy="4525962"/>
+            </a:xfrm>
+            <a:prstGeom prst="rect">
+              <a:avLst/>
+            </a:prstGeom>
+            <a:solidFill>
+              <a:srgbClr val="FFFFFF">
+                <a:alpha val="100000"/>
+              </a:srgbClr>
+            </a:solidFill>
+            <a:ln w="13550" cap="rnd">
+              <a:solidFill>
+                <a:srgbClr val="FFFFFF">
+                  <a:alpha val="100000"/>
+                </a:srgbClr>
+              </a:solidFill>
+              <a:prstDash val="solid"/>
+              <a:round/>
+            </a:ln>
+          </p:spPr>
+          <p:txBody>
+            <a:bodyPr/>
+            <a:lstStyle/>
+            <a:p/>
+          </p:txBody>
+        </p:sp>
+        <p:sp>
+          <p:nvSpPr>
+            <p:cNvPr id="5" name="pl5"/>
+            <p:cNvSpPr/>
+            <p:nvPr/>
+          </p:nvSpPr>
+          <p:spPr>
+            <a:xfrm>
+              <a:off x="887106" y="3250627"/>
+              <a:ext cx="7660515" cy="0"/>
             </a:xfrm>
             <a:custGeom>
               <a:avLst/>
               <a:pathLst>
-                <a:path w="7799693" h="0">
+                <a:path w="7660515" h="0">
                   <a:moveTo>
                     <a:pt x="0" y="0"/>
                   </a:moveTo>
                   <a:lnTo>
-                    <a:pt x="7799693" y="0"/>
-                  </a:lnTo>
-                  <a:lnTo>
-                    <a:pt x="7799693" y="0"/>
+                    <a:pt x="7660515" y="0"/>
+                  </a:lnTo>
+                  <a:lnTo>
+                    <a:pt x="7660515" y="0"/>
                   </a:lnTo>
                 </a:path>
               </a:pathLst>
@@ -2308,27 +2343,27 @@
         </p:sp>
         <p:sp>
           <p:nvSpPr>
-            <p:cNvPr id="5" name="pl5"/>
-            <p:cNvSpPr/>
-            <p:nvPr/>
-          </p:nvSpPr>
-          <p:spPr>
-            <a:xfrm>
-              <a:off x="817517" y="4313054"/>
-              <a:ext cx="7799693" cy="0"/>
+            <p:cNvPr id="6" name="pl6"/>
+            <p:cNvSpPr/>
+            <p:nvPr/>
+          </p:nvSpPr>
+          <p:spPr>
+            <a:xfrm>
+              <a:off x="887106" y="2951293"/>
+              <a:ext cx="7660515" cy="0"/>
             </a:xfrm>
             <a:custGeom>
               <a:avLst/>
               <a:pathLst>
-                <a:path w="7799693" h="0">
+                <a:path w="7660515" h="0">
                   <a:moveTo>
                     <a:pt x="0" y="0"/>
                   </a:moveTo>
                   <a:lnTo>
-                    <a:pt x="7799693" y="0"/>
-                  </a:lnTo>
-                  <a:lnTo>
-                    <a:pt x="7799693" y="0"/>
+                    <a:pt x="7660515" y="0"/>
+                  </a:lnTo>
+                  <a:lnTo>
+                    <a:pt x="7660515" y="0"/>
                   </a:lnTo>
                 </a:path>
               </a:pathLst>
@@ -2351,27 +2386,27 @@
         </p:sp>
         <p:sp>
           <p:nvSpPr>
-            <p:cNvPr id="6" name="pl6"/>
-            <p:cNvSpPr/>
-            <p:nvPr/>
-          </p:nvSpPr>
-          <p:spPr>
-            <a:xfrm>
-              <a:off x="817517" y="3483591"/>
-              <a:ext cx="7799693" cy="0"/>
+            <p:cNvPr id="7" name="pl7"/>
+            <p:cNvSpPr/>
+            <p:nvPr/>
+          </p:nvSpPr>
+          <p:spPr>
+            <a:xfrm>
+              <a:off x="887106" y="2651959"/>
+              <a:ext cx="7660515" cy="0"/>
             </a:xfrm>
             <a:custGeom>
               <a:avLst/>
               <a:pathLst>
-                <a:path w="7799693" h="0">
+                <a:path w="7660515" h="0">
                   <a:moveTo>
                     <a:pt x="0" y="0"/>
                   </a:moveTo>
                   <a:lnTo>
-                    <a:pt x="7799693" y="0"/>
-                  </a:lnTo>
-                  <a:lnTo>
-                    <a:pt x="7799693" y="0"/>
+                    <a:pt x="7660515" y="0"/>
+                  </a:lnTo>
+                  <a:lnTo>
+                    <a:pt x="7660515" y="0"/>
                   </a:lnTo>
                 </a:path>
               </a:pathLst>
@@ -2394,27 +2429,27 @@
         </p:sp>
         <p:sp>
           <p:nvSpPr>
-            <p:cNvPr id="7" name="pl7"/>
-            <p:cNvSpPr/>
-            <p:nvPr/>
-          </p:nvSpPr>
-          <p:spPr>
-            <a:xfrm>
-              <a:off x="817517" y="2654127"/>
-              <a:ext cx="7799693" cy="0"/>
+            <p:cNvPr id="8" name="pl8"/>
+            <p:cNvSpPr/>
+            <p:nvPr/>
+          </p:nvSpPr>
+          <p:spPr>
+            <a:xfrm>
+              <a:off x="887106" y="2352625"/>
+              <a:ext cx="7660515" cy="0"/>
             </a:xfrm>
             <a:custGeom>
               <a:avLst/>
               <a:pathLst>
-                <a:path w="7799693" h="0">
+                <a:path w="7660515" h="0">
                   <a:moveTo>
                     <a:pt x="0" y="0"/>
                   </a:moveTo>
                   <a:lnTo>
-                    <a:pt x="7799693" y="0"/>
-                  </a:lnTo>
-                  <a:lnTo>
-                    <a:pt x="7799693" y="0"/>
+                    <a:pt x="7660515" y="0"/>
+                  </a:lnTo>
+                  <a:lnTo>
+                    <a:pt x="7660515" y="0"/>
                   </a:lnTo>
                 </a:path>
               </a:pathLst>
@@ -2437,21 +2472,21 @@
         </p:sp>
         <p:sp>
           <p:nvSpPr>
-            <p:cNvPr id="8" name="pl8"/>
-            <p:cNvSpPr/>
-            <p:nvPr/>
-          </p:nvSpPr>
-          <p:spPr>
-            <a:xfrm>
-              <a:off x="1344837" y="2073503"/>
-              <a:ext cx="0" cy="3649639"/>
+            <p:cNvPr id="9" name="pl9"/>
+            <p:cNvSpPr/>
+            <p:nvPr/>
+          </p:nvSpPr>
+          <p:spPr>
+            <a:xfrm>
+              <a:off x="1405017" y="2143092"/>
+              <a:ext cx="0" cy="1317069"/>
             </a:xfrm>
             <a:custGeom>
               <a:avLst/>
               <a:pathLst>
-                <a:path w="0" h="3649639">
+                <a:path w="0" h="1317069">
                   <a:moveTo>
-                    <a:pt x="0" y="3649639"/>
+                    <a:pt x="0" y="1317069"/>
                   </a:moveTo>
                   <a:lnTo>
                     <a:pt x="0" y="0"/>
@@ -2480,21 +2515,21 @@
         </p:sp>
         <p:sp>
           <p:nvSpPr>
-            <p:cNvPr id="9" name="pl9"/>
-            <p:cNvSpPr/>
-            <p:nvPr/>
-          </p:nvSpPr>
-          <p:spPr>
-            <a:xfrm>
-              <a:off x="3085958" y="2073503"/>
-              <a:ext cx="0" cy="3649639"/>
+            <p:cNvPr id="10" name="pl10"/>
+            <p:cNvSpPr/>
+            <p:nvPr/>
+          </p:nvSpPr>
+          <p:spPr>
+            <a:xfrm>
+              <a:off x="3115069" y="2143092"/>
+              <a:ext cx="0" cy="1317069"/>
             </a:xfrm>
             <a:custGeom>
               <a:avLst/>
               <a:pathLst>
-                <a:path w="0" h="3649639">
+                <a:path w="0" h="1317069">
                   <a:moveTo>
-                    <a:pt x="0" y="3649639"/>
+                    <a:pt x="0" y="1317069"/>
                   </a:moveTo>
                   <a:lnTo>
                     <a:pt x="0" y="0"/>
@@ -2523,21 +2558,21 @@
         </p:sp>
         <p:sp>
           <p:nvSpPr>
-            <p:cNvPr id="10" name="pl10"/>
-            <p:cNvSpPr/>
-            <p:nvPr/>
-          </p:nvSpPr>
-          <p:spPr>
-            <a:xfrm>
-              <a:off x="4827079" y="2073503"/>
-              <a:ext cx="0" cy="3649639"/>
+            <p:cNvPr id="11" name="pl11"/>
+            <p:cNvSpPr/>
+            <p:nvPr/>
+          </p:nvSpPr>
+          <p:spPr>
+            <a:xfrm>
+              <a:off x="4825121" y="2143092"/>
+              <a:ext cx="0" cy="1317069"/>
             </a:xfrm>
             <a:custGeom>
               <a:avLst/>
               <a:pathLst>
-                <a:path w="0" h="3649639">
+                <a:path w="0" h="1317069">
                   <a:moveTo>
-                    <a:pt x="0" y="3649639"/>
+                    <a:pt x="0" y="1317069"/>
                   </a:moveTo>
                   <a:lnTo>
                     <a:pt x="0" y="0"/>
@@ -2566,21 +2601,21 @@
         </p:sp>
         <p:sp>
           <p:nvSpPr>
-            <p:cNvPr id="11" name="pl11"/>
-            <p:cNvSpPr/>
-            <p:nvPr/>
-          </p:nvSpPr>
-          <p:spPr>
-            <a:xfrm>
-              <a:off x="6568199" y="2073503"/>
-              <a:ext cx="0" cy="3649639"/>
+            <p:cNvPr id="12" name="pl12"/>
+            <p:cNvSpPr/>
+            <p:nvPr/>
+          </p:nvSpPr>
+          <p:spPr>
+            <a:xfrm>
+              <a:off x="6535173" y="2143092"/>
+              <a:ext cx="0" cy="1317069"/>
             </a:xfrm>
             <a:custGeom>
               <a:avLst/>
               <a:pathLst>
-                <a:path w="0" h="3649639">
+                <a:path w="0" h="1317069">
                   <a:moveTo>
-                    <a:pt x="0" y="3649639"/>
+                    <a:pt x="0" y="1317069"/>
                   </a:moveTo>
                   <a:lnTo>
                     <a:pt x="0" y="0"/>
@@ -2609,21 +2644,21 @@
         </p:sp>
         <p:sp>
           <p:nvSpPr>
-            <p:cNvPr id="12" name="pl12"/>
-            <p:cNvSpPr/>
-            <p:nvPr/>
-          </p:nvSpPr>
-          <p:spPr>
-            <a:xfrm>
-              <a:off x="8309320" y="2073503"/>
-              <a:ext cx="0" cy="3649639"/>
+            <p:cNvPr id="13" name="pl13"/>
+            <p:cNvSpPr/>
+            <p:nvPr/>
+          </p:nvSpPr>
+          <p:spPr>
+            <a:xfrm>
+              <a:off x="8245225" y="2143092"/>
+              <a:ext cx="0" cy="1317069"/>
             </a:xfrm>
             <a:custGeom>
               <a:avLst/>
               <a:pathLst>
-                <a:path w="0" h="3649639">
+                <a:path w="0" h="1317069">
                   <a:moveTo>
-                    <a:pt x="0" y="3649639"/>
+                    <a:pt x="0" y="1317069"/>
                   </a:moveTo>
                   <a:lnTo>
                     <a:pt x="0" y="0"/>
@@ -2652,27 +2687,27 @@
         </p:sp>
         <p:sp>
           <p:nvSpPr>
-            <p:cNvPr id="13" name="pl13"/>
-            <p:cNvSpPr/>
-            <p:nvPr/>
-          </p:nvSpPr>
-          <p:spPr>
-            <a:xfrm>
-              <a:off x="817517" y="5557249"/>
-              <a:ext cx="7799693" cy="0"/>
+            <p:cNvPr id="14" name="pl14"/>
+            <p:cNvSpPr/>
+            <p:nvPr/>
+          </p:nvSpPr>
+          <p:spPr>
+            <a:xfrm>
+              <a:off x="887106" y="3400294"/>
+              <a:ext cx="7660515" cy="0"/>
             </a:xfrm>
             <a:custGeom>
               <a:avLst/>
               <a:pathLst>
-                <a:path w="7799693" h="0">
+                <a:path w="7660515" h="0">
                   <a:moveTo>
                     <a:pt x="0" y="0"/>
                   </a:moveTo>
                   <a:lnTo>
-                    <a:pt x="7799693" y="0"/>
-                  </a:lnTo>
-                  <a:lnTo>
-                    <a:pt x="7799693" y="0"/>
+                    <a:pt x="7660515" y="0"/>
+                  </a:lnTo>
+                  <a:lnTo>
+                    <a:pt x="7660515" y="0"/>
                   </a:lnTo>
                 </a:path>
               </a:pathLst>
@@ -2695,27 +2730,27 @@
         </p:sp>
         <p:sp>
           <p:nvSpPr>
-            <p:cNvPr id="14" name="pl14"/>
-            <p:cNvSpPr/>
-            <p:nvPr/>
-          </p:nvSpPr>
-          <p:spPr>
-            <a:xfrm>
-              <a:off x="817517" y="4727786"/>
-              <a:ext cx="7799693" cy="0"/>
+            <p:cNvPr id="15" name="pl15"/>
+            <p:cNvSpPr/>
+            <p:nvPr/>
+          </p:nvSpPr>
+          <p:spPr>
+            <a:xfrm>
+              <a:off x="887106" y="3100960"/>
+              <a:ext cx="7660515" cy="0"/>
             </a:xfrm>
             <a:custGeom>
               <a:avLst/>
               <a:pathLst>
-                <a:path w="7799693" h="0">
+                <a:path w="7660515" h="0">
                   <a:moveTo>
                     <a:pt x="0" y="0"/>
                   </a:moveTo>
                   <a:lnTo>
-                    <a:pt x="7799693" y="0"/>
-                  </a:lnTo>
-                  <a:lnTo>
-                    <a:pt x="7799693" y="0"/>
+                    <a:pt x="7660515" y="0"/>
+                  </a:lnTo>
+                  <a:lnTo>
+                    <a:pt x="7660515" y="0"/>
                   </a:lnTo>
                 </a:path>
               </a:pathLst>
@@ -2738,27 +2773,27 @@
         </p:sp>
         <p:sp>
           <p:nvSpPr>
-            <p:cNvPr id="15" name="pl15"/>
-            <p:cNvSpPr/>
-            <p:nvPr/>
-          </p:nvSpPr>
-          <p:spPr>
-            <a:xfrm>
-              <a:off x="817517" y="3898322"/>
-              <a:ext cx="7799693" cy="0"/>
+            <p:cNvPr id="16" name="pl16"/>
+            <p:cNvSpPr/>
+            <p:nvPr/>
+          </p:nvSpPr>
+          <p:spPr>
+            <a:xfrm>
+              <a:off x="887106" y="2801626"/>
+              <a:ext cx="7660515" cy="0"/>
             </a:xfrm>
             <a:custGeom>
               <a:avLst/>
               <a:pathLst>
-                <a:path w="7799693" h="0">
+                <a:path w="7660515" h="0">
                   <a:moveTo>
                     <a:pt x="0" y="0"/>
                   </a:moveTo>
                   <a:lnTo>
-                    <a:pt x="7799693" y="0"/>
-                  </a:lnTo>
-                  <a:lnTo>
-                    <a:pt x="7799693" y="0"/>
+                    <a:pt x="7660515" y="0"/>
+                  </a:lnTo>
+                  <a:lnTo>
+                    <a:pt x="7660515" y="0"/>
                   </a:lnTo>
                 </a:path>
               </a:pathLst>
@@ -2781,27 +2816,27 @@
         </p:sp>
         <p:sp>
           <p:nvSpPr>
-            <p:cNvPr id="16" name="pl16"/>
-            <p:cNvSpPr/>
-            <p:nvPr/>
-          </p:nvSpPr>
-          <p:spPr>
-            <a:xfrm>
-              <a:off x="817517" y="3068859"/>
-              <a:ext cx="7799693" cy="0"/>
+            <p:cNvPr id="17" name="pl17"/>
+            <p:cNvSpPr/>
+            <p:nvPr/>
+          </p:nvSpPr>
+          <p:spPr>
+            <a:xfrm>
+              <a:off x="887106" y="2502292"/>
+              <a:ext cx="7660515" cy="0"/>
             </a:xfrm>
             <a:custGeom>
               <a:avLst/>
               <a:pathLst>
-                <a:path w="7799693" h="0">
+                <a:path w="7660515" h="0">
                   <a:moveTo>
                     <a:pt x="0" y="0"/>
                   </a:moveTo>
                   <a:lnTo>
-                    <a:pt x="7799693" y="0"/>
-                  </a:lnTo>
-                  <a:lnTo>
-                    <a:pt x="7799693" y="0"/>
+                    <a:pt x="7660515" y="0"/>
+                  </a:lnTo>
+                  <a:lnTo>
+                    <a:pt x="7660515" y="0"/>
                   </a:lnTo>
                 </a:path>
               </a:pathLst>
@@ -2824,27 +2859,27 @@
         </p:sp>
         <p:sp>
           <p:nvSpPr>
-            <p:cNvPr id="17" name="pl17"/>
-            <p:cNvSpPr/>
-            <p:nvPr/>
-          </p:nvSpPr>
-          <p:spPr>
-            <a:xfrm>
-              <a:off x="817517" y="2239395"/>
-              <a:ext cx="7799693" cy="0"/>
+            <p:cNvPr id="18" name="pl18"/>
+            <p:cNvSpPr/>
+            <p:nvPr/>
+          </p:nvSpPr>
+          <p:spPr>
+            <a:xfrm>
+              <a:off x="887106" y="2202958"/>
+              <a:ext cx="7660515" cy="0"/>
             </a:xfrm>
             <a:custGeom>
               <a:avLst/>
               <a:pathLst>
-                <a:path w="7799693" h="0">
+                <a:path w="7660515" h="0">
                   <a:moveTo>
                     <a:pt x="0" y="0"/>
                   </a:moveTo>
                   <a:lnTo>
-                    <a:pt x="7799693" y="0"/>
-                  </a:lnTo>
-                  <a:lnTo>
-                    <a:pt x="7799693" y="0"/>
+                    <a:pt x="7660515" y="0"/>
+                  </a:lnTo>
+                  <a:lnTo>
+                    <a:pt x="7660515" y="0"/>
                   </a:lnTo>
                 </a:path>
               </a:pathLst>
@@ -2867,21 +2902,21 @@
         </p:sp>
         <p:sp>
           <p:nvSpPr>
-            <p:cNvPr id="18" name="pl18"/>
-            <p:cNvSpPr/>
-            <p:nvPr/>
-          </p:nvSpPr>
-          <p:spPr>
-            <a:xfrm>
-              <a:off x="2215398" y="2073503"/>
-              <a:ext cx="0" cy="3649639"/>
+            <p:cNvPr id="19" name="pl19"/>
+            <p:cNvSpPr/>
+            <p:nvPr/>
+          </p:nvSpPr>
+          <p:spPr>
+            <a:xfrm>
+              <a:off x="2260043" y="2143092"/>
+              <a:ext cx="0" cy="1317069"/>
             </a:xfrm>
             <a:custGeom>
               <a:avLst/>
               <a:pathLst>
-                <a:path w="0" h="3649639">
+                <a:path w="0" h="1317069">
                   <a:moveTo>
-                    <a:pt x="0" y="3649639"/>
+                    <a:pt x="0" y="1317069"/>
                   </a:moveTo>
                   <a:lnTo>
                     <a:pt x="0" y="0"/>
@@ -2910,21 +2945,21 @@
         </p:sp>
         <p:sp>
           <p:nvSpPr>
-            <p:cNvPr id="19" name="pl19"/>
-            <p:cNvSpPr/>
-            <p:nvPr/>
-          </p:nvSpPr>
-          <p:spPr>
-            <a:xfrm>
-              <a:off x="3956518" y="2073503"/>
-              <a:ext cx="0" cy="3649639"/>
+            <p:cNvPr id="20" name="pl20"/>
+            <p:cNvSpPr/>
+            <p:nvPr/>
+          </p:nvSpPr>
+          <p:spPr>
+            <a:xfrm>
+              <a:off x="3970095" y="2143092"/>
+              <a:ext cx="0" cy="1317069"/>
             </a:xfrm>
             <a:custGeom>
               <a:avLst/>
               <a:pathLst>
-                <a:path w="0" h="3649639">
+                <a:path w="0" h="1317069">
                   <a:moveTo>
-                    <a:pt x="0" y="3649639"/>
+                    <a:pt x="0" y="1317069"/>
                   </a:moveTo>
                   <a:lnTo>
                     <a:pt x="0" y="0"/>
@@ -2953,21 +2988,21 @@
         </p:sp>
         <p:sp>
           <p:nvSpPr>
-            <p:cNvPr id="20" name="pl20"/>
-            <p:cNvSpPr/>
-            <p:nvPr/>
-          </p:nvSpPr>
-          <p:spPr>
-            <a:xfrm>
-              <a:off x="5697639" y="2073503"/>
-              <a:ext cx="0" cy="3649639"/>
+            <p:cNvPr id="21" name="pl21"/>
+            <p:cNvSpPr/>
+            <p:nvPr/>
+          </p:nvSpPr>
+          <p:spPr>
+            <a:xfrm>
+              <a:off x="5680147" y="2143092"/>
+              <a:ext cx="0" cy="1317069"/>
             </a:xfrm>
             <a:custGeom>
               <a:avLst/>
               <a:pathLst>
-                <a:path w="0" h="3649639">
+                <a:path w="0" h="1317069">
                   <a:moveTo>
-                    <a:pt x="0" y="3649639"/>
+                    <a:pt x="0" y="1317069"/>
                   </a:moveTo>
                   <a:lnTo>
                     <a:pt x="0" y="0"/>
@@ -2996,21 +3031,21 @@
         </p:sp>
         <p:sp>
           <p:nvSpPr>
-            <p:cNvPr id="21" name="pl21"/>
-            <p:cNvSpPr/>
-            <p:nvPr/>
-          </p:nvSpPr>
-          <p:spPr>
-            <a:xfrm>
-              <a:off x="7438760" y="2073503"/>
-              <a:ext cx="0" cy="3649639"/>
+            <p:cNvPr id="22" name="pl22"/>
+            <p:cNvSpPr/>
+            <p:nvPr/>
+          </p:nvSpPr>
+          <p:spPr>
+            <a:xfrm>
+              <a:off x="7390199" y="2143092"/>
+              <a:ext cx="0" cy="1317069"/>
             </a:xfrm>
             <a:custGeom>
               <a:avLst/>
               <a:pathLst>
-                <a:path w="0" h="3649639">
+                <a:path w="0" h="1317069">
                   <a:moveTo>
-                    <a:pt x="0" y="3649639"/>
+                    <a:pt x="0" y="1317069"/>
                   </a:moveTo>
                   <a:lnTo>
                     <a:pt x="0" y="0"/>
@@ -3039,534 +3074,531 @@
         </p:sp>
         <p:sp>
           <p:nvSpPr>
-            <p:cNvPr id="22" name="pg22"/>
-            <p:cNvSpPr/>
-            <p:nvPr/>
-          </p:nvSpPr>
-          <p:spPr>
-            <a:xfrm>
-              <a:off x="1172049" y="2073503"/>
-              <a:ext cx="7090630" cy="3480314"/>
+            <p:cNvPr id="23" name="pg23"/>
+            <p:cNvSpPr/>
+            <p:nvPr/>
+          </p:nvSpPr>
+          <p:spPr>
+            <a:xfrm>
+              <a:off x="1235312" y="2143092"/>
+              <a:ext cx="6964104" cy="1255963"/>
             </a:xfrm>
             <a:custGeom>
               <a:avLst/>
               <a:pathLst>
-                <a:path w="7090630" h="3480314">
+                <a:path w="6964104" h="1255963">
                   <a:moveTo>
-                    <a:pt x="2083249" y="0"/>
+                    <a:pt x="2046076" y="0"/>
                   </a:moveTo>
                   <a:lnTo>
-                    <a:pt x="2148675" y="302455"/>
-                  </a:lnTo>
-                  <a:lnTo>
-                    <a:pt x="2220298" y="602345"/>
-                  </a:lnTo>
-                  <a:lnTo>
-                    <a:pt x="2291920" y="873965"/>
-                  </a:lnTo>
-                  <a:lnTo>
-                    <a:pt x="2363543" y="1119980"/>
-                  </a:lnTo>
-                  <a:lnTo>
-                    <a:pt x="2435165" y="1342805"/>
-                  </a:lnTo>
-                  <a:lnTo>
-                    <a:pt x="2506788" y="1544624"/>
-                  </a:lnTo>
-                  <a:lnTo>
-                    <a:pt x="2578410" y="1727419"/>
-                  </a:lnTo>
-                  <a:lnTo>
-                    <a:pt x="2650033" y="1892982"/>
-                  </a:lnTo>
-                  <a:lnTo>
-                    <a:pt x="2721655" y="2042938"/>
-                  </a:lnTo>
-                  <a:lnTo>
-                    <a:pt x="2793278" y="2178758"/>
-                  </a:lnTo>
-                  <a:lnTo>
-                    <a:pt x="2864901" y="2301775"/>
-                  </a:lnTo>
-                  <a:lnTo>
-                    <a:pt x="2936523" y="2413195"/>
-                  </a:lnTo>
-                  <a:lnTo>
-                    <a:pt x="3008146" y="2514113"/>
-                  </a:lnTo>
-                  <a:lnTo>
-                    <a:pt x="3079768" y="2605517"/>
-                  </a:lnTo>
-                  <a:lnTo>
-                    <a:pt x="3151391" y="2663761"/>
-                  </a:lnTo>
-                  <a:lnTo>
-                    <a:pt x="3223013" y="2685740"/>
-                  </a:lnTo>
-                  <a:lnTo>
-                    <a:pt x="3294636" y="2707129"/>
-                  </a:lnTo>
-                  <a:lnTo>
-                    <a:pt x="3366258" y="2727946"/>
-                  </a:lnTo>
-                  <a:lnTo>
-                    <a:pt x="3437881" y="2748204"/>
-                  </a:lnTo>
-                  <a:lnTo>
-                    <a:pt x="3509503" y="2767919"/>
-                  </a:lnTo>
-                  <a:lnTo>
-                    <a:pt x="3581126" y="2787106"/>
-                  </a:lnTo>
-                  <a:lnTo>
-                    <a:pt x="3652748" y="2805779"/>
-                  </a:lnTo>
-                  <a:lnTo>
-                    <a:pt x="3724371" y="2823951"/>
-                  </a:lnTo>
-                  <a:lnTo>
-                    <a:pt x="3795993" y="2841636"/>
-                  </a:lnTo>
-                  <a:lnTo>
-                    <a:pt x="3867616" y="2858847"/>
-                  </a:lnTo>
-                  <a:lnTo>
-                    <a:pt x="3939238" y="2875597"/>
-                  </a:lnTo>
-                  <a:lnTo>
-                    <a:pt x="4010861" y="2891897"/>
-                  </a:lnTo>
-                  <a:lnTo>
-                    <a:pt x="4082483" y="2907761"/>
-                  </a:lnTo>
-                  <a:lnTo>
-                    <a:pt x="4154106" y="2923200"/>
-                  </a:lnTo>
-                  <a:lnTo>
-                    <a:pt x="4225729" y="2938224"/>
-                  </a:lnTo>
-                  <a:lnTo>
-                    <a:pt x="4297351" y="2952847"/>
-                  </a:lnTo>
-                  <a:lnTo>
-                    <a:pt x="4368974" y="2967077"/>
-                  </a:lnTo>
-                  <a:lnTo>
-                    <a:pt x="4440596" y="2980925"/>
-                  </a:lnTo>
-                  <a:lnTo>
-                    <a:pt x="4512219" y="2994403"/>
-                  </a:lnTo>
-                  <a:lnTo>
-                    <a:pt x="4583841" y="3007519"/>
-                  </a:lnTo>
-                  <a:lnTo>
-                    <a:pt x="4655464" y="3020284"/>
-                  </a:lnTo>
-                  <a:lnTo>
-                    <a:pt x="4727086" y="3032706"/>
-                  </a:lnTo>
-                  <a:lnTo>
-                    <a:pt x="4798709" y="3044796"/>
-                  </a:lnTo>
-                  <a:lnTo>
-                    <a:pt x="4870331" y="3056561"/>
-                  </a:lnTo>
-                  <a:lnTo>
-                    <a:pt x="4941954" y="3068012"/>
-                  </a:lnTo>
-                  <a:lnTo>
-                    <a:pt x="5013576" y="3079155"/>
-                  </a:lnTo>
-                  <a:lnTo>
-                    <a:pt x="5085199" y="3089999"/>
-                  </a:lnTo>
-                  <a:lnTo>
-                    <a:pt x="5156821" y="3100553"/>
-                  </a:lnTo>
-                  <a:lnTo>
-                    <a:pt x="5228444" y="3110824"/>
-                  </a:lnTo>
-                  <a:lnTo>
-                    <a:pt x="5300066" y="3120820"/>
-                  </a:lnTo>
-                  <a:lnTo>
-                    <a:pt x="5371689" y="3130548"/>
-                  </a:lnTo>
-                  <a:lnTo>
-                    <a:pt x="5443311" y="3140015"/>
-                  </a:lnTo>
-                  <a:lnTo>
-                    <a:pt x="5514934" y="3149228"/>
-                  </a:lnTo>
-                  <a:lnTo>
-                    <a:pt x="5586557" y="3158195"/>
-                  </a:lnTo>
-                  <a:lnTo>
-                    <a:pt x="5658179" y="3166921"/>
-                  </a:lnTo>
-                  <a:lnTo>
-                    <a:pt x="5729802" y="3175413"/>
-                  </a:lnTo>
-                  <a:lnTo>
-                    <a:pt x="5801424" y="3183677"/>
-                  </a:lnTo>
-                  <a:lnTo>
-                    <a:pt x="5873047" y="3191720"/>
-                  </a:lnTo>
-                  <a:lnTo>
-                    <a:pt x="5944669" y="3199548"/>
-                  </a:lnTo>
-                  <a:lnTo>
-                    <a:pt x="6016292" y="3207165"/>
-                  </a:lnTo>
-                  <a:lnTo>
-                    <a:pt x="6087914" y="3214579"/>
-                  </a:lnTo>
-                  <a:lnTo>
-                    <a:pt x="6159537" y="3221793"/>
-                  </a:lnTo>
-                  <a:lnTo>
-                    <a:pt x="6231159" y="3228815"/>
-                  </a:lnTo>
-                  <a:lnTo>
-                    <a:pt x="6302782" y="3235648"/>
-                  </a:lnTo>
-                  <a:lnTo>
-                    <a:pt x="6374404" y="3242298"/>
-                  </a:lnTo>
-                  <a:lnTo>
-                    <a:pt x="6446027" y="3248770"/>
-                  </a:lnTo>
-                  <a:lnTo>
-                    <a:pt x="6517649" y="3255068"/>
-                  </a:lnTo>
-                  <a:lnTo>
-                    <a:pt x="6589272" y="3261197"/>
-                  </a:lnTo>
-                  <a:lnTo>
-                    <a:pt x="6660894" y="3267162"/>
-                  </a:lnTo>
-                  <a:lnTo>
-                    <a:pt x="6732517" y="3272968"/>
-                  </a:lnTo>
-                  <a:lnTo>
-                    <a:pt x="6804139" y="3278617"/>
-                  </a:lnTo>
-                  <a:lnTo>
-                    <a:pt x="6875762" y="3284116"/>
-                  </a:lnTo>
-                  <a:lnTo>
-                    <a:pt x="6947385" y="3289467"/>
-                  </a:lnTo>
-                  <a:lnTo>
-                    <a:pt x="7019007" y="3294674"/>
-                  </a:lnTo>
-                  <a:lnTo>
-                    <a:pt x="7090630" y="3299742"/>
-                  </a:lnTo>
-                  <a:lnTo>
-                    <a:pt x="7090630" y="3480314"/>
-                  </a:lnTo>
-                  <a:lnTo>
-                    <a:pt x="7019007" y="3479957"/>
-                  </a:lnTo>
-                  <a:lnTo>
-                    <a:pt x="6947385" y="3479562"/>
-                  </a:lnTo>
-                  <a:lnTo>
-                    <a:pt x="6875762" y="3479127"/>
-                  </a:lnTo>
-                  <a:lnTo>
-                    <a:pt x="6804139" y="3478646"/>
-                  </a:lnTo>
-                  <a:lnTo>
-                    <a:pt x="6732517" y="3478115"/>
-                  </a:lnTo>
-                  <a:lnTo>
-                    <a:pt x="6660894" y="3477529"/>
-                  </a:lnTo>
-                  <a:lnTo>
-                    <a:pt x="6589272" y="3476882"/>
-                  </a:lnTo>
-                  <a:lnTo>
-                    <a:pt x="6517649" y="3476167"/>
-                  </a:lnTo>
-                  <a:lnTo>
-                    <a:pt x="6446027" y="3475378"/>
-                  </a:lnTo>
-                  <a:lnTo>
-                    <a:pt x="6374404" y="3474507"/>
-                  </a:lnTo>
-                  <a:lnTo>
-                    <a:pt x="6302782" y="3473546"/>
-                  </a:lnTo>
-                  <a:lnTo>
-                    <a:pt x="6231159" y="3472484"/>
-                  </a:lnTo>
-                  <a:lnTo>
-                    <a:pt x="6159537" y="3471312"/>
-                  </a:lnTo>
-                  <a:lnTo>
-                    <a:pt x="6087914" y="3470018"/>
-                  </a:lnTo>
-                  <a:lnTo>
-                    <a:pt x="6016292" y="3468589"/>
-                  </a:lnTo>
-                  <a:lnTo>
-                    <a:pt x="5944669" y="3467012"/>
-                  </a:lnTo>
-                  <a:lnTo>
-                    <a:pt x="5873047" y="3465270"/>
-                  </a:lnTo>
-                  <a:lnTo>
-                    <a:pt x="5801424" y="3463347"/>
-                  </a:lnTo>
-                  <a:lnTo>
-                    <a:pt x="5729802" y="3461224"/>
-                  </a:lnTo>
-                  <a:lnTo>
-                    <a:pt x="5658179" y="3458880"/>
-                  </a:lnTo>
-                  <a:lnTo>
-                    <a:pt x="5586557" y="3456291"/>
-                  </a:lnTo>
-                  <a:lnTo>
-                    <a:pt x="5514934" y="3453434"/>
-                  </a:lnTo>
-                  <a:lnTo>
-                    <a:pt x="5443311" y="3450279"/>
-                  </a:lnTo>
-                  <a:lnTo>
-                    <a:pt x="5371689" y="3446796"/>
-                  </a:lnTo>
-                  <a:lnTo>
-                    <a:pt x="5300066" y="3442950"/>
-                  </a:lnTo>
-                  <a:lnTo>
-                    <a:pt x="5228444" y="3438704"/>
-                  </a:lnTo>
-                  <a:lnTo>
-                    <a:pt x="5156821" y="3434016"/>
-                  </a:lnTo>
-                  <a:lnTo>
-                    <a:pt x="5085199" y="3428841"/>
-                  </a:lnTo>
-                  <a:lnTo>
-                    <a:pt x="5013576" y="3423126"/>
-                  </a:lnTo>
-                  <a:lnTo>
-                    <a:pt x="4941954" y="3416817"/>
-                  </a:lnTo>
-                  <a:lnTo>
-                    <a:pt x="4870331" y="3409851"/>
-                  </a:lnTo>
-                  <a:lnTo>
-                    <a:pt x="4798709" y="3402160"/>
-                  </a:lnTo>
-                  <a:lnTo>
-                    <a:pt x="4727086" y="3393669"/>
-                  </a:lnTo>
-                  <a:lnTo>
-                    <a:pt x="4655464" y="3384294"/>
-                  </a:lnTo>
-                  <a:lnTo>
-                    <a:pt x="4583841" y="3373943"/>
-                  </a:lnTo>
-                  <a:lnTo>
-                    <a:pt x="4512219" y="3362515"/>
-                  </a:lnTo>
-                  <a:lnTo>
-                    <a:pt x="4440596" y="3349898"/>
-                  </a:lnTo>
-                  <a:lnTo>
-                    <a:pt x="4368974" y="3335967"/>
-                  </a:lnTo>
-                  <a:lnTo>
-                    <a:pt x="4297351" y="3320586"/>
-                  </a:lnTo>
-                  <a:lnTo>
-                    <a:pt x="4225729" y="3303605"/>
-                  </a:lnTo>
-                  <a:lnTo>
-                    <a:pt x="4154106" y="3284856"/>
-                  </a:lnTo>
-                  <a:lnTo>
-                    <a:pt x="4082483" y="3264156"/>
-                  </a:lnTo>
-                  <a:lnTo>
-                    <a:pt x="4010861" y="3241302"/>
-                  </a:lnTo>
-                  <a:lnTo>
-                    <a:pt x="3939238" y="3216069"/>
-                  </a:lnTo>
-                  <a:lnTo>
-                    <a:pt x="3867616" y="3188209"/>
-                  </a:lnTo>
-                  <a:lnTo>
-                    <a:pt x="3795993" y="3157451"/>
-                  </a:lnTo>
-                  <a:lnTo>
-                    <a:pt x="3724371" y="3123490"/>
-                  </a:lnTo>
-                  <a:lnTo>
-                    <a:pt x="3652748" y="3085996"/>
-                  </a:lnTo>
-                  <a:lnTo>
-                    <a:pt x="3581126" y="3044599"/>
-                  </a:lnTo>
-                  <a:lnTo>
-                    <a:pt x="3509503" y="2998893"/>
-                  </a:lnTo>
-                  <a:lnTo>
-                    <a:pt x="3437881" y="2948431"/>
-                  </a:lnTo>
-                  <a:lnTo>
-                    <a:pt x="3366258" y="2892717"/>
-                  </a:lnTo>
-                  <a:lnTo>
-                    <a:pt x="3294636" y="2831203"/>
-                  </a:lnTo>
-                  <a:lnTo>
-                    <a:pt x="3223013" y="2763288"/>
-                  </a:lnTo>
-                  <a:lnTo>
-                    <a:pt x="3151391" y="2688305"/>
-                  </a:lnTo>
-                  <a:lnTo>
-                    <a:pt x="3079768" y="2641177"/>
-                  </a:lnTo>
-                  <a:lnTo>
-                    <a:pt x="3008146" y="2617971"/>
-                  </a:lnTo>
-                  <a:lnTo>
-                    <a:pt x="2936523" y="2594126"/>
-                  </a:lnTo>
-                  <a:lnTo>
-                    <a:pt x="2864901" y="2569624"/>
-                  </a:lnTo>
-                  <a:lnTo>
-                    <a:pt x="2793278" y="2544447"/>
-                  </a:lnTo>
-                  <a:lnTo>
-                    <a:pt x="2721655" y="2518577"/>
-                  </a:lnTo>
-                  <a:lnTo>
-                    <a:pt x="2650033" y="2491994"/>
-                  </a:lnTo>
-                  <a:lnTo>
-                    <a:pt x="2578410" y="2464679"/>
-                  </a:lnTo>
-                  <a:lnTo>
-                    <a:pt x="2506788" y="2436612"/>
-                  </a:lnTo>
-                  <a:lnTo>
-                    <a:pt x="2435165" y="2407772"/>
-                  </a:lnTo>
-                  <a:lnTo>
-                    <a:pt x="2363543" y="2378137"/>
-                  </a:lnTo>
-                  <a:lnTo>
-                    <a:pt x="2291920" y="2347687"/>
-                  </a:lnTo>
-                  <a:lnTo>
-                    <a:pt x="2220298" y="2316397"/>
-                  </a:lnTo>
-                  <a:lnTo>
-                    <a:pt x="2148675" y="2284246"/>
-                  </a:lnTo>
-                  <a:lnTo>
-                    <a:pt x="2077053" y="2251210"/>
-                  </a:lnTo>
-                  <a:lnTo>
-                    <a:pt x="2005430" y="2217263"/>
-                  </a:lnTo>
-                  <a:lnTo>
-                    <a:pt x="1933808" y="2182382"/>
-                  </a:lnTo>
-                  <a:lnTo>
-                    <a:pt x="1862185" y="2146539"/>
-                  </a:lnTo>
-                  <a:lnTo>
-                    <a:pt x="1790563" y="2109710"/>
-                  </a:lnTo>
-                  <a:lnTo>
-                    <a:pt x="1718940" y="2071866"/>
-                  </a:lnTo>
-                  <a:lnTo>
-                    <a:pt x="1647318" y="2032980"/>
-                  </a:lnTo>
-                  <a:lnTo>
-                    <a:pt x="1575695" y="1993023"/>
-                  </a:lnTo>
-                  <a:lnTo>
-                    <a:pt x="1504073" y="1951966"/>
-                  </a:lnTo>
-                  <a:lnTo>
-                    <a:pt x="1432450" y="1909777"/>
-                  </a:lnTo>
-                  <a:lnTo>
-                    <a:pt x="1360827" y="1866427"/>
-                  </a:lnTo>
-                  <a:lnTo>
-                    <a:pt x="1289205" y="1821883"/>
-                  </a:lnTo>
-                  <a:lnTo>
-                    <a:pt x="1217582" y="1776112"/>
-                  </a:lnTo>
-                  <a:lnTo>
-                    <a:pt x="1145960" y="1729080"/>
-                  </a:lnTo>
-                  <a:lnTo>
-                    <a:pt x="1074337" y="1680753"/>
-                  </a:lnTo>
-                  <a:lnTo>
-                    <a:pt x="1002715" y="1631095"/>
-                  </a:lnTo>
-                  <a:lnTo>
-                    <a:pt x="931092" y="1580069"/>
-                  </a:lnTo>
-                  <a:lnTo>
-                    <a:pt x="859470" y="1527638"/>
-                  </a:lnTo>
-                  <a:lnTo>
-                    <a:pt x="787847" y="1473763"/>
-                  </a:lnTo>
-                  <a:lnTo>
-                    <a:pt x="716225" y="1418404"/>
-                  </a:lnTo>
-                  <a:lnTo>
-                    <a:pt x="644602" y="1361520"/>
-                  </a:lnTo>
-                  <a:lnTo>
-                    <a:pt x="572980" y="1303070"/>
-                  </a:lnTo>
-                  <a:lnTo>
-                    <a:pt x="501357" y="1243010"/>
-                  </a:lnTo>
-                  <a:lnTo>
-                    <a:pt x="429735" y="1181295"/>
-                  </a:lnTo>
-                  <a:lnTo>
-                    <a:pt x="358112" y="1117881"/>
-                  </a:lnTo>
-                  <a:lnTo>
-                    <a:pt x="286490" y="1052720"/>
-                  </a:lnTo>
-                  <a:lnTo>
-                    <a:pt x="214867" y="985765"/>
-                  </a:lnTo>
-                  <a:lnTo>
-                    <a:pt x="143245" y="916966"/>
-                  </a:lnTo>
-                  <a:lnTo>
-                    <a:pt x="71622" y="846271"/>
-                  </a:lnTo>
-                  <a:lnTo>
-                    <a:pt x="0" y="773630"/>
-                  </a:lnTo>
-                  <a:lnTo>
-                    <a:pt x="0" y="0"/>
+                    <a:pt x="2110334" y="109149"/>
+                  </a:lnTo>
+                  <a:lnTo>
+                    <a:pt x="2180679" y="217372"/>
+                  </a:lnTo>
+                  <a:lnTo>
+                    <a:pt x="2251023" y="315393"/>
+                  </a:lnTo>
+                  <a:lnTo>
+                    <a:pt x="2321368" y="404174"/>
+                  </a:lnTo>
+                  <a:lnTo>
+                    <a:pt x="2391712" y="484586"/>
+                  </a:lnTo>
+                  <a:lnTo>
+                    <a:pt x="2462057" y="557418"/>
+                  </a:lnTo>
+                  <a:lnTo>
+                    <a:pt x="2532401" y="623384"/>
+                  </a:lnTo>
+                  <a:lnTo>
+                    <a:pt x="2602746" y="683132"/>
+                  </a:lnTo>
+                  <a:lnTo>
+                    <a:pt x="2673090" y="737248"/>
+                  </a:lnTo>
+                  <a:lnTo>
+                    <a:pt x="2743435" y="786262"/>
+                  </a:lnTo>
+                  <a:lnTo>
+                    <a:pt x="2813779" y="830656"/>
+                  </a:lnTo>
+                  <a:lnTo>
+                    <a:pt x="2884124" y="870865"/>
+                  </a:lnTo>
+                  <a:lnTo>
+                    <a:pt x="2954468" y="907284"/>
+                  </a:lnTo>
+                  <a:lnTo>
+                    <a:pt x="3024813" y="940269"/>
+                  </a:lnTo>
+                  <a:lnTo>
+                    <a:pt x="3095157" y="961288"/>
+                  </a:lnTo>
+                  <a:lnTo>
+                    <a:pt x="3165502" y="969220"/>
+                  </a:lnTo>
+                  <a:lnTo>
+                    <a:pt x="3235846" y="976939"/>
+                  </a:lnTo>
+                  <a:lnTo>
+                    <a:pt x="3306191" y="984451"/>
+                  </a:lnTo>
+                  <a:lnTo>
+                    <a:pt x="3376535" y="991762"/>
+                  </a:lnTo>
+                  <a:lnTo>
+                    <a:pt x="3446880" y="998877"/>
+                  </a:lnTo>
+                  <a:lnTo>
+                    <a:pt x="3517224" y="1005801"/>
+                  </a:lnTo>
+                  <a:lnTo>
+                    <a:pt x="3587569" y="1012539"/>
+                  </a:lnTo>
+                  <a:lnTo>
+                    <a:pt x="3657913" y="1019097"/>
+                  </a:lnTo>
+                  <a:lnTo>
+                    <a:pt x="3728257" y="1025479"/>
+                  </a:lnTo>
+                  <a:lnTo>
+                    <a:pt x="3798602" y="1031690"/>
+                  </a:lnTo>
+                  <a:lnTo>
+                    <a:pt x="3868946" y="1037735"/>
+                  </a:lnTo>
+                  <a:lnTo>
+                    <a:pt x="3939291" y="1043617"/>
+                  </a:lnTo>
+                  <a:lnTo>
+                    <a:pt x="4009635" y="1049342"/>
+                  </a:lnTo>
+                  <a:lnTo>
+                    <a:pt x="4079980" y="1054914"/>
+                  </a:lnTo>
+                  <a:lnTo>
+                    <a:pt x="4150324" y="1060336"/>
+                  </a:lnTo>
+                  <a:lnTo>
+                    <a:pt x="4220669" y="1065613"/>
+                  </a:lnTo>
+                  <a:lnTo>
+                    <a:pt x="4291013" y="1070748"/>
+                  </a:lnTo>
+                  <a:lnTo>
+                    <a:pt x="4361358" y="1075746"/>
+                  </a:lnTo>
+                  <a:lnTo>
+                    <a:pt x="4431702" y="1080609"/>
+                  </a:lnTo>
+                  <a:lnTo>
+                    <a:pt x="4502047" y="1085343"/>
+                  </a:lnTo>
+                  <a:lnTo>
+                    <a:pt x="4572391" y="1089949"/>
+                  </a:lnTo>
+                  <a:lnTo>
+                    <a:pt x="4642736" y="1094432"/>
+                  </a:lnTo>
+                  <a:lnTo>
+                    <a:pt x="4713080" y="1098795"/>
+                  </a:lnTo>
+                  <a:lnTo>
+                    <a:pt x="4783425" y="1103041"/>
+                  </a:lnTo>
+                  <a:lnTo>
+                    <a:pt x="4853769" y="1107173"/>
+                  </a:lnTo>
+                  <a:lnTo>
+                    <a:pt x="4924114" y="1111194"/>
+                  </a:lnTo>
+                  <a:lnTo>
+                    <a:pt x="4994458" y="1115108"/>
+                  </a:lnTo>
+                  <a:lnTo>
+                    <a:pt x="5064803" y="1118916"/>
+                  </a:lnTo>
+                  <a:lnTo>
+                    <a:pt x="5135147" y="1122623"/>
+                  </a:lnTo>
+                  <a:lnTo>
+                    <a:pt x="5205492" y="1126230"/>
+                  </a:lnTo>
+                  <a:lnTo>
+                    <a:pt x="5275836" y="1129741"/>
+                  </a:lnTo>
+                  <a:lnTo>
+                    <a:pt x="5346181" y="1133157"/>
+                  </a:lnTo>
+                  <a:lnTo>
+                    <a:pt x="5416525" y="1136482"/>
+                  </a:lnTo>
+                  <a:lnTo>
+                    <a:pt x="5486870" y="1139718"/>
+                  </a:lnTo>
+                  <a:lnTo>
+                    <a:pt x="5557214" y="1142867"/>
+                  </a:lnTo>
+                  <a:lnTo>
+                    <a:pt x="5627559" y="1145931"/>
+                  </a:lnTo>
+                  <a:lnTo>
+                    <a:pt x="5697903" y="1148914"/>
+                  </a:lnTo>
+                  <a:lnTo>
+                    <a:pt x="5768248" y="1151816"/>
+                  </a:lnTo>
+                  <a:lnTo>
+                    <a:pt x="5838592" y="1154641"/>
+                  </a:lnTo>
+                  <a:lnTo>
+                    <a:pt x="5908937" y="1157390"/>
+                  </a:lnTo>
+                  <a:lnTo>
+                    <a:pt x="5979281" y="1160066"/>
+                  </a:lnTo>
+                  <a:lnTo>
+                    <a:pt x="6049626" y="1162669"/>
+                  </a:lnTo>
+                  <a:lnTo>
+                    <a:pt x="6119970" y="1165203"/>
+                  </a:lnTo>
+                  <a:lnTo>
+                    <a:pt x="6190315" y="1167669"/>
+                  </a:lnTo>
+                  <a:lnTo>
+                    <a:pt x="6260659" y="1170069"/>
+                  </a:lnTo>
+                  <a:lnTo>
+                    <a:pt x="6331004" y="1172404"/>
+                  </a:lnTo>
+                  <a:lnTo>
+                    <a:pt x="6401348" y="1174677"/>
+                  </a:lnTo>
+                  <a:lnTo>
+                    <a:pt x="6471693" y="1176889"/>
+                  </a:lnTo>
+                  <a:lnTo>
+                    <a:pt x="6542037" y="1179042"/>
+                  </a:lnTo>
+                  <a:lnTo>
+                    <a:pt x="6612382" y="1181137"/>
+                  </a:lnTo>
+                  <a:lnTo>
+                    <a:pt x="6682726" y="1183176"/>
+                  </a:lnTo>
+                  <a:lnTo>
+                    <a:pt x="6753071" y="1185160"/>
+                  </a:lnTo>
+                  <a:lnTo>
+                    <a:pt x="6823415" y="1187091"/>
+                  </a:lnTo>
+                  <a:lnTo>
+                    <a:pt x="6893760" y="1188970"/>
+                  </a:lnTo>
+                  <a:lnTo>
+                    <a:pt x="6964104" y="1190799"/>
+                  </a:lnTo>
+                  <a:lnTo>
+                    <a:pt x="6964104" y="1255963"/>
+                  </a:lnTo>
+                  <a:lnTo>
+                    <a:pt x="6893760" y="1255834"/>
+                  </a:lnTo>
+                  <a:lnTo>
+                    <a:pt x="6823415" y="1255692"/>
+                  </a:lnTo>
+                  <a:lnTo>
+                    <a:pt x="6753071" y="1255535"/>
+                  </a:lnTo>
+                  <a:lnTo>
+                    <a:pt x="6682726" y="1255361"/>
+                  </a:lnTo>
+                  <a:lnTo>
+                    <a:pt x="6612382" y="1255170"/>
+                  </a:lnTo>
+                  <a:lnTo>
+                    <a:pt x="6542037" y="1254958"/>
+                  </a:lnTo>
+                  <a:lnTo>
+                    <a:pt x="6471693" y="1254724"/>
+                  </a:lnTo>
+                  <a:lnTo>
+                    <a:pt x="6401348" y="1254467"/>
+                  </a:lnTo>
+                  <a:lnTo>
+                    <a:pt x="6331004" y="1254182"/>
+                  </a:lnTo>
+                  <a:lnTo>
+                    <a:pt x="6260659" y="1253868"/>
+                  </a:lnTo>
+                  <a:lnTo>
+                    <a:pt x="6190315" y="1253521"/>
+                  </a:lnTo>
+                  <a:lnTo>
+                    <a:pt x="6119970" y="1253138"/>
+                  </a:lnTo>
+                  <a:lnTo>
+                    <a:pt x="6049626" y="1252715"/>
+                  </a:lnTo>
+                  <a:lnTo>
+                    <a:pt x="5979281" y="1252248"/>
+                  </a:lnTo>
+                  <a:lnTo>
+                    <a:pt x="5908937" y="1251732"/>
+                  </a:lnTo>
+                  <a:lnTo>
+                    <a:pt x="5838592" y="1251163"/>
+                  </a:lnTo>
+                  <a:lnTo>
+                    <a:pt x="5768248" y="1250534"/>
+                  </a:lnTo>
+                  <a:lnTo>
+                    <a:pt x="5697903" y="1249840"/>
+                  </a:lnTo>
+                  <a:lnTo>
+                    <a:pt x="5627559" y="1249074"/>
+                  </a:lnTo>
+                  <a:lnTo>
+                    <a:pt x="5557214" y="1248228"/>
+                  </a:lnTo>
+                  <a:lnTo>
+                    <a:pt x="5486870" y="1247294"/>
+                  </a:lnTo>
+                  <a:lnTo>
+                    <a:pt x="5416525" y="1246263"/>
+                  </a:lnTo>
+                  <a:lnTo>
+                    <a:pt x="5346181" y="1245124"/>
+                  </a:lnTo>
+                  <a:lnTo>
+                    <a:pt x="5275836" y="1243867"/>
+                  </a:lnTo>
+                  <a:lnTo>
+                    <a:pt x="5205492" y="1242479"/>
+                  </a:lnTo>
+                  <a:lnTo>
+                    <a:pt x="5135147" y="1240947"/>
+                  </a:lnTo>
+                  <a:lnTo>
+                    <a:pt x="5064803" y="1239255"/>
+                  </a:lnTo>
+                  <a:lnTo>
+                    <a:pt x="4994458" y="1237388"/>
+                  </a:lnTo>
+                  <a:lnTo>
+                    <a:pt x="4924114" y="1235325"/>
+                  </a:lnTo>
+                  <a:lnTo>
+                    <a:pt x="4853769" y="1233049"/>
+                  </a:lnTo>
+                  <a:lnTo>
+                    <a:pt x="4783425" y="1230535"/>
+                  </a:lnTo>
+                  <a:lnTo>
+                    <a:pt x="4713080" y="1227759"/>
+                  </a:lnTo>
+                  <a:lnTo>
+                    <a:pt x="4642736" y="1224695"/>
+                  </a:lnTo>
+                  <a:lnTo>
+                    <a:pt x="4572391" y="1221312"/>
+                  </a:lnTo>
+                  <a:lnTo>
+                    <a:pt x="4502047" y="1217576"/>
+                  </a:lnTo>
+                  <a:lnTo>
+                    <a:pt x="4431702" y="1213452"/>
+                  </a:lnTo>
+                  <a:lnTo>
+                    <a:pt x="4361358" y="1208899"/>
+                  </a:lnTo>
+                  <a:lnTo>
+                    <a:pt x="4291013" y="1203872"/>
+                  </a:lnTo>
+                  <a:lnTo>
+                    <a:pt x="4220669" y="1198321"/>
+                  </a:lnTo>
+                  <a:lnTo>
+                    <a:pt x="4150324" y="1192193"/>
+                  </a:lnTo>
+                  <a:lnTo>
+                    <a:pt x="4079980" y="1185427"/>
+                  </a:lnTo>
+                  <a:lnTo>
+                    <a:pt x="4009635" y="1177957"/>
+                  </a:lnTo>
+                  <a:lnTo>
+                    <a:pt x="3939291" y="1169709"/>
+                  </a:lnTo>
+                  <a:lnTo>
+                    <a:pt x="3868946" y="1160603"/>
+                  </a:lnTo>
+                  <a:lnTo>
+                    <a:pt x="3798602" y="1150549"/>
+                  </a:lnTo>
+                  <a:lnTo>
+                    <a:pt x="3728257" y="1139449"/>
+                  </a:lnTo>
+                  <a:lnTo>
+                    <a:pt x="3657913" y="1127194"/>
+                  </a:lnTo>
+                  <a:lnTo>
+                    <a:pt x="3587569" y="1113663"/>
+                  </a:lnTo>
+                  <a:lnTo>
+                    <a:pt x="3517224" y="1098724"/>
+                  </a:lnTo>
+                  <a:lnTo>
+                    <a:pt x="3446880" y="1082230"/>
+                  </a:lnTo>
+                  <a:lnTo>
+                    <a:pt x="3376535" y="1064019"/>
+                  </a:lnTo>
+                  <a:lnTo>
+                    <a:pt x="3306191" y="1043913"/>
+                  </a:lnTo>
+                  <a:lnTo>
+                    <a:pt x="3235846" y="1021714"/>
+                  </a:lnTo>
+                  <a:lnTo>
+                    <a:pt x="3165502" y="997205"/>
+                  </a:lnTo>
+                  <a:lnTo>
+                    <a:pt x="3095157" y="970146"/>
+                  </a:lnTo>
+                  <a:lnTo>
+                    <a:pt x="3024813" y="953138"/>
+                  </a:lnTo>
+                  <a:lnTo>
+                    <a:pt x="2954468" y="944764"/>
+                  </a:lnTo>
+                  <a:lnTo>
+                    <a:pt x="2884124" y="936159"/>
+                  </a:lnTo>
+                  <a:lnTo>
+                    <a:pt x="2813779" y="927316"/>
+                  </a:lnTo>
+                  <a:lnTo>
+                    <a:pt x="2743435" y="918231"/>
+                  </a:lnTo>
+                  <a:lnTo>
+                    <a:pt x="2673090" y="908895"/>
+                  </a:lnTo>
+                  <a:lnTo>
+                    <a:pt x="2602746" y="899302"/>
+                  </a:lnTo>
+                  <a:lnTo>
+                    <a:pt x="2532401" y="889444"/>
+                  </a:lnTo>
+                  <a:lnTo>
+                    <a:pt x="2462057" y="879316"/>
+                  </a:lnTo>
+                  <a:lnTo>
+                    <a:pt x="2391712" y="868908"/>
+                  </a:lnTo>
+                  <a:lnTo>
+                    <a:pt x="2321368" y="858214"/>
+                  </a:lnTo>
+                  <a:lnTo>
+                    <a:pt x="2251023" y="847225"/>
+                  </a:lnTo>
+                  <a:lnTo>
+                    <a:pt x="2180679" y="835933"/>
+                  </a:lnTo>
+                  <a:lnTo>
+                    <a:pt x="2110334" y="824330"/>
+                  </a:lnTo>
+                  <a:lnTo>
+                    <a:pt x="2039990" y="812408"/>
+                  </a:lnTo>
+                  <a:lnTo>
+                    <a:pt x="1969645" y="800158"/>
+                  </a:lnTo>
+                  <a:lnTo>
+                    <a:pt x="1899301" y="787570"/>
+                  </a:lnTo>
+                  <a:lnTo>
+                    <a:pt x="1828956" y="774635"/>
+                  </a:lnTo>
+                  <a:lnTo>
+                    <a:pt x="1758612" y="761344"/>
+                  </a:lnTo>
+                  <a:lnTo>
+                    <a:pt x="1688267" y="747687"/>
+                  </a:lnTo>
+                  <a:lnTo>
+                    <a:pt x="1617923" y="733654"/>
+                  </a:lnTo>
+                  <a:lnTo>
+                    <a:pt x="1547578" y="719235"/>
+                  </a:lnTo>
+                  <a:lnTo>
+                    <a:pt x="1477234" y="704418"/>
+                  </a:lnTo>
+                  <a:lnTo>
+                    <a:pt x="1406889" y="689193"/>
+                  </a:lnTo>
+                  <a:lnTo>
+                    <a:pt x="1336545" y="673549"/>
+                  </a:lnTo>
+                  <a:lnTo>
+                    <a:pt x="1266200" y="657474"/>
+                  </a:lnTo>
+                  <a:lnTo>
+                    <a:pt x="1195856" y="640957"/>
+                  </a:lnTo>
+                  <a:lnTo>
+                    <a:pt x="1125511" y="623984"/>
+                  </a:lnTo>
+                  <a:lnTo>
+                    <a:pt x="1055167" y="606544"/>
+                  </a:lnTo>
+                  <a:lnTo>
+                    <a:pt x="984822" y="588623"/>
+                  </a:lnTo>
+                  <a:lnTo>
+                    <a:pt x="914478" y="570209"/>
+                  </a:lnTo>
+                  <a:lnTo>
+                    <a:pt x="844133" y="551288"/>
+                  </a:lnTo>
+                  <a:lnTo>
+                    <a:pt x="773789" y="531846"/>
+                  </a:lnTo>
+                  <a:lnTo>
+                    <a:pt x="703444" y="511868"/>
+                  </a:lnTo>
+                  <a:lnTo>
+                    <a:pt x="633100" y="491340"/>
+                  </a:lnTo>
+                  <a:lnTo>
+                    <a:pt x="562755" y="470247"/>
+                  </a:lnTo>
+                  <a:lnTo>
+                    <a:pt x="492411" y="448573"/>
+                  </a:lnTo>
+                  <a:lnTo>
+                    <a:pt x="422066" y="426301"/>
+                  </a:lnTo>
+                  <a:lnTo>
+                    <a:pt x="351722" y="403417"/>
+                  </a:lnTo>
+                  <a:lnTo>
+                    <a:pt x="281377" y="379902"/>
+                  </a:lnTo>
+                  <a:lnTo>
+                    <a:pt x="211033" y="355739"/>
+                  </a:lnTo>
+                  <a:lnTo>
+                    <a:pt x="140688" y="330911"/>
+                  </a:lnTo>
+                  <a:lnTo>
+                    <a:pt x="70344" y="305399"/>
+                  </a:lnTo>
+                  <a:lnTo>
+                    <a:pt x="0" y="279185"/>
                   </a:lnTo>
                   <a:close/>
                 </a:path>
@@ -3586,231 +3618,231 @@
         </p:sp>
         <p:sp>
           <p:nvSpPr>
-            <p:cNvPr id="23" name="pl23"/>
-            <p:cNvSpPr/>
-            <p:nvPr/>
-          </p:nvSpPr>
-          <p:spPr>
-            <a:xfrm>
-              <a:off x="3255299" y="2073503"/>
-              <a:ext cx="5007380" cy="3299742"/>
+            <p:cNvPr id="24" name="pl24"/>
+            <p:cNvSpPr/>
+            <p:nvPr/>
+          </p:nvSpPr>
+          <p:spPr>
+            <a:xfrm>
+              <a:off x="3281388" y="2143092"/>
+              <a:ext cx="4918028" cy="1190799"/>
             </a:xfrm>
             <a:custGeom>
               <a:avLst/>
               <a:pathLst>
-                <a:path w="5007380" h="3299742">
+                <a:path w="4918028" h="1190799">
                   <a:moveTo>
                     <a:pt x="0" y="0"/>
                   </a:moveTo>
                   <a:lnTo>
-                    <a:pt x="65425" y="302455"/>
-                  </a:lnTo>
-                  <a:lnTo>
-                    <a:pt x="137048" y="602345"/>
-                  </a:lnTo>
-                  <a:lnTo>
-                    <a:pt x="208671" y="873965"/>
-                  </a:lnTo>
-                  <a:lnTo>
-                    <a:pt x="280293" y="1119980"/>
-                  </a:lnTo>
-                  <a:lnTo>
-                    <a:pt x="351916" y="1342805"/>
-                  </a:lnTo>
-                  <a:lnTo>
-                    <a:pt x="423538" y="1544624"/>
-                  </a:lnTo>
-                  <a:lnTo>
-                    <a:pt x="495161" y="1727419"/>
-                  </a:lnTo>
-                  <a:lnTo>
-                    <a:pt x="566783" y="1892982"/>
-                  </a:lnTo>
-                  <a:lnTo>
-                    <a:pt x="638406" y="2042938"/>
-                  </a:lnTo>
-                  <a:lnTo>
-                    <a:pt x="710028" y="2178758"/>
-                  </a:lnTo>
-                  <a:lnTo>
-                    <a:pt x="781651" y="2301775"/>
-                  </a:lnTo>
-                  <a:lnTo>
-                    <a:pt x="853273" y="2413195"/>
-                  </a:lnTo>
-                  <a:lnTo>
-                    <a:pt x="924896" y="2514113"/>
-                  </a:lnTo>
-                  <a:lnTo>
-                    <a:pt x="996518" y="2605517"/>
-                  </a:lnTo>
-                  <a:lnTo>
-                    <a:pt x="1068141" y="2663761"/>
-                  </a:lnTo>
-                  <a:lnTo>
-                    <a:pt x="1139763" y="2685740"/>
-                  </a:lnTo>
-                  <a:lnTo>
-                    <a:pt x="1211386" y="2707129"/>
-                  </a:lnTo>
-                  <a:lnTo>
-                    <a:pt x="1283008" y="2727946"/>
-                  </a:lnTo>
-                  <a:lnTo>
-                    <a:pt x="1354631" y="2748204"/>
-                  </a:lnTo>
-                  <a:lnTo>
-                    <a:pt x="1426253" y="2767919"/>
-                  </a:lnTo>
-                  <a:lnTo>
-                    <a:pt x="1497876" y="2787106"/>
-                  </a:lnTo>
-                  <a:lnTo>
-                    <a:pt x="1569499" y="2805779"/>
-                  </a:lnTo>
-                  <a:lnTo>
-                    <a:pt x="1641121" y="2823951"/>
-                  </a:lnTo>
-                  <a:lnTo>
-                    <a:pt x="1712744" y="2841636"/>
-                  </a:lnTo>
-                  <a:lnTo>
-                    <a:pt x="1784366" y="2858847"/>
-                  </a:lnTo>
-                  <a:lnTo>
-                    <a:pt x="1855989" y="2875597"/>
-                  </a:lnTo>
-                  <a:lnTo>
-                    <a:pt x="1927611" y="2891897"/>
-                  </a:lnTo>
-                  <a:lnTo>
-                    <a:pt x="1999234" y="2907761"/>
-                  </a:lnTo>
-                  <a:lnTo>
-                    <a:pt x="2070856" y="2923200"/>
-                  </a:lnTo>
-                  <a:lnTo>
-                    <a:pt x="2142479" y="2938224"/>
-                  </a:lnTo>
-                  <a:lnTo>
-                    <a:pt x="2214101" y="2952847"/>
-                  </a:lnTo>
-                  <a:lnTo>
-                    <a:pt x="2285724" y="2967077"/>
-                  </a:lnTo>
-                  <a:lnTo>
-                    <a:pt x="2357346" y="2980925"/>
-                  </a:lnTo>
-                  <a:lnTo>
-                    <a:pt x="2428969" y="2994403"/>
-                  </a:lnTo>
-                  <a:lnTo>
-                    <a:pt x="2500591" y="3007519"/>
-                  </a:lnTo>
-                  <a:lnTo>
-                    <a:pt x="2572214" y="3020284"/>
-                  </a:lnTo>
-                  <a:lnTo>
-                    <a:pt x="2643836" y="3032706"/>
-                  </a:lnTo>
-                  <a:lnTo>
-                    <a:pt x="2715459" y="3044796"/>
-                  </a:lnTo>
-                  <a:lnTo>
-                    <a:pt x="2787081" y="3056561"/>
-                  </a:lnTo>
-                  <a:lnTo>
-                    <a:pt x="2858704" y="3068012"/>
-                  </a:lnTo>
-                  <a:lnTo>
-                    <a:pt x="2930327" y="3079155"/>
-                  </a:lnTo>
-                  <a:lnTo>
-                    <a:pt x="3001949" y="3089999"/>
-                  </a:lnTo>
-                  <a:lnTo>
-                    <a:pt x="3073572" y="3100553"/>
-                  </a:lnTo>
-                  <a:lnTo>
-                    <a:pt x="3145194" y="3110824"/>
-                  </a:lnTo>
-                  <a:lnTo>
-                    <a:pt x="3216817" y="3120820"/>
-                  </a:lnTo>
-                  <a:lnTo>
-                    <a:pt x="3288439" y="3130548"/>
-                  </a:lnTo>
-                  <a:lnTo>
-                    <a:pt x="3360062" y="3140015"/>
-                  </a:lnTo>
-                  <a:lnTo>
-                    <a:pt x="3431684" y="3149228"/>
-                  </a:lnTo>
-                  <a:lnTo>
-                    <a:pt x="3503307" y="3158195"/>
-                  </a:lnTo>
-                  <a:lnTo>
-                    <a:pt x="3574929" y="3166921"/>
-                  </a:lnTo>
-                  <a:lnTo>
-                    <a:pt x="3646552" y="3175413"/>
-                  </a:lnTo>
-                  <a:lnTo>
-                    <a:pt x="3718174" y="3183677"/>
-                  </a:lnTo>
-                  <a:lnTo>
-                    <a:pt x="3789797" y="3191720"/>
-                  </a:lnTo>
-                  <a:lnTo>
-                    <a:pt x="3861419" y="3199548"/>
-                  </a:lnTo>
-                  <a:lnTo>
-                    <a:pt x="3933042" y="3207165"/>
-                  </a:lnTo>
-                  <a:lnTo>
-                    <a:pt x="4004664" y="3214579"/>
-                  </a:lnTo>
-                  <a:lnTo>
-                    <a:pt x="4076287" y="3221793"/>
-                  </a:lnTo>
-                  <a:lnTo>
-                    <a:pt x="4147909" y="3228815"/>
-                  </a:lnTo>
-                  <a:lnTo>
-                    <a:pt x="4219532" y="3235648"/>
-                  </a:lnTo>
-                  <a:lnTo>
-                    <a:pt x="4291155" y="3242298"/>
-                  </a:lnTo>
-                  <a:lnTo>
-                    <a:pt x="4362777" y="3248770"/>
-                  </a:lnTo>
-                  <a:lnTo>
-                    <a:pt x="4434400" y="3255068"/>
-                  </a:lnTo>
-                  <a:lnTo>
-                    <a:pt x="4506022" y="3261197"/>
-                  </a:lnTo>
-                  <a:lnTo>
-                    <a:pt x="4577645" y="3267162"/>
-                  </a:lnTo>
-                  <a:lnTo>
-                    <a:pt x="4649267" y="3272968"/>
-                  </a:lnTo>
-                  <a:lnTo>
-                    <a:pt x="4720890" y="3278617"/>
-                  </a:lnTo>
-                  <a:lnTo>
-                    <a:pt x="4792512" y="3284116"/>
-                  </a:lnTo>
-                  <a:lnTo>
-                    <a:pt x="4864135" y="3289467"/>
-                  </a:lnTo>
-                  <a:lnTo>
-                    <a:pt x="4935757" y="3294674"/>
-                  </a:lnTo>
-                  <a:lnTo>
-                    <a:pt x="5007380" y="3299742"/>
+                    <a:pt x="64258" y="109149"/>
+                  </a:lnTo>
+                  <a:lnTo>
+                    <a:pt x="134603" y="217372"/>
+                  </a:lnTo>
+                  <a:lnTo>
+                    <a:pt x="204947" y="315393"/>
+                  </a:lnTo>
+                  <a:lnTo>
+                    <a:pt x="275291" y="404174"/>
+                  </a:lnTo>
+                  <a:lnTo>
+                    <a:pt x="345636" y="484586"/>
+                  </a:lnTo>
+                  <a:lnTo>
+                    <a:pt x="415980" y="557418"/>
+                  </a:lnTo>
+                  <a:lnTo>
+                    <a:pt x="486325" y="623384"/>
+                  </a:lnTo>
+                  <a:lnTo>
+                    <a:pt x="556669" y="683132"/>
+                  </a:lnTo>
+                  <a:lnTo>
+                    <a:pt x="627014" y="737248"/>
+                  </a:lnTo>
+                  <a:lnTo>
+                    <a:pt x="697358" y="786262"/>
+                  </a:lnTo>
+                  <a:lnTo>
+                    <a:pt x="767703" y="830656"/>
+                  </a:lnTo>
+                  <a:lnTo>
+                    <a:pt x="838047" y="870865"/>
+                  </a:lnTo>
+                  <a:lnTo>
+                    <a:pt x="908392" y="907284"/>
+                  </a:lnTo>
+                  <a:lnTo>
+                    <a:pt x="978736" y="940269"/>
+                  </a:lnTo>
+                  <a:lnTo>
+                    <a:pt x="1049081" y="961288"/>
+                  </a:lnTo>
+                  <a:lnTo>
+                    <a:pt x="1119425" y="969220"/>
+                  </a:lnTo>
+                  <a:lnTo>
+                    <a:pt x="1189770" y="976939"/>
+                  </a:lnTo>
+                  <a:lnTo>
+                    <a:pt x="1260114" y="984451"/>
+                  </a:lnTo>
+                  <a:lnTo>
+                    <a:pt x="1330459" y="991762"/>
+                  </a:lnTo>
+                  <a:lnTo>
+                    <a:pt x="1400803" y="998877"/>
+                  </a:lnTo>
+                  <a:lnTo>
+                    <a:pt x="1471148" y="1005801"/>
+                  </a:lnTo>
+                  <a:lnTo>
+                    <a:pt x="1541492" y="1012539"/>
+                  </a:lnTo>
+                  <a:lnTo>
+                    <a:pt x="1611837" y="1019097"/>
+                  </a:lnTo>
+                  <a:lnTo>
+                    <a:pt x="1682181" y="1025479"/>
+                  </a:lnTo>
+                  <a:lnTo>
+                    <a:pt x="1752526" y="1031690"/>
+                  </a:lnTo>
+                  <a:lnTo>
+                    <a:pt x="1822870" y="1037735"/>
+                  </a:lnTo>
+                  <a:lnTo>
+                    <a:pt x="1893215" y="1043617"/>
+                  </a:lnTo>
+                  <a:lnTo>
+                    <a:pt x="1963559" y="1049342"/>
+                  </a:lnTo>
+                  <a:lnTo>
+                    <a:pt x="2033904" y="1054914"/>
+                  </a:lnTo>
+                  <a:lnTo>
+                    <a:pt x="2104248" y="1060336"/>
+                  </a:lnTo>
+                  <a:lnTo>
+                    <a:pt x="2174593" y="1065613"/>
+                  </a:lnTo>
+                  <a:lnTo>
+                    <a:pt x="2244937" y="1070748"/>
+                  </a:lnTo>
+                  <a:lnTo>
+                    <a:pt x="2315282" y="1075746"/>
+                  </a:lnTo>
+                  <a:lnTo>
+                    <a:pt x="2385626" y="1080609"/>
+                  </a:lnTo>
+                  <a:lnTo>
+                    <a:pt x="2455971" y="1085343"/>
+                  </a:lnTo>
+                  <a:lnTo>
+                    <a:pt x="2526315" y="1089949"/>
+                  </a:lnTo>
+                  <a:lnTo>
+                    <a:pt x="2596660" y="1094432"/>
+                  </a:lnTo>
+                  <a:lnTo>
+                    <a:pt x="2667004" y="1098795"/>
+                  </a:lnTo>
+                  <a:lnTo>
+                    <a:pt x="2737349" y="1103041"/>
+                  </a:lnTo>
+                  <a:lnTo>
+                    <a:pt x="2807693" y="1107173"/>
+                  </a:lnTo>
+                  <a:lnTo>
+                    <a:pt x="2878038" y="1111194"/>
+                  </a:lnTo>
+                  <a:lnTo>
+                    <a:pt x="2948382" y="1115108"/>
+                  </a:lnTo>
+                  <a:lnTo>
+                    <a:pt x="3018727" y="1118916"/>
+                  </a:lnTo>
+                  <a:lnTo>
+                    <a:pt x="3089071" y="1122623"/>
+                  </a:lnTo>
+                  <a:lnTo>
+                    <a:pt x="3159416" y="1126230"/>
+                  </a:lnTo>
+                  <a:lnTo>
+                    <a:pt x="3229760" y="1129741"/>
+                  </a:lnTo>
+                  <a:lnTo>
+                    <a:pt x="3300105" y="1133157"/>
+                  </a:lnTo>
+                  <a:lnTo>
+                    <a:pt x="3370449" y="1136482"/>
+                  </a:lnTo>
+                  <a:lnTo>
+                    <a:pt x="3440794" y="1139718"/>
+                  </a:lnTo>
+                  <a:lnTo>
+                    <a:pt x="3511138" y="1142867"/>
+                  </a:lnTo>
+                  <a:lnTo>
+                    <a:pt x="3581483" y="1145931"/>
+                  </a:lnTo>
+                  <a:lnTo>
+                    <a:pt x="3651827" y="1148914"/>
+                  </a:lnTo>
+                  <a:lnTo>
+                    <a:pt x="3722172" y="1151816"/>
+                  </a:lnTo>
+                  <a:lnTo>
+                    <a:pt x="3792516" y="1154641"/>
+                  </a:lnTo>
+                  <a:lnTo>
+                    <a:pt x="3862861" y="1157390"/>
+                  </a:lnTo>
+                  <a:lnTo>
+                    <a:pt x="3933205" y="1160066"/>
+                  </a:lnTo>
+                  <a:lnTo>
+                    <a:pt x="4003549" y="1162669"/>
+                  </a:lnTo>
+                  <a:lnTo>
+                    <a:pt x="4073894" y="1165203"/>
+                  </a:lnTo>
+                  <a:lnTo>
+                    <a:pt x="4144238" y="1167669"/>
+                  </a:lnTo>
+                  <a:lnTo>
+                    <a:pt x="4214583" y="1170069"/>
+                  </a:lnTo>
+                  <a:lnTo>
+                    <a:pt x="4284927" y="1172404"/>
+                  </a:lnTo>
+                  <a:lnTo>
+                    <a:pt x="4355272" y="1174677"/>
+                  </a:lnTo>
+                  <a:lnTo>
+                    <a:pt x="4425616" y="1176889"/>
+                  </a:lnTo>
+                  <a:lnTo>
+                    <a:pt x="4495961" y="1179042"/>
+                  </a:lnTo>
+                  <a:lnTo>
+                    <a:pt x="4566305" y="1181137"/>
+                  </a:lnTo>
+                  <a:lnTo>
+                    <a:pt x="4636650" y="1183176"/>
+                  </a:lnTo>
+                  <a:lnTo>
+                    <a:pt x="4706994" y="1185160"/>
+                  </a:lnTo>
+                  <a:lnTo>
+                    <a:pt x="4777339" y="1187091"/>
+                  </a:lnTo>
+                  <a:lnTo>
+                    <a:pt x="4847683" y="1188970"/>
+                  </a:lnTo>
+                  <a:lnTo>
+                    <a:pt x="4918028" y="1190799"/>
                   </a:lnTo>
                 </a:path>
               </a:pathLst>
@@ -3824,315 +3856,315 @@
         </p:sp>
         <p:sp>
           <p:nvSpPr>
-            <p:cNvPr id="24" name="pl24"/>
-            <p:cNvSpPr/>
-            <p:nvPr/>
-          </p:nvSpPr>
-          <p:spPr>
-            <a:xfrm>
-              <a:off x="1172049" y="2847133"/>
-              <a:ext cx="7090630" cy="2706683"/>
+            <p:cNvPr id="25" name="pl25"/>
+            <p:cNvSpPr/>
+            <p:nvPr/>
+          </p:nvSpPr>
+          <p:spPr>
+            <a:xfrm>
+              <a:off x="1235312" y="2422277"/>
+              <a:ext cx="6964104" cy="976778"/>
             </a:xfrm>
             <a:custGeom>
               <a:avLst/>
               <a:pathLst>
-                <a:path w="7090630" h="2706683">
+                <a:path w="6964104" h="976778">
                   <a:moveTo>
-                    <a:pt x="7090630" y="2706683"/>
+                    <a:pt x="6964104" y="976778"/>
                   </a:moveTo>
                   <a:lnTo>
-                    <a:pt x="7019007" y="2706326"/>
-                  </a:lnTo>
-                  <a:lnTo>
-                    <a:pt x="6947385" y="2705932"/>
-                  </a:lnTo>
-                  <a:lnTo>
-                    <a:pt x="6875762" y="2705496"/>
-                  </a:lnTo>
-                  <a:lnTo>
-                    <a:pt x="6804139" y="2705015"/>
-                  </a:lnTo>
-                  <a:lnTo>
-                    <a:pt x="6732517" y="2704484"/>
-                  </a:lnTo>
-                  <a:lnTo>
-                    <a:pt x="6660894" y="2703898"/>
-                  </a:lnTo>
-                  <a:lnTo>
-                    <a:pt x="6589272" y="2703251"/>
-                  </a:lnTo>
-                  <a:lnTo>
-                    <a:pt x="6517649" y="2702537"/>
-                  </a:lnTo>
-                  <a:lnTo>
-                    <a:pt x="6446027" y="2701748"/>
-                  </a:lnTo>
-                  <a:lnTo>
-                    <a:pt x="6374404" y="2700877"/>
-                  </a:lnTo>
-                  <a:lnTo>
-                    <a:pt x="6302782" y="2699915"/>
-                  </a:lnTo>
-                  <a:lnTo>
-                    <a:pt x="6231159" y="2698854"/>
-                  </a:lnTo>
-                  <a:lnTo>
-                    <a:pt x="6159537" y="2697682"/>
-                  </a:lnTo>
-                  <a:lnTo>
-                    <a:pt x="6087914" y="2696387"/>
-                  </a:lnTo>
-                  <a:lnTo>
-                    <a:pt x="6016292" y="2694959"/>
-                  </a:lnTo>
-                  <a:lnTo>
-                    <a:pt x="5944669" y="2693381"/>
-                  </a:lnTo>
-                  <a:lnTo>
-                    <a:pt x="5873047" y="2691639"/>
-                  </a:lnTo>
-                  <a:lnTo>
-                    <a:pt x="5801424" y="2689716"/>
-                  </a:lnTo>
-                  <a:lnTo>
-                    <a:pt x="5729802" y="2687593"/>
-                  </a:lnTo>
-                  <a:lnTo>
-                    <a:pt x="5658179" y="2685249"/>
-                  </a:lnTo>
-                  <a:lnTo>
-                    <a:pt x="5586557" y="2682661"/>
-                  </a:lnTo>
-                  <a:lnTo>
-                    <a:pt x="5514934" y="2679804"/>
-                  </a:lnTo>
-                  <a:lnTo>
-                    <a:pt x="5443311" y="2676649"/>
-                  </a:lnTo>
-                  <a:lnTo>
-                    <a:pt x="5371689" y="2673166"/>
-                  </a:lnTo>
-                  <a:lnTo>
-                    <a:pt x="5300066" y="2669320"/>
-                  </a:lnTo>
-                  <a:lnTo>
-                    <a:pt x="5228444" y="2665074"/>
-                  </a:lnTo>
-                  <a:lnTo>
-                    <a:pt x="5156821" y="2660386"/>
-                  </a:lnTo>
-                  <a:lnTo>
-                    <a:pt x="5085199" y="2655210"/>
-                  </a:lnTo>
-                  <a:lnTo>
-                    <a:pt x="5013576" y="2649496"/>
-                  </a:lnTo>
-                  <a:lnTo>
-                    <a:pt x="4941954" y="2643187"/>
-                  </a:lnTo>
-                  <a:lnTo>
-                    <a:pt x="4870331" y="2636221"/>
-                  </a:lnTo>
-                  <a:lnTo>
-                    <a:pt x="4798709" y="2628530"/>
-                  </a:lnTo>
-                  <a:lnTo>
-                    <a:pt x="4727086" y="2620038"/>
-                  </a:lnTo>
-                  <a:lnTo>
-                    <a:pt x="4655464" y="2610663"/>
-                  </a:lnTo>
-                  <a:lnTo>
-                    <a:pt x="4583841" y="2600313"/>
-                  </a:lnTo>
-                  <a:lnTo>
-                    <a:pt x="4512219" y="2588885"/>
-                  </a:lnTo>
-                  <a:lnTo>
-                    <a:pt x="4440596" y="2576267"/>
-                  </a:lnTo>
-                  <a:lnTo>
-                    <a:pt x="4368974" y="2562336"/>
-                  </a:lnTo>
-                  <a:lnTo>
-                    <a:pt x="4297351" y="2546956"/>
-                  </a:lnTo>
-                  <a:lnTo>
-                    <a:pt x="4225729" y="2529974"/>
-                  </a:lnTo>
-                  <a:lnTo>
-                    <a:pt x="4154106" y="2511226"/>
-                  </a:lnTo>
-                  <a:lnTo>
-                    <a:pt x="4082483" y="2490526"/>
-                  </a:lnTo>
-                  <a:lnTo>
-                    <a:pt x="4010861" y="2467671"/>
-                  </a:lnTo>
-                  <a:lnTo>
-                    <a:pt x="3939238" y="2442438"/>
-                  </a:lnTo>
-                  <a:lnTo>
-                    <a:pt x="3867616" y="2414579"/>
-                  </a:lnTo>
-                  <a:lnTo>
-                    <a:pt x="3795993" y="2383820"/>
-                  </a:lnTo>
-                  <a:lnTo>
-                    <a:pt x="3724371" y="2349860"/>
-                  </a:lnTo>
-                  <a:lnTo>
-                    <a:pt x="3652748" y="2312365"/>
-                  </a:lnTo>
-                  <a:lnTo>
-                    <a:pt x="3581126" y="2270968"/>
-                  </a:lnTo>
-                  <a:lnTo>
-                    <a:pt x="3509503" y="2225263"/>
-                  </a:lnTo>
-                  <a:lnTo>
-                    <a:pt x="3437881" y="2174800"/>
-                  </a:lnTo>
-                  <a:lnTo>
-                    <a:pt x="3366258" y="2119086"/>
-                  </a:lnTo>
-                  <a:lnTo>
-                    <a:pt x="3294636" y="2057573"/>
-                  </a:lnTo>
-                  <a:lnTo>
-                    <a:pt x="3223013" y="1989658"/>
-                  </a:lnTo>
-                  <a:lnTo>
-                    <a:pt x="3151391" y="1914674"/>
-                  </a:lnTo>
-                  <a:lnTo>
-                    <a:pt x="3079768" y="1867547"/>
-                  </a:lnTo>
-                  <a:lnTo>
-                    <a:pt x="3008146" y="1844341"/>
-                  </a:lnTo>
-                  <a:lnTo>
-                    <a:pt x="2936523" y="1820495"/>
-                  </a:lnTo>
-                  <a:lnTo>
-                    <a:pt x="2864901" y="1795993"/>
-                  </a:lnTo>
-                  <a:lnTo>
-                    <a:pt x="2793278" y="1770817"/>
-                  </a:lnTo>
-                  <a:lnTo>
-                    <a:pt x="2721655" y="1744946"/>
-                  </a:lnTo>
-                  <a:lnTo>
-                    <a:pt x="2650033" y="1718364"/>
-                  </a:lnTo>
-                  <a:lnTo>
-                    <a:pt x="2578410" y="1691049"/>
-                  </a:lnTo>
-                  <a:lnTo>
-                    <a:pt x="2506788" y="1662982"/>
-                  </a:lnTo>
-                  <a:lnTo>
-                    <a:pt x="2435165" y="1634142"/>
-                  </a:lnTo>
-                  <a:lnTo>
-                    <a:pt x="2363543" y="1604507"/>
-                  </a:lnTo>
-                  <a:lnTo>
-                    <a:pt x="2291920" y="1574056"/>
-                  </a:lnTo>
-                  <a:lnTo>
-                    <a:pt x="2220298" y="1542767"/>
-                  </a:lnTo>
-                  <a:lnTo>
-                    <a:pt x="2148675" y="1510616"/>
-                  </a:lnTo>
-                  <a:lnTo>
-                    <a:pt x="2077053" y="1477579"/>
-                  </a:lnTo>
-                  <a:lnTo>
-                    <a:pt x="2005430" y="1443633"/>
-                  </a:lnTo>
-                  <a:lnTo>
-                    <a:pt x="1933808" y="1408751"/>
-                  </a:lnTo>
-                  <a:lnTo>
-                    <a:pt x="1862185" y="1372909"/>
-                  </a:lnTo>
-                  <a:lnTo>
-                    <a:pt x="1790563" y="1336080"/>
-                  </a:lnTo>
-                  <a:lnTo>
-                    <a:pt x="1718940" y="1298236"/>
-                  </a:lnTo>
-                  <a:lnTo>
-                    <a:pt x="1647318" y="1259350"/>
-                  </a:lnTo>
-                  <a:lnTo>
-                    <a:pt x="1575695" y="1219393"/>
-                  </a:lnTo>
-                  <a:lnTo>
-                    <a:pt x="1504073" y="1178335"/>
-                  </a:lnTo>
-                  <a:lnTo>
-                    <a:pt x="1432450" y="1136147"/>
-                  </a:lnTo>
-                  <a:lnTo>
-                    <a:pt x="1360827" y="1092797"/>
-                  </a:lnTo>
-                  <a:lnTo>
-                    <a:pt x="1289205" y="1048252"/>
-                  </a:lnTo>
-                  <a:lnTo>
-                    <a:pt x="1217582" y="1002481"/>
-                  </a:lnTo>
-                  <a:lnTo>
-                    <a:pt x="1145960" y="955450"/>
-                  </a:lnTo>
-                  <a:lnTo>
-                    <a:pt x="1074337" y="907123"/>
-                  </a:lnTo>
-                  <a:lnTo>
-                    <a:pt x="1002715" y="857465"/>
-                  </a:lnTo>
-                  <a:lnTo>
-                    <a:pt x="931092" y="806439"/>
-                  </a:lnTo>
-                  <a:lnTo>
-                    <a:pt x="859470" y="754008"/>
-                  </a:lnTo>
-                  <a:lnTo>
-                    <a:pt x="787847" y="700133"/>
-                  </a:lnTo>
-                  <a:lnTo>
-                    <a:pt x="716225" y="644774"/>
-                  </a:lnTo>
-                  <a:lnTo>
-                    <a:pt x="644602" y="587890"/>
-                  </a:lnTo>
-                  <a:lnTo>
-                    <a:pt x="572980" y="529439"/>
-                  </a:lnTo>
-                  <a:lnTo>
-                    <a:pt x="501357" y="469379"/>
-                  </a:lnTo>
-                  <a:lnTo>
-                    <a:pt x="429735" y="407665"/>
-                  </a:lnTo>
-                  <a:lnTo>
-                    <a:pt x="358112" y="344251"/>
-                  </a:lnTo>
-                  <a:lnTo>
-                    <a:pt x="286490" y="279090"/>
-                  </a:lnTo>
-                  <a:lnTo>
-                    <a:pt x="214867" y="212135"/>
-                  </a:lnTo>
-                  <a:lnTo>
-                    <a:pt x="143245" y="143335"/>
-                  </a:lnTo>
-                  <a:lnTo>
-                    <a:pt x="71622" y="72641"/>
+                    <a:pt x="6893760" y="976649"/>
+                  </a:lnTo>
+                  <a:lnTo>
+                    <a:pt x="6823415" y="976507"/>
+                  </a:lnTo>
+                  <a:lnTo>
+                    <a:pt x="6753071" y="976350"/>
+                  </a:lnTo>
+                  <a:lnTo>
+                    <a:pt x="6682726" y="976176"/>
+                  </a:lnTo>
+                  <a:lnTo>
+                    <a:pt x="6612382" y="975984"/>
+                  </a:lnTo>
+                  <a:lnTo>
+                    <a:pt x="6542037" y="975773"/>
+                  </a:lnTo>
+                  <a:lnTo>
+                    <a:pt x="6471693" y="975539"/>
+                  </a:lnTo>
+                  <a:lnTo>
+                    <a:pt x="6401348" y="975282"/>
+                  </a:lnTo>
+                  <a:lnTo>
+                    <a:pt x="6331004" y="974997"/>
+                  </a:lnTo>
+                  <a:lnTo>
+                    <a:pt x="6260659" y="974683"/>
+                  </a:lnTo>
+                  <a:lnTo>
+                    <a:pt x="6190315" y="974336"/>
+                  </a:lnTo>
+                  <a:lnTo>
+                    <a:pt x="6119970" y="973953"/>
+                  </a:lnTo>
+                  <a:lnTo>
+                    <a:pt x="6049626" y="973530"/>
+                  </a:lnTo>
+                  <a:lnTo>
+                    <a:pt x="5979281" y="973062"/>
+                  </a:lnTo>
+                  <a:lnTo>
+                    <a:pt x="5908937" y="972547"/>
+                  </a:lnTo>
+                  <a:lnTo>
+                    <a:pt x="5838592" y="971978"/>
+                  </a:lnTo>
+                  <a:lnTo>
+                    <a:pt x="5768248" y="971349"/>
+                  </a:lnTo>
+                  <a:lnTo>
+                    <a:pt x="5697903" y="970655"/>
+                  </a:lnTo>
+                  <a:lnTo>
+                    <a:pt x="5627559" y="969889"/>
+                  </a:lnTo>
+                  <a:lnTo>
+                    <a:pt x="5557214" y="969043"/>
+                  </a:lnTo>
+                  <a:lnTo>
+                    <a:pt x="5486870" y="968109"/>
+                  </a:lnTo>
+                  <a:lnTo>
+                    <a:pt x="5416525" y="967078"/>
+                  </a:lnTo>
+                  <a:lnTo>
+                    <a:pt x="5346181" y="965939"/>
+                  </a:lnTo>
+                  <a:lnTo>
+                    <a:pt x="5275836" y="964682"/>
+                  </a:lnTo>
+                  <a:lnTo>
+                    <a:pt x="5205492" y="963294"/>
+                  </a:lnTo>
+                  <a:lnTo>
+                    <a:pt x="5135147" y="961762"/>
+                  </a:lnTo>
+                  <a:lnTo>
+                    <a:pt x="5064803" y="960070"/>
+                  </a:lnTo>
+                  <a:lnTo>
+                    <a:pt x="4994458" y="958203"/>
+                  </a:lnTo>
+                  <a:lnTo>
+                    <a:pt x="4924114" y="956140"/>
+                  </a:lnTo>
+                  <a:lnTo>
+                    <a:pt x="4853769" y="953864"/>
+                  </a:lnTo>
+                  <a:lnTo>
+                    <a:pt x="4783425" y="951350"/>
+                  </a:lnTo>
+                  <a:lnTo>
+                    <a:pt x="4713080" y="948574"/>
+                  </a:lnTo>
+                  <a:lnTo>
+                    <a:pt x="4642736" y="945510"/>
+                  </a:lnTo>
+                  <a:lnTo>
+                    <a:pt x="4572391" y="942127"/>
+                  </a:lnTo>
+                  <a:lnTo>
+                    <a:pt x="4502047" y="938391"/>
+                  </a:lnTo>
+                  <a:lnTo>
+                    <a:pt x="4431702" y="934267"/>
+                  </a:lnTo>
+                  <a:lnTo>
+                    <a:pt x="4361358" y="929714"/>
+                  </a:lnTo>
+                  <a:lnTo>
+                    <a:pt x="4291013" y="924687"/>
+                  </a:lnTo>
+                  <a:lnTo>
+                    <a:pt x="4220669" y="919136"/>
+                  </a:lnTo>
+                  <a:lnTo>
+                    <a:pt x="4150324" y="913008"/>
+                  </a:lnTo>
+                  <a:lnTo>
+                    <a:pt x="4079980" y="906242"/>
+                  </a:lnTo>
+                  <a:lnTo>
+                    <a:pt x="4009635" y="898772"/>
+                  </a:lnTo>
+                  <a:lnTo>
+                    <a:pt x="3939291" y="890524"/>
+                  </a:lnTo>
+                  <a:lnTo>
+                    <a:pt x="3868946" y="881418"/>
+                  </a:lnTo>
+                  <a:lnTo>
+                    <a:pt x="3798602" y="871364"/>
+                  </a:lnTo>
+                  <a:lnTo>
+                    <a:pt x="3728257" y="860264"/>
+                  </a:lnTo>
+                  <a:lnTo>
+                    <a:pt x="3657913" y="848009"/>
+                  </a:lnTo>
+                  <a:lnTo>
+                    <a:pt x="3587569" y="834478"/>
+                  </a:lnTo>
+                  <a:lnTo>
+                    <a:pt x="3517224" y="819539"/>
+                  </a:lnTo>
+                  <a:lnTo>
+                    <a:pt x="3446880" y="803045"/>
+                  </a:lnTo>
+                  <a:lnTo>
+                    <a:pt x="3376535" y="784834"/>
+                  </a:lnTo>
+                  <a:lnTo>
+                    <a:pt x="3306191" y="764728"/>
+                  </a:lnTo>
+                  <a:lnTo>
+                    <a:pt x="3235846" y="742529"/>
+                  </a:lnTo>
+                  <a:lnTo>
+                    <a:pt x="3165502" y="718020"/>
+                  </a:lnTo>
+                  <a:lnTo>
+                    <a:pt x="3095157" y="690961"/>
+                  </a:lnTo>
+                  <a:lnTo>
+                    <a:pt x="3024813" y="673953"/>
+                  </a:lnTo>
+                  <a:lnTo>
+                    <a:pt x="2954468" y="665579"/>
+                  </a:lnTo>
+                  <a:lnTo>
+                    <a:pt x="2884124" y="656974"/>
+                  </a:lnTo>
+                  <a:lnTo>
+                    <a:pt x="2813779" y="648131"/>
+                  </a:lnTo>
+                  <a:lnTo>
+                    <a:pt x="2743435" y="639046"/>
+                  </a:lnTo>
+                  <a:lnTo>
+                    <a:pt x="2673090" y="629710"/>
+                  </a:lnTo>
+                  <a:lnTo>
+                    <a:pt x="2602746" y="620117"/>
+                  </a:lnTo>
+                  <a:lnTo>
+                    <a:pt x="2532401" y="610259"/>
+                  </a:lnTo>
+                  <a:lnTo>
+                    <a:pt x="2462057" y="600131"/>
+                  </a:lnTo>
+                  <a:lnTo>
+                    <a:pt x="2391712" y="589723"/>
+                  </a:lnTo>
+                  <a:lnTo>
+                    <a:pt x="2321368" y="579029"/>
+                  </a:lnTo>
+                  <a:lnTo>
+                    <a:pt x="2251023" y="568040"/>
+                  </a:lnTo>
+                  <a:lnTo>
+                    <a:pt x="2180679" y="556748"/>
+                  </a:lnTo>
+                  <a:lnTo>
+                    <a:pt x="2110334" y="545145"/>
+                  </a:lnTo>
+                  <a:lnTo>
+                    <a:pt x="2039990" y="533223"/>
+                  </a:lnTo>
+                  <a:lnTo>
+                    <a:pt x="1969645" y="520973"/>
+                  </a:lnTo>
+                  <a:lnTo>
+                    <a:pt x="1899301" y="508385"/>
+                  </a:lnTo>
+                  <a:lnTo>
+                    <a:pt x="1828956" y="495450"/>
+                  </a:lnTo>
+                  <a:lnTo>
+                    <a:pt x="1758612" y="482159"/>
+                  </a:lnTo>
+                  <a:lnTo>
+                    <a:pt x="1688267" y="468502"/>
+                  </a:lnTo>
+                  <a:lnTo>
+                    <a:pt x="1617923" y="454469"/>
+                  </a:lnTo>
+                  <a:lnTo>
+                    <a:pt x="1547578" y="440050"/>
+                  </a:lnTo>
+                  <a:lnTo>
+                    <a:pt x="1477234" y="425233"/>
+                  </a:lnTo>
+                  <a:lnTo>
+                    <a:pt x="1406889" y="410008"/>
+                  </a:lnTo>
+                  <a:lnTo>
+                    <a:pt x="1336545" y="394364"/>
+                  </a:lnTo>
+                  <a:lnTo>
+                    <a:pt x="1266200" y="378289"/>
+                  </a:lnTo>
+                  <a:lnTo>
+                    <a:pt x="1195856" y="361772"/>
+                  </a:lnTo>
+                  <a:lnTo>
+                    <a:pt x="1125511" y="344799"/>
+                  </a:lnTo>
+                  <a:lnTo>
+                    <a:pt x="1055167" y="327359"/>
+                  </a:lnTo>
+                  <a:lnTo>
+                    <a:pt x="984822" y="309438"/>
+                  </a:lnTo>
+                  <a:lnTo>
+                    <a:pt x="914478" y="291024"/>
+                  </a:lnTo>
+                  <a:lnTo>
+                    <a:pt x="844133" y="272103"/>
+                  </a:lnTo>
+                  <a:lnTo>
+                    <a:pt x="773789" y="252661"/>
+                  </a:lnTo>
+                  <a:lnTo>
+                    <a:pt x="703444" y="232683"/>
+                  </a:lnTo>
+                  <a:lnTo>
+                    <a:pt x="633100" y="212155"/>
+                  </a:lnTo>
+                  <a:lnTo>
+                    <a:pt x="562755" y="191062"/>
+                  </a:lnTo>
+                  <a:lnTo>
+                    <a:pt x="492411" y="169388"/>
+                  </a:lnTo>
+                  <a:lnTo>
+                    <a:pt x="422066" y="147116"/>
+                  </a:lnTo>
+                  <a:lnTo>
+                    <a:pt x="351722" y="124232"/>
+                  </a:lnTo>
+                  <a:lnTo>
+                    <a:pt x="281377" y="100717"/>
+                  </a:lnTo>
+                  <a:lnTo>
+                    <a:pt x="211033" y="76554"/>
+                  </a:lnTo>
+                  <a:lnTo>
+                    <a:pt x="140688" y="51726"/>
+                  </a:lnTo>
+                  <a:lnTo>
+                    <a:pt x="70344" y="26214"/>
                   </a:lnTo>
                   <a:lnTo>
                     <a:pt x="0" y="0"/>
@@ -4149,258 +4181,258 @@
         </p:sp>
         <p:sp>
           <p:nvSpPr>
-            <p:cNvPr id="25" name="pl25"/>
-            <p:cNvSpPr/>
-            <p:nvPr/>
-          </p:nvSpPr>
-          <p:spPr>
-            <a:xfrm>
-              <a:off x="2664288" y="2073503"/>
-              <a:ext cx="5598391" cy="3458614"/>
+            <p:cNvPr id="26" name="pl26"/>
+            <p:cNvSpPr/>
+            <p:nvPr/>
+          </p:nvSpPr>
+          <p:spPr>
+            <a:xfrm>
+              <a:off x="2700923" y="2143092"/>
+              <a:ext cx="5498493" cy="1248132"/>
             </a:xfrm>
             <a:custGeom>
               <a:avLst/>
               <a:pathLst>
-                <a:path w="5598391" h="3458614">
+                <a:path w="5498493" h="1248132">
                   <a:moveTo>
                     <a:pt x="0" y="0"/>
                   </a:moveTo>
                   <a:lnTo>
-                    <a:pt x="11834" y="37087"/>
-                  </a:lnTo>
-                  <a:lnTo>
-                    <a:pt x="83456" y="247819"/>
-                  </a:lnTo>
-                  <a:lnTo>
-                    <a:pt x="155079" y="445667"/>
-                  </a:lnTo>
-                  <a:lnTo>
-                    <a:pt x="226701" y="631418"/>
-                  </a:lnTo>
-                  <a:lnTo>
-                    <a:pt x="298324" y="805812"/>
-                  </a:lnTo>
-                  <a:lnTo>
-                    <a:pt x="369946" y="969543"/>
-                  </a:lnTo>
-                  <a:lnTo>
-                    <a:pt x="441569" y="1123264"/>
-                  </a:lnTo>
-                  <a:lnTo>
-                    <a:pt x="513191" y="1267587"/>
-                  </a:lnTo>
-                  <a:lnTo>
-                    <a:pt x="584814" y="1403085"/>
-                  </a:lnTo>
-                  <a:lnTo>
-                    <a:pt x="656437" y="1530298"/>
-                  </a:lnTo>
-                  <a:lnTo>
-                    <a:pt x="728059" y="1649734"/>
-                  </a:lnTo>
-                  <a:lnTo>
-                    <a:pt x="799682" y="1761867"/>
-                  </a:lnTo>
-                  <a:lnTo>
-                    <a:pt x="871304" y="1867145"/>
-                  </a:lnTo>
-                  <a:lnTo>
-                    <a:pt x="942927" y="1965985"/>
-                  </a:lnTo>
-                  <a:lnTo>
-                    <a:pt x="1014549" y="2058783"/>
-                  </a:lnTo>
-                  <a:lnTo>
-                    <a:pt x="1086172" y="2145906"/>
-                  </a:lnTo>
-                  <a:lnTo>
-                    <a:pt x="1157794" y="2227703"/>
-                  </a:lnTo>
-                  <a:lnTo>
-                    <a:pt x="1229417" y="2304499"/>
-                  </a:lnTo>
-                  <a:lnTo>
-                    <a:pt x="1301039" y="2376599"/>
-                  </a:lnTo>
-                  <a:lnTo>
-                    <a:pt x="1372662" y="2444291"/>
-                  </a:lnTo>
-                  <a:lnTo>
-                    <a:pt x="1444284" y="2507845"/>
-                  </a:lnTo>
-                  <a:lnTo>
-                    <a:pt x="1515907" y="2567512"/>
-                  </a:lnTo>
-                  <a:lnTo>
-                    <a:pt x="1587529" y="2623532"/>
-                  </a:lnTo>
-                  <a:lnTo>
-                    <a:pt x="1659152" y="2676126"/>
-                  </a:lnTo>
-                  <a:lnTo>
-                    <a:pt x="1730774" y="2725505"/>
-                  </a:lnTo>
-                  <a:lnTo>
-                    <a:pt x="1802397" y="2771864"/>
-                  </a:lnTo>
-                  <a:lnTo>
-                    <a:pt x="1874019" y="2815390"/>
-                  </a:lnTo>
-                  <a:lnTo>
-                    <a:pt x="1945642" y="2856254"/>
-                  </a:lnTo>
-                  <a:lnTo>
-                    <a:pt x="2017265" y="2894619"/>
-                  </a:lnTo>
-                  <a:lnTo>
-                    <a:pt x="2088887" y="2930639"/>
-                  </a:lnTo>
-                  <a:lnTo>
-                    <a:pt x="2160510" y="2964456"/>
-                  </a:lnTo>
-                  <a:lnTo>
-                    <a:pt x="2232132" y="2996206"/>
-                  </a:lnTo>
-                  <a:lnTo>
-                    <a:pt x="2303755" y="3026015"/>
-                  </a:lnTo>
-                  <a:lnTo>
-                    <a:pt x="2375377" y="3054001"/>
-                  </a:lnTo>
-                  <a:lnTo>
-                    <a:pt x="2447000" y="3080276"/>
-                  </a:lnTo>
-                  <a:lnTo>
-                    <a:pt x="2518622" y="3104945"/>
-                  </a:lnTo>
-                  <a:lnTo>
-                    <a:pt x="2590245" y="3128105"/>
-                  </a:lnTo>
-                  <a:lnTo>
-                    <a:pt x="2661867" y="3149849"/>
-                  </a:lnTo>
-                  <a:lnTo>
-                    <a:pt x="2733490" y="3170264"/>
-                  </a:lnTo>
-                  <a:lnTo>
-                    <a:pt x="2805112" y="3189431"/>
-                  </a:lnTo>
-                  <a:lnTo>
-                    <a:pt x="2876735" y="3207426"/>
-                  </a:lnTo>
-                  <a:lnTo>
-                    <a:pt x="2948357" y="3224320"/>
-                  </a:lnTo>
-                  <a:lnTo>
-                    <a:pt x="3019980" y="3240182"/>
-                  </a:lnTo>
-                  <a:lnTo>
-                    <a:pt x="3091602" y="3255073"/>
-                  </a:lnTo>
-                  <a:lnTo>
-                    <a:pt x="3163225" y="3269055"/>
-                  </a:lnTo>
-                  <a:lnTo>
-                    <a:pt x="3234847" y="3282181"/>
-                  </a:lnTo>
-                  <a:lnTo>
-                    <a:pt x="3306470" y="3294505"/>
-                  </a:lnTo>
-                  <a:lnTo>
-                    <a:pt x="3378093" y="3306075"/>
-                  </a:lnTo>
-                  <a:lnTo>
-                    <a:pt x="3449715" y="3316938"/>
-                  </a:lnTo>
-                  <a:lnTo>
-                    <a:pt x="3521338" y="3327137"/>
-                  </a:lnTo>
-                  <a:lnTo>
-                    <a:pt x="3592960" y="3336712"/>
-                  </a:lnTo>
-                  <a:lnTo>
-                    <a:pt x="3664583" y="3345702"/>
-                  </a:lnTo>
-                  <a:lnTo>
-                    <a:pt x="3736205" y="3354142"/>
-                  </a:lnTo>
-                  <a:lnTo>
-                    <a:pt x="3807828" y="3362067"/>
-                  </a:lnTo>
-                  <a:lnTo>
-                    <a:pt x="3879450" y="3369506"/>
-                  </a:lnTo>
-                  <a:lnTo>
-                    <a:pt x="3951073" y="3376491"/>
-                  </a:lnTo>
-                  <a:lnTo>
-                    <a:pt x="4022695" y="3383049"/>
-                  </a:lnTo>
-                  <a:lnTo>
-                    <a:pt x="4094318" y="3389205"/>
-                  </a:lnTo>
-                  <a:lnTo>
-                    <a:pt x="4165940" y="3394986"/>
-                  </a:lnTo>
-                  <a:lnTo>
-                    <a:pt x="4237563" y="3400413"/>
-                  </a:lnTo>
-                  <a:lnTo>
-                    <a:pt x="4309185" y="3405508"/>
-                  </a:lnTo>
-                  <a:lnTo>
-                    <a:pt x="4380808" y="3410291"/>
-                  </a:lnTo>
-                  <a:lnTo>
-                    <a:pt x="4452430" y="3414782"/>
-                  </a:lnTo>
-                  <a:lnTo>
-                    <a:pt x="4524053" y="3418999"/>
-                  </a:lnTo>
-                  <a:lnTo>
-                    <a:pt x="4595675" y="3422958"/>
-                  </a:lnTo>
-                  <a:lnTo>
-                    <a:pt x="4667298" y="3426674"/>
-                  </a:lnTo>
-                  <a:lnTo>
-                    <a:pt x="4738921" y="3430164"/>
-                  </a:lnTo>
-                  <a:lnTo>
-                    <a:pt x="4810543" y="3433440"/>
-                  </a:lnTo>
-                  <a:lnTo>
-                    <a:pt x="4882166" y="3436516"/>
-                  </a:lnTo>
-                  <a:lnTo>
-                    <a:pt x="4953788" y="3439403"/>
-                  </a:lnTo>
-                  <a:lnTo>
-                    <a:pt x="5025411" y="3442115"/>
-                  </a:lnTo>
-                  <a:lnTo>
-                    <a:pt x="5097033" y="3444660"/>
-                  </a:lnTo>
-                  <a:lnTo>
-                    <a:pt x="5168656" y="3447050"/>
-                  </a:lnTo>
-                  <a:lnTo>
-                    <a:pt x="5240278" y="3449293"/>
-                  </a:lnTo>
-                  <a:lnTo>
-                    <a:pt x="5311901" y="3451400"/>
-                  </a:lnTo>
-                  <a:lnTo>
-                    <a:pt x="5383523" y="3453378"/>
-                  </a:lnTo>
-                  <a:lnTo>
-                    <a:pt x="5455146" y="3455234"/>
-                  </a:lnTo>
-                  <a:lnTo>
-                    <a:pt x="5526768" y="3456978"/>
-                  </a:lnTo>
-                  <a:lnTo>
-                    <a:pt x="5598391" y="3458614"/>
+                    <a:pt x="11623" y="13383"/>
+                  </a:lnTo>
+                  <a:lnTo>
+                    <a:pt x="81967" y="89432"/>
+                  </a:lnTo>
+                  <a:lnTo>
+                    <a:pt x="152312" y="160830"/>
+                  </a:lnTo>
+                  <a:lnTo>
+                    <a:pt x="222656" y="227864"/>
+                  </a:lnTo>
+                  <a:lnTo>
+                    <a:pt x="293001" y="290798"/>
+                  </a:lnTo>
+                  <a:lnTo>
+                    <a:pt x="363345" y="349885"/>
+                  </a:lnTo>
+                  <a:lnTo>
+                    <a:pt x="433690" y="405359"/>
+                  </a:lnTo>
+                  <a:lnTo>
+                    <a:pt x="504034" y="457442"/>
+                  </a:lnTo>
+                  <a:lnTo>
+                    <a:pt x="574379" y="506340"/>
+                  </a:lnTo>
+                  <a:lnTo>
+                    <a:pt x="644723" y="552248"/>
+                  </a:lnTo>
+                  <a:lnTo>
+                    <a:pt x="715068" y="595350"/>
+                  </a:lnTo>
+                  <a:lnTo>
+                    <a:pt x="785412" y="635816"/>
+                  </a:lnTo>
+                  <a:lnTo>
+                    <a:pt x="855757" y="673808"/>
+                  </a:lnTo>
+                  <a:lnTo>
+                    <a:pt x="926101" y="709478"/>
+                  </a:lnTo>
+                  <a:lnTo>
+                    <a:pt x="996446" y="742966"/>
+                  </a:lnTo>
+                  <a:lnTo>
+                    <a:pt x="1066790" y="774407"/>
+                  </a:lnTo>
+                  <a:lnTo>
+                    <a:pt x="1137134" y="803925"/>
+                  </a:lnTo>
+                  <a:lnTo>
+                    <a:pt x="1207479" y="831639"/>
+                  </a:lnTo>
+                  <a:lnTo>
+                    <a:pt x="1277823" y="857658"/>
+                  </a:lnTo>
+                  <a:lnTo>
+                    <a:pt x="1348168" y="882087"/>
+                  </a:lnTo>
+                  <a:lnTo>
+                    <a:pt x="1418512" y="905022"/>
+                  </a:lnTo>
+                  <a:lnTo>
+                    <a:pt x="1488857" y="926554"/>
+                  </a:lnTo>
+                  <a:lnTo>
+                    <a:pt x="1559201" y="946771"/>
+                  </a:lnTo>
+                  <a:lnTo>
+                    <a:pt x="1629546" y="965751"/>
+                  </a:lnTo>
+                  <a:lnTo>
+                    <a:pt x="1699890" y="983570"/>
+                  </a:lnTo>
+                  <a:lnTo>
+                    <a:pt x="1770235" y="1000300"/>
+                  </a:lnTo>
+                  <a:lnTo>
+                    <a:pt x="1840579" y="1016008"/>
+                  </a:lnTo>
+                  <a:lnTo>
+                    <a:pt x="1910924" y="1030754"/>
+                  </a:lnTo>
+                  <a:lnTo>
+                    <a:pt x="1981268" y="1044600"/>
+                  </a:lnTo>
+                  <a:lnTo>
+                    <a:pt x="2051613" y="1057598"/>
+                  </a:lnTo>
+                  <a:lnTo>
+                    <a:pt x="2121957" y="1069802"/>
+                  </a:lnTo>
+                  <a:lnTo>
+                    <a:pt x="2192302" y="1081260"/>
+                  </a:lnTo>
+                  <a:lnTo>
+                    <a:pt x="2262646" y="1092017"/>
+                  </a:lnTo>
+                  <a:lnTo>
+                    <a:pt x="2332991" y="1102117"/>
+                  </a:lnTo>
+                  <a:lnTo>
+                    <a:pt x="2403335" y="1111599"/>
+                  </a:lnTo>
+                  <a:lnTo>
+                    <a:pt x="2473680" y="1120501"/>
+                  </a:lnTo>
+                  <a:lnTo>
+                    <a:pt x="2544024" y="1128859"/>
+                  </a:lnTo>
+                  <a:lnTo>
+                    <a:pt x="2614369" y="1136706"/>
+                  </a:lnTo>
+                  <a:lnTo>
+                    <a:pt x="2684713" y="1144073"/>
+                  </a:lnTo>
+                  <a:lnTo>
+                    <a:pt x="2755058" y="1150990"/>
+                  </a:lnTo>
+                  <a:lnTo>
+                    <a:pt x="2825402" y="1157484"/>
+                  </a:lnTo>
+                  <a:lnTo>
+                    <a:pt x="2895747" y="1163581"/>
+                  </a:lnTo>
+                  <a:lnTo>
+                    <a:pt x="2966091" y="1169305"/>
+                  </a:lnTo>
+                  <a:lnTo>
+                    <a:pt x="3036436" y="1174679"/>
+                  </a:lnTo>
+                  <a:lnTo>
+                    <a:pt x="3106780" y="1179725"/>
+                  </a:lnTo>
+                  <a:lnTo>
+                    <a:pt x="3177125" y="1184462"/>
+                  </a:lnTo>
+                  <a:lnTo>
+                    <a:pt x="3247469" y="1188909"/>
+                  </a:lnTo>
+                  <a:lnTo>
+                    <a:pt x="3317814" y="1193085"/>
+                  </a:lnTo>
+                  <a:lnTo>
+                    <a:pt x="3388158" y="1197005"/>
+                  </a:lnTo>
+                  <a:lnTo>
+                    <a:pt x="3458503" y="1200685"/>
+                  </a:lnTo>
+                  <a:lnTo>
+                    <a:pt x="3528847" y="1204141"/>
+                  </a:lnTo>
+                  <a:lnTo>
+                    <a:pt x="3599192" y="1207385"/>
+                  </a:lnTo>
+                  <a:lnTo>
+                    <a:pt x="3669536" y="1210431"/>
+                  </a:lnTo>
+                  <a:lnTo>
+                    <a:pt x="3739881" y="1213290"/>
+                  </a:lnTo>
+                  <a:lnTo>
+                    <a:pt x="3810225" y="1215975"/>
+                  </a:lnTo>
+                  <a:lnTo>
+                    <a:pt x="3880570" y="1218496"/>
+                  </a:lnTo>
+                  <a:lnTo>
+                    <a:pt x="3950914" y="1220862"/>
+                  </a:lnTo>
+                  <a:lnTo>
+                    <a:pt x="4021259" y="1223084"/>
+                  </a:lnTo>
+                  <a:lnTo>
+                    <a:pt x="4091603" y="1225170"/>
+                  </a:lnTo>
+                  <a:lnTo>
+                    <a:pt x="4161948" y="1227129"/>
+                  </a:lnTo>
+                  <a:lnTo>
+                    <a:pt x="4232292" y="1228967"/>
+                  </a:lnTo>
+                  <a:lnTo>
+                    <a:pt x="4302637" y="1230694"/>
+                  </a:lnTo>
+                  <a:lnTo>
+                    <a:pt x="4372981" y="1232314"/>
+                  </a:lnTo>
+                  <a:lnTo>
+                    <a:pt x="4443326" y="1233836"/>
+                  </a:lnTo>
+                  <a:lnTo>
+                    <a:pt x="4513670" y="1235265"/>
+                  </a:lnTo>
+                  <a:lnTo>
+                    <a:pt x="4584015" y="1236606"/>
+                  </a:lnTo>
+                  <a:lnTo>
+                    <a:pt x="4654359" y="1237865"/>
+                  </a:lnTo>
+                  <a:lnTo>
+                    <a:pt x="4724704" y="1239047"/>
+                  </a:lnTo>
+                  <a:lnTo>
+                    <a:pt x="4795048" y="1240157"/>
+                  </a:lnTo>
+                  <a:lnTo>
+                    <a:pt x="4865392" y="1241199"/>
+                  </a:lnTo>
+                  <a:lnTo>
+                    <a:pt x="4935737" y="1242178"/>
+                  </a:lnTo>
+                  <a:lnTo>
+                    <a:pt x="5006081" y="1243096"/>
+                  </a:lnTo>
+                  <a:lnTo>
+                    <a:pt x="5076426" y="1243959"/>
+                  </a:lnTo>
+                  <a:lnTo>
+                    <a:pt x="5146770" y="1244769"/>
+                  </a:lnTo>
+                  <a:lnTo>
+                    <a:pt x="5217115" y="1245529"/>
+                  </a:lnTo>
+                  <a:lnTo>
+                    <a:pt x="5287459" y="1246242"/>
+                  </a:lnTo>
+                  <a:lnTo>
+                    <a:pt x="5357804" y="1246912"/>
+                  </a:lnTo>
+                  <a:lnTo>
+                    <a:pt x="5428148" y="1247542"/>
+                  </a:lnTo>
+                  <a:lnTo>
+                    <a:pt x="5498493" y="1248132"/>
                   </a:lnTo>
                 </a:path>
               </a:pathLst>
@@ -4423,27 +4455,27 @@
         </p:sp>
         <p:sp>
           <p:nvSpPr>
-            <p:cNvPr id="26" name="pl26"/>
-            <p:cNvSpPr/>
-            <p:nvPr/>
-          </p:nvSpPr>
-          <p:spPr>
-            <a:xfrm>
-              <a:off x="817517" y="4727786"/>
-              <a:ext cx="7799693" cy="0"/>
+            <p:cNvPr id="27" name="pl27"/>
+            <p:cNvSpPr/>
+            <p:nvPr/>
+          </p:nvSpPr>
+          <p:spPr>
+            <a:xfrm>
+              <a:off x="887106" y="3100960"/>
+              <a:ext cx="7660515" cy="0"/>
             </a:xfrm>
             <a:custGeom>
               <a:avLst/>
               <a:pathLst>
-                <a:path w="7799693" h="0">
+                <a:path w="7660515" h="0">
                   <a:moveTo>
                     <a:pt x="0" y="0"/>
                   </a:moveTo>
                   <a:lnTo>
-                    <a:pt x="7799693" y="0"/>
-                  </a:lnTo>
-                  <a:lnTo>
-                    <a:pt x="7799693" y="0"/>
+                    <a:pt x="7660515" y="0"/>
+                  </a:lnTo>
+                  <a:lnTo>
+                    <a:pt x="7660515" y="0"/>
                   </a:lnTo>
                 </a:path>
               </a:pathLst>
@@ -4466,21 +4498,21 @@
         </p:sp>
         <p:sp>
           <p:nvSpPr>
-            <p:cNvPr id="27" name="pl27"/>
-            <p:cNvSpPr/>
-            <p:nvPr/>
-          </p:nvSpPr>
-          <p:spPr>
-            <a:xfrm>
-              <a:off x="4293144" y="2073503"/>
-              <a:ext cx="0" cy="3649639"/>
+            <p:cNvPr id="28" name="pl28"/>
+            <p:cNvSpPr/>
+            <p:nvPr/>
+          </p:nvSpPr>
+          <p:spPr>
+            <a:xfrm>
+              <a:off x="4300713" y="2143092"/>
+              <a:ext cx="0" cy="1317069"/>
             </a:xfrm>
             <a:custGeom>
               <a:avLst/>
               <a:pathLst>
-                <a:path w="0" h="3649639">
+                <a:path w="0" h="1317069">
                   <a:moveTo>
-                    <a:pt x="0" y="3649639"/>
+                    <a:pt x="0" y="1317069"/>
                   </a:moveTo>
                   <a:lnTo>
                     <a:pt x="0" y="0"/>
@@ -4509,21 +4541,21 @@
         </p:sp>
         <p:sp>
           <p:nvSpPr>
-            <p:cNvPr id="28" name="pl28"/>
-            <p:cNvSpPr/>
-            <p:nvPr/>
-          </p:nvSpPr>
-          <p:spPr>
-            <a:xfrm>
-              <a:off x="3074393" y="2073503"/>
-              <a:ext cx="0" cy="3649639"/>
+            <p:cNvPr id="29" name="pl29"/>
+            <p:cNvSpPr/>
+            <p:nvPr/>
+          </p:nvSpPr>
+          <p:spPr>
+            <a:xfrm>
+              <a:off x="3103710" y="2143092"/>
+              <a:ext cx="0" cy="1317069"/>
             </a:xfrm>
             <a:custGeom>
               <a:avLst/>
               <a:pathLst>
-                <a:path w="0" h="3649639">
+                <a:path w="0" h="1317069">
                   <a:moveTo>
-                    <a:pt x="0" y="3649639"/>
+                    <a:pt x="0" y="1317069"/>
                   </a:moveTo>
                   <a:lnTo>
                     <a:pt x="0" y="0"/>
@@ -4552,21 +4584,21 @@
         </p:sp>
         <p:sp>
           <p:nvSpPr>
-            <p:cNvPr id="29" name="pl29"/>
-            <p:cNvSpPr/>
-            <p:nvPr/>
-          </p:nvSpPr>
-          <p:spPr>
-            <a:xfrm>
-              <a:off x="5518580" y="2073503"/>
-              <a:ext cx="0" cy="3649639"/>
+            <p:cNvPr id="30" name="pl30"/>
+            <p:cNvSpPr/>
+            <p:nvPr/>
+          </p:nvSpPr>
+          <p:spPr>
+            <a:xfrm>
+              <a:off x="5504283" y="2143092"/>
+              <a:ext cx="0" cy="1317069"/>
             </a:xfrm>
             <a:custGeom>
               <a:avLst/>
               <a:pathLst>
-                <a:path w="0" h="3649639">
+                <a:path w="0" h="1317069">
                   <a:moveTo>
-                    <a:pt x="0" y="3649639"/>
+                    <a:pt x="0" y="1317069"/>
                   </a:moveTo>
                   <a:lnTo>
                     <a:pt x="0" y="0"/>
@@ -4595,13 +4627,13 @@
         </p:sp>
         <p:sp>
           <p:nvSpPr>
-            <p:cNvPr id="30" name="tx30"/>
-            <p:cNvSpPr/>
-            <p:nvPr/>
-          </p:nvSpPr>
-          <p:spPr>
-            <a:xfrm>
-              <a:off x="692708" y="5517199"/>
+            <p:cNvPr id="31" name="tx31"/>
+            <p:cNvSpPr/>
+            <p:nvPr/>
+          </p:nvSpPr>
+          <p:spPr>
+            <a:xfrm>
+              <a:off x="762297" y="3360243"/>
               <a:ext cx="62179" cy="80101"/>
             </a:xfrm>
             <a:prstGeom prst="rect">
@@ -4641,13 +4673,13 @@
         </p:sp>
         <p:sp>
           <p:nvSpPr>
-            <p:cNvPr id="31" name="tx31"/>
-            <p:cNvSpPr/>
-            <p:nvPr/>
-          </p:nvSpPr>
-          <p:spPr>
-            <a:xfrm>
-              <a:off x="692708" y="4687735"/>
+            <p:cNvPr id="32" name="tx32"/>
+            <p:cNvSpPr/>
+            <p:nvPr/>
+          </p:nvSpPr>
+          <p:spPr>
+            <a:xfrm>
+              <a:off x="762297" y="3060909"/>
               <a:ext cx="62179" cy="80101"/>
             </a:xfrm>
             <a:prstGeom prst="rect">
@@ -4687,13 +4719,13 @@
         </p:sp>
         <p:sp>
           <p:nvSpPr>
-            <p:cNvPr id="32" name="tx32"/>
-            <p:cNvSpPr/>
-            <p:nvPr/>
-          </p:nvSpPr>
-          <p:spPr>
-            <a:xfrm>
-              <a:off x="692708" y="3858272"/>
+            <p:cNvPr id="33" name="tx33"/>
+            <p:cNvSpPr/>
+            <p:nvPr/>
+          </p:nvSpPr>
+          <p:spPr>
+            <a:xfrm>
+              <a:off x="762297" y="2761575"/>
               <a:ext cx="62179" cy="80101"/>
             </a:xfrm>
             <a:prstGeom prst="rect">
@@ -4733,13 +4765,13 @@
         </p:sp>
         <p:sp>
           <p:nvSpPr>
-            <p:cNvPr id="33" name="tx33"/>
-            <p:cNvSpPr/>
-            <p:nvPr/>
-          </p:nvSpPr>
-          <p:spPr>
-            <a:xfrm>
-              <a:off x="692708" y="3028808"/>
+            <p:cNvPr id="34" name="tx34"/>
+            <p:cNvSpPr/>
+            <p:nvPr/>
+          </p:nvSpPr>
+          <p:spPr>
+            <a:xfrm>
+              <a:off x="762297" y="2462242"/>
               <a:ext cx="62179" cy="80101"/>
             </a:xfrm>
             <a:prstGeom prst="rect">
@@ -4779,13 +4811,13 @@
         </p:sp>
         <p:sp>
           <p:nvSpPr>
-            <p:cNvPr id="34" name="tx34"/>
-            <p:cNvSpPr/>
-            <p:nvPr/>
-          </p:nvSpPr>
-          <p:spPr>
-            <a:xfrm>
-              <a:off x="692708" y="2199345"/>
+            <p:cNvPr id="35" name="tx35"/>
+            <p:cNvSpPr/>
+            <p:nvPr/>
+          </p:nvSpPr>
+          <p:spPr>
+            <a:xfrm>
+              <a:off x="762297" y="2162908"/>
               <a:ext cx="62179" cy="80101"/>
             </a:xfrm>
             <a:prstGeom prst="rect">
@@ -4825,13 +4857,13 @@
         </p:sp>
         <p:sp>
           <p:nvSpPr>
-            <p:cNvPr id="35" name="tx35"/>
-            <p:cNvSpPr/>
-            <p:nvPr/>
-          </p:nvSpPr>
-          <p:spPr>
-            <a:xfrm>
-              <a:off x="2134610" y="5785772"/>
+            <p:cNvPr id="36" name="tx36"/>
+            <p:cNvSpPr/>
+            <p:nvPr/>
+          </p:nvSpPr>
+          <p:spPr>
+            <a:xfrm>
+              <a:off x="2179256" y="3522791"/>
               <a:ext cx="161574" cy="80101"/>
             </a:xfrm>
             <a:prstGeom prst="rect">
@@ -4871,13 +4903,13 @@
         </p:sp>
         <p:sp>
           <p:nvSpPr>
-            <p:cNvPr id="36" name="tx36"/>
-            <p:cNvSpPr/>
-            <p:nvPr/>
-          </p:nvSpPr>
-          <p:spPr>
-            <a:xfrm>
-              <a:off x="3875731" y="5785772"/>
+            <p:cNvPr id="37" name="tx37"/>
+            <p:cNvSpPr/>
+            <p:nvPr/>
+          </p:nvSpPr>
+          <p:spPr>
+            <a:xfrm>
+              <a:off x="3889308" y="3522791"/>
               <a:ext cx="161574" cy="80101"/>
             </a:xfrm>
             <a:prstGeom prst="rect">
@@ -4917,13 +4949,13 @@
         </p:sp>
         <p:sp>
           <p:nvSpPr>
-            <p:cNvPr id="37" name="tx37"/>
-            <p:cNvSpPr/>
-            <p:nvPr/>
-          </p:nvSpPr>
-          <p:spPr>
-            <a:xfrm>
-              <a:off x="5666549" y="5785772"/>
+            <p:cNvPr id="38" name="tx38"/>
+            <p:cNvSpPr/>
+            <p:nvPr/>
+          </p:nvSpPr>
+          <p:spPr>
+            <a:xfrm>
+              <a:off x="5649057" y="3522791"/>
               <a:ext cx="62179" cy="80101"/>
             </a:xfrm>
             <a:prstGeom prst="rect">
@@ -4963,13 +4995,13 @@
         </p:sp>
         <p:sp>
           <p:nvSpPr>
-            <p:cNvPr id="38" name="tx38"/>
-            <p:cNvSpPr/>
-            <p:nvPr/>
-          </p:nvSpPr>
-          <p:spPr>
-            <a:xfrm>
-              <a:off x="7376580" y="5785772"/>
+            <p:cNvPr id="39" name="tx39"/>
+            <p:cNvSpPr/>
+            <p:nvPr/>
+          </p:nvSpPr>
+          <p:spPr>
+            <a:xfrm>
+              <a:off x="7328020" y="3522791"/>
               <a:ext cx="124358" cy="80101"/>
             </a:xfrm>
             <a:prstGeom prst="rect">
@@ -5009,13 +5041,13 @@
         </p:sp>
         <p:sp>
           <p:nvSpPr>
-            <p:cNvPr id="39" name="tx39"/>
-            <p:cNvSpPr/>
-            <p:nvPr/>
-          </p:nvSpPr>
-          <p:spPr>
-            <a:xfrm>
-              <a:off x="1561815" y="5925448"/>
+            <p:cNvPr id="40" name="tx40"/>
+            <p:cNvSpPr/>
+            <p:nvPr/>
+          </p:nvSpPr>
+          <p:spPr>
+            <a:xfrm>
+              <a:off x="1561815" y="3662467"/>
               <a:ext cx="6311097" cy="100218"/>
             </a:xfrm>
             <a:prstGeom prst="rect">
@@ -5055,13 +5087,13 @@
         </p:sp>
         <p:sp>
           <p:nvSpPr>
-            <p:cNvPr id="40" name="tx40"/>
+            <p:cNvPr id="41" name="tx41"/>
             <p:cNvSpPr/>
             <p:nvPr/>
           </p:nvSpPr>
           <p:spPr>
             <a:xfrm rot="-5400000">
-              <a:off x="68446" y="3848213"/>
+              <a:off x="138035" y="2751517"/>
               <a:ext cx="1016904" cy="100218"/>
             </a:xfrm>
             <a:prstGeom prst="rect">
@@ -5101,13 +5133,13 @@
         </p:sp>
         <p:sp>
           <p:nvSpPr>
-            <p:cNvPr id="41" name="tx41"/>
-            <p:cNvSpPr/>
-            <p:nvPr/>
-          </p:nvSpPr>
-          <p:spPr>
-            <a:xfrm>
-              <a:off x="817517" y="1896563"/>
+            <p:cNvPr id="42" name="tx42"/>
+            <p:cNvSpPr/>
+            <p:nvPr/>
+          </p:nvSpPr>
+          <p:spPr>
+            <a:xfrm>
+              <a:off x="887106" y="1966152"/>
               <a:ext cx="7023414" cy="82021"/>
             </a:xfrm>
             <a:prstGeom prst="rect">
@@ -5147,13 +5179,3555 @@
         </p:sp>
         <p:sp>
           <p:nvSpPr>
-            <p:cNvPr id="42" name="tx42"/>
-            <p:cNvSpPr/>
-            <p:nvPr/>
-          </p:nvSpPr>
-          <p:spPr>
-            <a:xfrm>
-              <a:off x="817517" y="1669789"/>
+            <p:cNvPr id="43" name="tx43"/>
+            <p:cNvSpPr/>
+            <p:nvPr/>
+          </p:nvSpPr>
+          <p:spPr>
+            <a:xfrm>
+              <a:off x="887106" y="1739378"/>
+              <a:ext cx="4579863" cy="120152"/>
+            </a:xfrm>
+            <a:prstGeom prst="rect">
+              <a:avLst/>
+            </a:prstGeom>
+            <a:noFill/>
+          </p:spPr>
+          <p:txBody>
+            <a:bodyPr lIns="0" rIns="0" tIns="0" bIns="0" anchorCtr="1" anchor="ctr" wrap="none"/>
+            <a:lstStyle/>
+            <a:p>
+              <a:pPr algn="l" marL="0" marR="0" indent="0">
+                <a:lnSpc>
+                  <a:spcPts val="1320"/>
+                </a:lnSpc>
+                <a:spcBef>
+                  <a:spcPts val="0"/>
+                </a:spcBef>
+                <a:spcAft>
+                  <a:spcPts val="0"/>
+                </a:spcAft>
+              </a:pPr>
+              <a:r>
+                <a:rPr sz="1320">
+                  <a:solidFill>
+                    <a:srgbClr val="000000">
+                      <a:alpha val="100000"/>
+                    </a:srgbClr>
+                  </a:solidFill>
+                  <a:latin typeface="Helvetica"/>
+                  <a:cs typeface="Helvetica"/>
+                </a:rPr>
+                <a:t>Thrombocytopenia Grade 3 (Sensitivity, Carboplatin AUC ≥ 3)</a:t>
+              </a:r>
+            </a:p>
+          </p:txBody>
+        </p:sp>
+        <p:sp>
+          <p:nvSpPr>
+            <p:cNvPr id="44" name="pl44"/>
+            <p:cNvSpPr/>
+            <p:nvPr/>
+          </p:nvSpPr>
+          <p:spPr>
+            <a:xfrm>
+              <a:off x="887106" y="5444019"/>
+              <a:ext cx="7660515" cy="0"/>
+            </a:xfrm>
+            <a:custGeom>
+              <a:avLst/>
+              <a:pathLst>
+                <a:path w="7660515" h="0">
+                  <a:moveTo>
+                    <a:pt x="0" y="0"/>
+                  </a:moveTo>
+                  <a:lnTo>
+                    <a:pt x="7660515" y="0"/>
+                  </a:lnTo>
+                  <a:lnTo>
+                    <a:pt x="7660515" y="0"/>
+                  </a:lnTo>
+                </a:path>
+              </a:pathLst>
+            </a:custGeom>
+            <a:ln w="6775" cap="flat">
+              <a:solidFill>
+                <a:srgbClr val="EBEBEB">
+                  <a:alpha val="100000"/>
+                </a:srgbClr>
+              </a:solidFill>
+              <a:prstDash val="solid"/>
+              <a:round/>
+            </a:ln>
+          </p:spPr>
+          <p:txBody>
+            <a:bodyPr/>
+            <a:lstStyle/>
+            <a:p/>
+          </p:txBody>
+        </p:sp>
+        <p:sp>
+          <p:nvSpPr>
+            <p:cNvPr id="45" name="pl45"/>
+            <p:cNvSpPr/>
+            <p:nvPr/>
+          </p:nvSpPr>
+          <p:spPr>
+            <a:xfrm>
+              <a:off x="887106" y="5144686"/>
+              <a:ext cx="7660515" cy="0"/>
+            </a:xfrm>
+            <a:custGeom>
+              <a:avLst/>
+              <a:pathLst>
+                <a:path w="7660515" h="0">
+                  <a:moveTo>
+                    <a:pt x="0" y="0"/>
+                  </a:moveTo>
+                  <a:lnTo>
+                    <a:pt x="7660515" y="0"/>
+                  </a:lnTo>
+                  <a:lnTo>
+                    <a:pt x="7660515" y="0"/>
+                  </a:lnTo>
+                </a:path>
+              </a:pathLst>
+            </a:custGeom>
+            <a:ln w="6775" cap="flat">
+              <a:solidFill>
+                <a:srgbClr val="EBEBEB">
+                  <a:alpha val="100000"/>
+                </a:srgbClr>
+              </a:solidFill>
+              <a:prstDash val="solid"/>
+              <a:round/>
+            </a:ln>
+          </p:spPr>
+          <p:txBody>
+            <a:bodyPr/>
+            <a:lstStyle/>
+            <a:p/>
+          </p:txBody>
+        </p:sp>
+        <p:sp>
+          <p:nvSpPr>
+            <p:cNvPr id="46" name="pl46"/>
+            <p:cNvSpPr/>
+            <p:nvPr/>
+          </p:nvSpPr>
+          <p:spPr>
+            <a:xfrm>
+              <a:off x="887106" y="4845352"/>
+              <a:ext cx="7660515" cy="0"/>
+            </a:xfrm>
+            <a:custGeom>
+              <a:avLst/>
+              <a:pathLst>
+                <a:path w="7660515" h="0">
+                  <a:moveTo>
+                    <a:pt x="0" y="0"/>
+                  </a:moveTo>
+                  <a:lnTo>
+                    <a:pt x="7660515" y="0"/>
+                  </a:lnTo>
+                  <a:lnTo>
+                    <a:pt x="7660515" y="0"/>
+                  </a:lnTo>
+                </a:path>
+              </a:pathLst>
+            </a:custGeom>
+            <a:ln w="6775" cap="flat">
+              <a:solidFill>
+                <a:srgbClr val="EBEBEB">
+                  <a:alpha val="100000"/>
+                </a:srgbClr>
+              </a:solidFill>
+              <a:prstDash val="solid"/>
+              <a:round/>
+            </a:ln>
+          </p:spPr>
+          <p:txBody>
+            <a:bodyPr/>
+            <a:lstStyle/>
+            <a:p/>
+          </p:txBody>
+        </p:sp>
+        <p:sp>
+          <p:nvSpPr>
+            <p:cNvPr id="47" name="pl47"/>
+            <p:cNvSpPr/>
+            <p:nvPr/>
+          </p:nvSpPr>
+          <p:spPr>
+            <a:xfrm>
+              <a:off x="887106" y="4546018"/>
+              <a:ext cx="7660515" cy="0"/>
+            </a:xfrm>
+            <a:custGeom>
+              <a:avLst/>
+              <a:pathLst>
+                <a:path w="7660515" h="0">
+                  <a:moveTo>
+                    <a:pt x="0" y="0"/>
+                  </a:moveTo>
+                  <a:lnTo>
+                    <a:pt x="7660515" y="0"/>
+                  </a:lnTo>
+                  <a:lnTo>
+                    <a:pt x="7660515" y="0"/>
+                  </a:lnTo>
+                </a:path>
+              </a:pathLst>
+            </a:custGeom>
+            <a:ln w="6775" cap="flat">
+              <a:solidFill>
+                <a:srgbClr val="EBEBEB">
+                  <a:alpha val="100000"/>
+                </a:srgbClr>
+              </a:solidFill>
+              <a:prstDash val="solid"/>
+              <a:round/>
+            </a:ln>
+          </p:spPr>
+          <p:txBody>
+            <a:bodyPr/>
+            <a:lstStyle/>
+            <a:p/>
+          </p:txBody>
+        </p:sp>
+        <p:sp>
+          <p:nvSpPr>
+            <p:cNvPr id="48" name="pl48"/>
+            <p:cNvSpPr/>
+            <p:nvPr/>
+          </p:nvSpPr>
+          <p:spPr>
+            <a:xfrm>
+              <a:off x="977504" y="4336484"/>
+              <a:ext cx="0" cy="1317069"/>
+            </a:xfrm>
+            <a:custGeom>
+              <a:avLst/>
+              <a:pathLst>
+                <a:path w="0" h="1317069">
+                  <a:moveTo>
+                    <a:pt x="0" y="1317069"/>
+                  </a:moveTo>
+                  <a:lnTo>
+                    <a:pt x="0" y="0"/>
+                  </a:lnTo>
+                  <a:lnTo>
+                    <a:pt x="0" y="0"/>
+                  </a:lnTo>
+                </a:path>
+              </a:pathLst>
+            </a:custGeom>
+            <a:ln w="6775" cap="flat">
+              <a:solidFill>
+                <a:srgbClr val="EBEBEB">
+                  <a:alpha val="100000"/>
+                </a:srgbClr>
+              </a:solidFill>
+              <a:prstDash val="solid"/>
+              <a:round/>
+            </a:ln>
+          </p:spPr>
+          <p:txBody>
+            <a:bodyPr/>
+            <a:lstStyle/>
+            <a:p/>
+          </p:txBody>
+        </p:sp>
+        <p:sp>
+          <p:nvSpPr>
+            <p:cNvPr id="49" name="pl49"/>
+            <p:cNvSpPr/>
+            <p:nvPr/>
+          </p:nvSpPr>
+          <p:spPr>
+            <a:xfrm>
+              <a:off x="1832530" y="4336484"/>
+              <a:ext cx="0" cy="1317069"/>
+            </a:xfrm>
+            <a:custGeom>
+              <a:avLst/>
+              <a:pathLst>
+                <a:path w="0" h="1317069">
+                  <a:moveTo>
+                    <a:pt x="0" y="1317069"/>
+                  </a:moveTo>
+                  <a:lnTo>
+                    <a:pt x="0" y="0"/>
+                  </a:lnTo>
+                  <a:lnTo>
+                    <a:pt x="0" y="0"/>
+                  </a:lnTo>
+                </a:path>
+              </a:pathLst>
+            </a:custGeom>
+            <a:ln w="6775" cap="flat">
+              <a:solidFill>
+                <a:srgbClr val="EBEBEB">
+                  <a:alpha val="100000"/>
+                </a:srgbClr>
+              </a:solidFill>
+              <a:prstDash val="solid"/>
+              <a:round/>
+            </a:ln>
+          </p:spPr>
+          <p:txBody>
+            <a:bodyPr/>
+            <a:lstStyle/>
+            <a:p/>
+          </p:txBody>
+        </p:sp>
+        <p:sp>
+          <p:nvSpPr>
+            <p:cNvPr id="50" name="pl50"/>
+            <p:cNvSpPr/>
+            <p:nvPr/>
+          </p:nvSpPr>
+          <p:spPr>
+            <a:xfrm>
+              <a:off x="2687556" y="4336484"/>
+              <a:ext cx="0" cy="1317069"/>
+            </a:xfrm>
+            <a:custGeom>
+              <a:avLst/>
+              <a:pathLst>
+                <a:path w="0" h="1317069">
+                  <a:moveTo>
+                    <a:pt x="0" y="1317069"/>
+                  </a:moveTo>
+                  <a:lnTo>
+                    <a:pt x="0" y="0"/>
+                  </a:lnTo>
+                  <a:lnTo>
+                    <a:pt x="0" y="0"/>
+                  </a:lnTo>
+                </a:path>
+              </a:pathLst>
+            </a:custGeom>
+            <a:ln w="6775" cap="flat">
+              <a:solidFill>
+                <a:srgbClr val="EBEBEB">
+                  <a:alpha val="100000"/>
+                </a:srgbClr>
+              </a:solidFill>
+              <a:prstDash val="solid"/>
+              <a:round/>
+            </a:ln>
+          </p:spPr>
+          <p:txBody>
+            <a:bodyPr/>
+            <a:lstStyle/>
+            <a:p/>
+          </p:txBody>
+        </p:sp>
+        <p:sp>
+          <p:nvSpPr>
+            <p:cNvPr id="51" name="pl51"/>
+            <p:cNvSpPr/>
+            <p:nvPr/>
+          </p:nvSpPr>
+          <p:spPr>
+            <a:xfrm>
+              <a:off x="3542582" y="4336484"/>
+              <a:ext cx="0" cy="1317069"/>
+            </a:xfrm>
+            <a:custGeom>
+              <a:avLst/>
+              <a:pathLst>
+                <a:path w="0" h="1317069">
+                  <a:moveTo>
+                    <a:pt x="0" y="1317069"/>
+                  </a:moveTo>
+                  <a:lnTo>
+                    <a:pt x="0" y="0"/>
+                  </a:lnTo>
+                  <a:lnTo>
+                    <a:pt x="0" y="0"/>
+                  </a:lnTo>
+                </a:path>
+              </a:pathLst>
+            </a:custGeom>
+            <a:ln w="6775" cap="flat">
+              <a:solidFill>
+                <a:srgbClr val="EBEBEB">
+                  <a:alpha val="100000"/>
+                </a:srgbClr>
+              </a:solidFill>
+              <a:prstDash val="solid"/>
+              <a:round/>
+            </a:ln>
+          </p:spPr>
+          <p:txBody>
+            <a:bodyPr/>
+            <a:lstStyle/>
+            <a:p/>
+          </p:txBody>
+        </p:sp>
+        <p:sp>
+          <p:nvSpPr>
+            <p:cNvPr id="52" name="pl52"/>
+            <p:cNvSpPr/>
+            <p:nvPr/>
+          </p:nvSpPr>
+          <p:spPr>
+            <a:xfrm>
+              <a:off x="4397608" y="4336484"/>
+              <a:ext cx="0" cy="1317069"/>
+            </a:xfrm>
+            <a:custGeom>
+              <a:avLst/>
+              <a:pathLst>
+                <a:path w="0" h="1317069">
+                  <a:moveTo>
+                    <a:pt x="0" y="1317069"/>
+                  </a:moveTo>
+                  <a:lnTo>
+                    <a:pt x="0" y="0"/>
+                  </a:lnTo>
+                  <a:lnTo>
+                    <a:pt x="0" y="0"/>
+                  </a:lnTo>
+                </a:path>
+              </a:pathLst>
+            </a:custGeom>
+            <a:ln w="6775" cap="flat">
+              <a:solidFill>
+                <a:srgbClr val="EBEBEB">
+                  <a:alpha val="100000"/>
+                </a:srgbClr>
+              </a:solidFill>
+              <a:prstDash val="solid"/>
+              <a:round/>
+            </a:ln>
+          </p:spPr>
+          <p:txBody>
+            <a:bodyPr/>
+            <a:lstStyle/>
+            <a:p/>
+          </p:txBody>
+        </p:sp>
+        <p:sp>
+          <p:nvSpPr>
+            <p:cNvPr id="53" name="pl53"/>
+            <p:cNvSpPr/>
+            <p:nvPr/>
+          </p:nvSpPr>
+          <p:spPr>
+            <a:xfrm>
+              <a:off x="5252634" y="4336484"/>
+              <a:ext cx="0" cy="1317069"/>
+            </a:xfrm>
+            <a:custGeom>
+              <a:avLst/>
+              <a:pathLst>
+                <a:path w="0" h="1317069">
+                  <a:moveTo>
+                    <a:pt x="0" y="1317069"/>
+                  </a:moveTo>
+                  <a:lnTo>
+                    <a:pt x="0" y="0"/>
+                  </a:lnTo>
+                  <a:lnTo>
+                    <a:pt x="0" y="0"/>
+                  </a:lnTo>
+                </a:path>
+              </a:pathLst>
+            </a:custGeom>
+            <a:ln w="6775" cap="flat">
+              <a:solidFill>
+                <a:srgbClr val="EBEBEB">
+                  <a:alpha val="100000"/>
+                </a:srgbClr>
+              </a:solidFill>
+              <a:prstDash val="solid"/>
+              <a:round/>
+            </a:ln>
+          </p:spPr>
+          <p:txBody>
+            <a:bodyPr/>
+            <a:lstStyle/>
+            <a:p/>
+          </p:txBody>
+        </p:sp>
+        <p:sp>
+          <p:nvSpPr>
+            <p:cNvPr id="54" name="pl54"/>
+            <p:cNvSpPr/>
+            <p:nvPr/>
+          </p:nvSpPr>
+          <p:spPr>
+            <a:xfrm>
+              <a:off x="6107660" y="4336484"/>
+              <a:ext cx="0" cy="1317069"/>
+            </a:xfrm>
+            <a:custGeom>
+              <a:avLst/>
+              <a:pathLst>
+                <a:path w="0" h="1317069">
+                  <a:moveTo>
+                    <a:pt x="0" y="1317069"/>
+                  </a:moveTo>
+                  <a:lnTo>
+                    <a:pt x="0" y="0"/>
+                  </a:lnTo>
+                  <a:lnTo>
+                    <a:pt x="0" y="0"/>
+                  </a:lnTo>
+                </a:path>
+              </a:pathLst>
+            </a:custGeom>
+            <a:ln w="6775" cap="flat">
+              <a:solidFill>
+                <a:srgbClr val="EBEBEB">
+                  <a:alpha val="100000"/>
+                </a:srgbClr>
+              </a:solidFill>
+              <a:prstDash val="solid"/>
+              <a:round/>
+            </a:ln>
+          </p:spPr>
+          <p:txBody>
+            <a:bodyPr/>
+            <a:lstStyle/>
+            <a:p/>
+          </p:txBody>
+        </p:sp>
+        <p:sp>
+          <p:nvSpPr>
+            <p:cNvPr id="55" name="pl55"/>
+            <p:cNvSpPr/>
+            <p:nvPr/>
+          </p:nvSpPr>
+          <p:spPr>
+            <a:xfrm>
+              <a:off x="6962686" y="4336484"/>
+              <a:ext cx="0" cy="1317069"/>
+            </a:xfrm>
+            <a:custGeom>
+              <a:avLst/>
+              <a:pathLst>
+                <a:path w="0" h="1317069">
+                  <a:moveTo>
+                    <a:pt x="0" y="1317069"/>
+                  </a:moveTo>
+                  <a:lnTo>
+                    <a:pt x="0" y="0"/>
+                  </a:lnTo>
+                  <a:lnTo>
+                    <a:pt x="0" y="0"/>
+                  </a:lnTo>
+                </a:path>
+              </a:pathLst>
+            </a:custGeom>
+            <a:ln w="6775" cap="flat">
+              <a:solidFill>
+                <a:srgbClr val="EBEBEB">
+                  <a:alpha val="100000"/>
+                </a:srgbClr>
+              </a:solidFill>
+              <a:prstDash val="solid"/>
+              <a:round/>
+            </a:ln>
+          </p:spPr>
+          <p:txBody>
+            <a:bodyPr/>
+            <a:lstStyle/>
+            <a:p/>
+          </p:txBody>
+        </p:sp>
+        <p:sp>
+          <p:nvSpPr>
+            <p:cNvPr id="56" name="pl56"/>
+            <p:cNvSpPr/>
+            <p:nvPr/>
+          </p:nvSpPr>
+          <p:spPr>
+            <a:xfrm>
+              <a:off x="7817712" y="4336484"/>
+              <a:ext cx="0" cy="1317069"/>
+            </a:xfrm>
+            <a:custGeom>
+              <a:avLst/>
+              <a:pathLst>
+                <a:path w="0" h="1317069">
+                  <a:moveTo>
+                    <a:pt x="0" y="1317069"/>
+                  </a:moveTo>
+                  <a:lnTo>
+                    <a:pt x="0" y="0"/>
+                  </a:lnTo>
+                  <a:lnTo>
+                    <a:pt x="0" y="0"/>
+                  </a:lnTo>
+                </a:path>
+              </a:pathLst>
+            </a:custGeom>
+            <a:ln w="6775" cap="flat">
+              <a:solidFill>
+                <a:srgbClr val="EBEBEB">
+                  <a:alpha val="100000"/>
+                </a:srgbClr>
+              </a:solidFill>
+              <a:prstDash val="solid"/>
+              <a:round/>
+            </a:ln>
+          </p:spPr>
+          <p:txBody>
+            <a:bodyPr/>
+            <a:lstStyle/>
+            <a:p/>
+          </p:txBody>
+        </p:sp>
+        <p:sp>
+          <p:nvSpPr>
+            <p:cNvPr id="57" name="pl57"/>
+            <p:cNvSpPr/>
+            <p:nvPr/>
+          </p:nvSpPr>
+          <p:spPr>
+            <a:xfrm>
+              <a:off x="887106" y="5593686"/>
+              <a:ext cx="7660515" cy="0"/>
+            </a:xfrm>
+            <a:custGeom>
+              <a:avLst/>
+              <a:pathLst>
+                <a:path w="7660515" h="0">
+                  <a:moveTo>
+                    <a:pt x="0" y="0"/>
+                  </a:moveTo>
+                  <a:lnTo>
+                    <a:pt x="7660515" y="0"/>
+                  </a:lnTo>
+                  <a:lnTo>
+                    <a:pt x="7660515" y="0"/>
+                  </a:lnTo>
+                </a:path>
+              </a:pathLst>
+            </a:custGeom>
+            <a:ln w="13550" cap="flat">
+              <a:solidFill>
+                <a:srgbClr val="EBEBEB">
+                  <a:alpha val="100000"/>
+                </a:srgbClr>
+              </a:solidFill>
+              <a:prstDash val="solid"/>
+              <a:round/>
+            </a:ln>
+          </p:spPr>
+          <p:txBody>
+            <a:bodyPr/>
+            <a:lstStyle/>
+            <a:p/>
+          </p:txBody>
+        </p:sp>
+        <p:sp>
+          <p:nvSpPr>
+            <p:cNvPr id="58" name="pl58"/>
+            <p:cNvSpPr/>
+            <p:nvPr/>
+          </p:nvSpPr>
+          <p:spPr>
+            <a:xfrm>
+              <a:off x="887106" y="5294352"/>
+              <a:ext cx="7660515" cy="0"/>
+            </a:xfrm>
+            <a:custGeom>
+              <a:avLst/>
+              <a:pathLst>
+                <a:path w="7660515" h="0">
+                  <a:moveTo>
+                    <a:pt x="0" y="0"/>
+                  </a:moveTo>
+                  <a:lnTo>
+                    <a:pt x="7660515" y="0"/>
+                  </a:lnTo>
+                  <a:lnTo>
+                    <a:pt x="7660515" y="0"/>
+                  </a:lnTo>
+                </a:path>
+              </a:pathLst>
+            </a:custGeom>
+            <a:ln w="13550" cap="flat">
+              <a:solidFill>
+                <a:srgbClr val="EBEBEB">
+                  <a:alpha val="100000"/>
+                </a:srgbClr>
+              </a:solidFill>
+              <a:prstDash val="solid"/>
+              <a:round/>
+            </a:ln>
+          </p:spPr>
+          <p:txBody>
+            <a:bodyPr/>
+            <a:lstStyle/>
+            <a:p/>
+          </p:txBody>
+        </p:sp>
+        <p:sp>
+          <p:nvSpPr>
+            <p:cNvPr id="59" name="pl59"/>
+            <p:cNvSpPr/>
+            <p:nvPr/>
+          </p:nvSpPr>
+          <p:spPr>
+            <a:xfrm>
+              <a:off x="887106" y="4995019"/>
+              <a:ext cx="7660515" cy="0"/>
+            </a:xfrm>
+            <a:custGeom>
+              <a:avLst/>
+              <a:pathLst>
+                <a:path w="7660515" h="0">
+                  <a:moveTo>
+                    <a:pt x="0" y="0"/>
+                  </a:moveTo>
+                  <a:lnTo>
+                    <a:pt x="7660515" y="0"/>
+                  </a:lnTo>
+                  <a:lnTo>
+                    <a:pt x="7660515" y="0"/>
+                  </a:lnTo>
+                </a:path>
+              </a:pathLst>
+            </a:custGeom>
+            <a:ln w="13550" cap="flat">
+              <a:solidFill>
+                <a:srgbClr val="EBEBEB">
+                  <a:alpha val="100000"/>
+                </a:srgbClr>
+              </a:solidFill>
+              <a:prstDash val="solid"/>
+              <a:round/>
+            </a:ln>
+          </p:spPr>
+          <p:txBody>
+            <a:bodyPr/>
+            <a:lstStyle/>
+            <a:p/>
+          </p:txBody>
+        </p:sp>
+        <p:sp>
+          <p:nvSpPr>
+            <p:cNvPr id="60" name="pl60"/>
+            <p:cNvSpPr/>
+            <p:nvPr/>
+          </p:nvSpPr>
+          <p:spPr>
+            <a:xfrm>
+              <a:off x="887106" y="4695685"/>
+              <a:ext cx="7660515" cy="0"/>
+            </a:xfrm>
+            <a:custGeom>
+              <a:avLst/>
+              <a:pathLst>
+                <a:path w="7660515" h="0">
+                  <a:moveTo>
+                    <a:pt x="0" y="0"/>
+                  </a:moveTo>
+                  <a:lnTo>
+                    <a:pt x="7660515" y="0"/>
+                  </a:lnTo>
+                  <a:lnTo>
+                    <a:pt x="7660515" y="0"/>
+                  </a:lnTo>
+                </a:path>
+              </a:pathLst>
+            </a:custGeom>
+            <a:ln w="13550" cap="flat">
+              <a:solidFill>
+                <a:srgbClr val="EBEBEB">
+                  <a:alpha val="100000"/>
+                </a:srgbClr>
+              </a:solidFill>
+              <a:prstDash val="solid"/>
+              <a:round/>
+            </a:ln>
+          </p:spPr>
+          <p:txBody>
+            <a:bodyPr/>
+            <a:lstStyle/>
+            <a:p/>
+          </p:txBody>
+        </p:sp>
+        <p:sp>
+          <p:nvSpPr>
+            <p:cNvPr id="61" name="pl61"/>
+            <p:cNvSpPr/>
+            <p:nvPr/>
+          </p:nvSpPr>
+          <p:spPr>
+            <a:xfrm>
+              <a:off x="887106" y="4396351"/>
+              <a:ext cx="7660515" cy="0"/>
+            </a:xfrm>
+            <a:custGeom>
+              <a:avLst/>
+              <a:pathLst>
+                <a:path w="7660515" h="0">
+                  <a:moveTo>
+                    <a:pt x="0" y="0"/>
+                  </a:moveTo>
+                  <a:lnTo>
+                    <a:pt x="7660515" y="0"/>
+                  </a:lnTo>
+                  <a:lnTo>
+                    <a:pt x="7660515" y="0"/>
+                  </a:lnTo>
+                </a:path>
+              </a:pathLst>
+            </a:custGeom>
+            <a:ln w="13550" cap="flat">
+              <a:solidFill>
+                <a:srgbClr val="EBEBEB">
+                  <a:alpha val="100000"/>
+                </a:srgbClr>
+              </a:solidFill>
+              <a:prstDash val="solid"/>
+              <a:round/>
+            </a:ln>
+          </p:spPr>
+          <p:txBody>
+            <a:bodyPr/>
+            <a:lstStyle/>
+            <a:p/>
+          </p:txBody>
+        </p:sp>
+        <p:sp>
+          <p:nvSpPr>
+            <p:cNvPr id="62" name="pl62"/>
+            <p:cNvSpPr/>
+            <p:nvPr/>
+          </p:nvSpPr>
+          <p:spPr>
+            <a:xfrm>
+              <a:off x="1405017" y="4336484"/>
+              <a:ext cx="0" cy="1317069"/>
+            </a:xfrm>
+            <a:custGeom>
+              <a:avLst/>
+              <a:pathLst>
+                <a:path w="0" h="1317069">
+                  <a:moveTo>
+                    <a:pt x="0" y="1317069"/>
+                  </a:moveTo>
+                  <a:lnTo>
+                    <a:pt x="0" y="0"/>
+                  </a:lnTo>
+                  <a:lnTo>
+                    <a:pt x="0" y="0"/>
+                  </a:lnTo>
+                </a:path>
+              </a:pathLst>
+            </a:custGeom>
+            <a:ln w="13550" cap="flat">
+              <a:solidFill>
+                <a:srgbClr val="EBEBEB">
+                  <a:alpha val="100000"/>
+                </a:srgbClr>
+              </a:solidFill>
+              <a:prstDash val="solid"/>
+              <a:round/>
+            </a:ln>
+          </p:spPr>
+          <p:txBody>
+            <a:bodyPr/>
+            <a:lstStyle/>
+            <a:p/>
+          </p:txBody>
+        </p:sp>
+        <p:sp>
+          <p:nvSpPr>
+            <p:cNvPr id="63" name="pl63"/>
+            <p:cNvSpPr/>
+            <p:nvPr/>
+          </p:nvSpPr>
+          <p:spPr>
+            <a:xfrm>
+              <a:off x="2260043" y="4336484"/>
+              <a:ext cx="0" cy="1317069"/>
+            </a:xfrm>
+            <a:custGeom>
+              <a:avLst/>
+              <a:pathLst>
+                <a:path w="0" h="1317069">
+                  <a:moveTo>
+                    <a:pt x="0" y="1317069"/>
+                  </a:moveTo>
+                  <a:lnTo>
+                    <a:pt x="0" y="0"/>
+                  </a:lnTo>
+                  <a:lnTo>
+                    <a:pt x="0" y="0"/>
+                  </a:lnTo>
+                </a:path>
+              </a:pathLst>
+            </a:custGeom>
+            <a:ln w="13550" cap="flat">
+              <a:solidFill>
+                <a:srgbClr val="EBEBEB">
+                  <a:alpha val="100000"/>
+                </a:srgbClr>
+              </a:solidFill>
+              <a:prstDash val="solid"/>
+              <a:round/>
+            </a:ln>
+          </p:spPr>
+          <p:txBody>
+            <a:bodyPr/>
+            <a:lstStyle/>
+            <a:p/>
+          </p:txBody>
+        </p:sp>
+        <p:sp>
+          <p:nvSpPr>
+            <p:cNvPr id="64" name="pl64"/>
+            <p:cNvSpPr/>
+            <p:nvPr/>
+          </p:nvSpPr>
+          <p:spPr>
+            <a:xfrm>
+              <a:off x="3115069" y="4336484"/>
+              <a:ext cx="0" cy="1317069"/>
+            </a:xfrm>
+            <a:custGeom>
+              <a:avLst/>
+              <a:pathLst>
+                <a:path w="0" h="1317069">
+                  <a:moveTo>
+                    <a:pt x="0" y="1317069"/>
+                  </a:moveTo>
+                  <a:lnTo>
+                    <a:pt x="0" y="0"/>
+                  </a:lnTo>
+                  <a:lnTo>
+                    <a:pt x="0" y="0"/>
+                  </a:lnTo>
+                </a:path>
+              </a:pathLst>
+            </a:custGeom>
+            <a:ln w="13550" cap="flat">
+              <a:solidFill>
+                <a:srgbClr val="EBEBEB">
+                  <a:alpha val="100000"/>
+                </a:srgbClr>
+              </a:solidFill>
+              <a:prstDash val="solid"/>
+              <a:round/>
+            </a:ln>
+          </p:spPr>
+          <p:txBody>
+            <a:bodyPr/>
+            <a:lstStyle/>
+            <a:p/>
+          </p:txBody>
+        </p:sp>
+        <p:sp>
+          <p:nvSpPr>
+            <p:cNvPr id="65" name="pl65"/>
+            <p:cNvSpPr/>
+            <p:nvPr/>
+          </p:nvSpPr>
+          <p:spPr>
+            <a:xfrm>
+              <a:off x="3970095" y="4336484"/>
+              <a:ext cx="0" cy="1317069"/>
+            </a:xfrm>
+            <a:custGeom>
+              <a:avLst/>
+              <a:pathLst>
+                <a:path w="0" h="1317069">
+                  <a:moveTo>
+                    <a:pt x="0" y="1317069"/>
+                  </a:moveTo>
+                  <a:lnTo>
+                    <a:pt x="0" y="0"/>
+                  </a:lnTo>
+                  <a:lnTo>
+                    <a:pt x="0" y="0"/>
+                  </a:lnTo>
+                </a:path>
+              </a:pathLst>
+            </a:custGeom>
+            <a:ln w="13550" cap="flat">
+              <a:solidFill>
+                <a:srgbClr val="EBEBEB">
+                  <a:alpha val="100000"/>
+                </a:srgbClr>
+              </a:solidFill>
+              <a:prstDash val="solid"/>
+              <a:round/>
+            </a:ln>
+          </p:spPr>
+          <p:txBody>
+            <a:bodyPr/>
+            <a:lstStyle/>
+            <a:p/>
+          </p:txBody>
+        </p:sp>
+        <p:sp>
+          <p:nvSpPr>
+            <p:cNvPr id="66" name="pl66"/>
+            <p:cNvSpPr/>
+            <p:nvPr/>
+          </p:nvSpPr>
+          <p:spPr>
+            <a:xfrm>
+              <a:off x="4825121" y="4336484"/>
+              <a:ext cx="0" cy="1317069"/>
+            </a:xfrm>
+            <a:custGeom>
+              <a:avLst/>
+              <a:pathLst>
+                <a:path w="0" h="1317069">
+                  <a:moveTo>
+                    <a:pt x="0" y="1317069"/>
+                  </a:moveTo>
+                  <a:lnTo>
+                    <a:pt x="0" y="0"/>
+                  </a:lnTo>
+                  <a:lnTo>
+                    <a:pt x="0" y="0"/>
+                  </a:lnTo>
+                </a:path>
+              </a:pathLst>
+            </a:custGeom>
+            <a:ln w="13550" cap="flat">
+              <a:solidFill>
+                <a:srgbClr val="EBEBEB">
+                  <a:alpha val="100000"/>
+                </a:srgbClr>
+              </a:solidFill>
+              <a:prstDash val="solid"/>
+              <a:round/>
+            </a:ln>
+          </p:spPr>
+          <p:txBody>
+            <a:bodyPr/>
+            <a:lstStyle/>
+            <a:p/>
+          </p:txBody>
+        </p:sp>
+        <p:sp>
+          <p:nvSpPr>
+            <p:cNvPr id="67" name="pl67"/>
+            <p:cNvSpPr/>
+            <p:nvPr/>
+          </p:nvSpPr>
+          <p:spPr>
+            <a:xfrm>
+              <a:off x="5680147" y="4336484"/>
+              <a:ext cx="0" cy="1317069"/>
+            </a:xfrm>
+            <a:custGeom>
+              <a:avLst/>
+              <a:pathLst>
+                <a:path w="0" h="1317069">
+                  <a:moveTo>
+                    <a:pt x="0" y="1317069"/>
+                  </a:moveTo>
+                  <a:lnTo>
+                    <a:pt x="0" y="0"/>
+                  </a:lnTo>
+                  <a:lnTo>
+                    <a:pt x="0" y="0"/>
+                  </a:lnTo>
+                </a:path>
+              </a:pathLst>
+            </a:custGeom>
+            <a:ln w="13550" cap="flat">
+              <a:solidFill>
+                <a:srgbClr val="EBEBEB">
+                  <a:alpha val="100000"/>
+                </a:srgbClr>
+              </a:solidFill>
+              <a:prstDash val="solid"/>
+              <a:round/>
+            </a:ln>
+          </p:spPr>
+          <p:txBody>
+            <a:bodyPr/>
+            <a:lstStyle/>
+            <a:p/>
+          </p:txBody>
+        </p:sp>
+        <p:sp>
+          <p:nvSpPr>
+            <p:cNvPr id="68" name="pl68"/>
+            <p:cNvSpPr/>
+            <p:nvPr/>
+          </p:nvSpPr>
+          <p:spPr>
+            <a:xfrm>
+              <a:off x="6535173" y="4336484"/>
+              <a:ext cx="0" cy="1317069"/>
+            </a:xfrm>
+            <a:custGeom>
+              <a:avLst/>
+              <a:pathLst>
+                <a:path w="0" h="1317069">
+                  <a:moveTo>
+                    <a:pt x="0" y="1317069"/>
+                  </a:moveTo>
+                  <a:lnTo>
+                    <a:pt x="0" y="0"/>
+                  </a:lnTo>
+                  <a:lnTo>
+                    <a:pt x="0" y="0"/>
+                  </a:lnTo>
+                </a:path>
+              </a:pathLst>
+            </a:custGeom>
+            <a:ln w="13550" cap="flat">
+              <a:solidFill>
+                <a:srgbClr val="EBEBEB">
+                  <a:alpha val="100000"/>
+                </a:srgbClr>
+              </a:solidFill>
+              <a:prstDash val="solid"/>
+              <a:round/>
+            </a:ln>
+          </p:spPr>
+          <p:txBody>
+            <a:bodyPr/>
+            <a:lstStyle/>
+            <a:p/>
+          </p:txBody>
+        </p:sp>
+        <p:sp>
+          <p:nvSpPr>
+            <p:cNvPr id="69" name="pl69"/>
+            <p:cNvSpPr/>
+            <p:nvPr/>
+          </p:nvSpPr>
+          <p:spPr>
+            <a:xfrm>
+              <a:off x="7390199" y="4336484"/>
+              <a:ext cx="0" cy="1317069"/>
+            </a:xfrm>
+            <a:custGeom>
+              <a:avLst/>
+              <a:pathLst>
+                <a:path w="0" h="1317069">
+                  <a:moveTo>
+                    <a:pt x="0" y="1317069"/>
+                  </a:moveTo>
+                  <a:lnTo>
+                    <a:pt x="0" y="0"/>
+                  </a:lnTo>
+                  <a:lnTo>
+                    <a:pt x="0" y="0"/>
+                  </a:lnTo>
+                </a:path>
+              </a:pathLst>
+            </a:custGeom>
+            <a:ln w="13550" cap="flat">
+              <a:solidFill>
+                <a:srgbClr val="EBEBEB">
+                  <a:alpha val="100000"/>
+                </a:srgbClr>
+              </a:solidFill>
+              <a:prstDash val="solid"/>
+              <a:round/>
+            </a:ln>
+          </p:spPr>
+          <p:txBody>
+            <a:bodyPr/>
+            <a:lstStyle/>
+            <a:p/>
+          </p:txBody>
+        </p:sp>
+        <p:sp>
+          <p:nvSpPr>
+            <p:cNvPr id="70" name="pl70"/>
+            <p:cNvSpPr/>
+            <p:nvPr/>
+          </p:nvSpPr>
+          <p:spPr>
+            <a:xfrm>
+              <a:off x="8245225" y="4336484"/>
+              <a:ext cx="0" cy="1317069"/>
+            </a:xfrm>
+            <a:custGeom>
+              <a:avLst/>
+              <a:pathLst>
+                <a:path w="0" h="1317069">
+                  <a:moveTo>
+                    <a:pt x="0" y="1317069"/>
+                  </a:moveTo>
+                  <a:lnTo>
+                    <a:pt x="0" y="0"/>
+                  </a:lnTo>
+                  <a:lnTo>
+                    <a:pt x="0" y="0"/>
+                  </a:lnTo>
+                </a:path>
+              </a:pathLst>
+            </a:custGeom>
+            <a:ln w="13550" cap="flat">
+              <a:solidFill>
+                <a:srgbClr val="EBEBEB">
+                  <a:alpha val="100000"/>
+                </a:srgbClr>
+              </a:solidFill>
+              <a:prstDash val="solid"/>
+              <a:round/>
+            </a:ln>
+          </p:spPr>
+          <p:txBody>
+            <a:bodyPr/>
+            <a:lstStyle/>
+            <a:p/>
+          </p:txBody>
+        </p:sp>
+        <p:sp>
+          <p:nvSpPr>
+            <p:cNvPr id="71" name="pg71"/>
+            <p:cNvSpPr/>
+            <p:nvPr/>
+          </p:nvSpPr>
+          <p:spPr>
+            <a:xfrm>
+              <a:off x="1235312" y="4336484"/>
+              <a:ext cx="6964104" cy="1255963"/>
+            </a:xfrm>
+            <a:custGeom>
+              <a:avLst/>
+              <a:pathLst>
+                <a:path w="6964104" h="1255963">
+                  <a:moveTo>
+                    <a:pt x="2046076" y="0"/>
+                  </a:moveTo>
+                  <a:lnTo>
+                    <a:pt x="2110334" y="109149"/>
+                  </a:lnTo>
+                  <a:lnTo>
+                    <a:pt x="2180679" y="217372"/>
+                  </a:lnTo>
+                  <a:lnTo>
+                    <a:pt x="2251023" y="315393"/>
+                  </a:lnTo>
+                  <a:lnTo>
+                    <a:pt x="2321368" y="404174"/>
+                  </a:lnTo>
+                  <a:lnTo>
+                    <a:pt x="2391712" y="484586"/>
+                  </a:lnTo>
+                  <a:lnTo>
+                    <a:pt x="2462057" y="557418"/>
+                  </a:lnTo>
+                  <a:lnTo>
+                    <a:pt x="2532401" y="623384"/>
+                  </a:lnTo>
+                  <a:lnTo>
+                    <a:pt x="2602746" y="683132"/>
+                  </a:lnTo>
+                  <a:lnTo>
+                    <a:pt x="2673090" y="737248"/>
+                  </a:lnTo>
+                  <a:lnTo>
+                    <a:pt x="2743435" y="786262"/>
+                  </a:lnTo>
+                  <a:lnTo>
+                    <a:pt x="2813779" y="830656"/>
+                  </a:lnTo>
+                  <a:lnTo>
+                    <a:pt x="2884124" y="870865"/>
+                  </a:lnTo>
+                  <a:lnTo>
+                    <a:pt x="2954468" y="907284"/>
+                  </a:lnTo>
+                  <a:lnTo>
+                    <a:pt x="3024813" y="940269"/>
+                  </a:lnTo>
+                  <a:lnTo>
+                    <a:pt x="3095157" y="961288"/>
+                  </a:lnTo>
+                  <a:lnTo>
+                    <a:pt x="3165502" y="969220"/>
+                  </a:lnTo>
+                  <a:lnTo>
+                    <a:pt x="3235846" y="976939"/>
+                  </a:lnTo>
+                  <a:lnTo>
+                    <a:pt x="3306191" y="984451"/>
+                  </a:lnTo>
+                  <a:lnTo>
+                    <a:pt x="3376535" y="991762"/>
+                  </a:lnTo>
+                  <a:lnTo>
+                    <a:pt x="3446880" y="998877"/>
+                  </a:lnTo>
+                  <a:lnTo>
+                    <a:pt x="3517224" y="1005801"/>
+                  </a:lnTo>
+                  <a:lnTo>
+                    <a:pt x="3587569" y="1012539"/>
+                  </a:lnTo>
+                  <a:lnTo>
+                    <a:pt x="3657913" y="1019097"/>
+                  </a:lnTo>
+                  <a:lnTo>
+                    <a:pt x="3728257" y="1025479"/>
+                  </a:lnTo>
+                  <a:lnTo>
+                    <a:pt x="3798602" y="1031690"/>
+                  </a:lnTo>
+                  <a:lnTo>
+                    <a:pt x="3868946" y="1037735"/>
+                  </a:lnTo>
+                  <a:lnTo>
+                    <a:pt x="3939291" y="1043617"/>
+                  </a:lnTo>
+                  <a:lnTo>
+                    <a:pt x="4009635" y="1049342"/>
+                  </a:lnTo>
+                  <a:lnTo>
+                    <a:pt x="4079980" y="1054914"/>
+                  </a:lnTo>
+                  <a:lnTo>
+                    <a:pt x="4150324" y="1060336"/>
+                  </a:lnTo>
+                  <a:lnTo>
+                    <a:pt x="4220669" y="1065613"/>
+                  </a:lnTo>
+                  <a:lnTo>
+                    <a:pt x="4291013" y="1070748"/>
+                  </a:lnTo>
+                  <a:lnTo>
+                    <a:pt x="4361358" y="1075746"/>
+                  </a:lnTo>
+                  <a:lnTo>
+                    <a:pt x="4431702" y="1080609"/>
+                  </a:lnTo>
+                  <a:lnTo>
+                    <a:pt x="4502047" y="1085343"/>
+                  </a:lnTo>
+                  <a:lnTo>
+                    <a:pt x="4572391" y="1089949"/>
+                  </a:lnTo>
+                  <a:lnTo>
+                    <a:pt x="4642736" y="1094432"/>
+                  </a:lnTo>
+                  <a:lnTo>
+                    <a:pt x="4713080" y="1098795"/>
+                  </a:lnTo>
+                  <a:lnTo>
+                    <a:pt x="4783425" y="1103041"/>
+                  </a:lnTo>
+                  <a:lnTo>
+                    <a:pt x="4853769" y="1107173"/>
+                  </a:lnTo>
+                  <a:lnTo>
+                    <a:pt x="4924114" y="1111194"/>
+                  </a:lnTo>
+                  <a:lnTo>
+                    <a:pt x="4994458" y="1115108"/>
+                  </a:lnTo>
+                  <a:lnTo>
+                    <a:pt x="5064803" y="1118916"/>
+                  </a:lnTo>
+                  <a:lnTo>
+                    <a:pt x="5135147" y="1122623"/>
+                  </a:lnTo>
+                  <a:lnTo>
+                    <a:pt x="5205492" y="1126230"/>
+                  </a:lnTo>
+                  <a:lnTo>
+                    <a:pt x="5275836" y="1129741"/>
+                  </a:lnTo>
+                  <a:lnTo>
+                    <a:pt x="5346181" y="1133157"/>
+                  </a:lnTo>
+                  <a:lnTo>
+                    <a:pt x="5416525" y="1136482"/>
+                  </a:lnTo>
+                  <a:lnTo>
+                    <a:pt x="5486870" y="1139718"/>
+                  </a:lnTo>
+                  <a:lnTo>
+                    <a:pt x="5557214" y="1142867"/>
+                  </a:lnTo>
+                  <a:lnTo>
+                    <a:pt x="5627559" y="1145931"/>
+                  </a:lnTo>
+                  <a:lnTo>
+                    <a:pt x="5697903" y="1148914"/>
+                  </a:lnTo>
+                  <a:lnTo>
+                    <a:pt x="5768248" y="1151816"/>
+                  </a:lnTo>
+                  <a:lnTo>
+                    <a:pt x="5838592" y="1154641"/>
+                  </a:lnTo>
+                  <a:lnTo>
+                    <a:pt x="5908937" y="1157390"/>
+                  </a:lnTo>
+                  <a:lnTo>
+                    <a:pt x="5979281" y="1160066"/>
+                  </a:lnTo>
+                  <a:lnTo>
+                    <a:pt x="6049626" y="1162669"/>
+                  </a:lnTo>
+                  <a:lnTo>
+                    <a:pt x="6119970" y="1165203"/>
+                  </a:lnTo>
+                  <a:lnTo>
+                    <a:pt x="6190315" y="1167669"/>
+                  </a:lnTo>
+                  <a:lnTo>
+                    <a:pt x="6260659" y="1170069"/>
+                  </a:lnTo>
+                  <a:lnTo>
+                    <a:pt x="6331004" y="1172404"/>
+                  </a:lnTo>
+                  <a:lnTo>
+                    <a:pt x="6401348" y="1174677"/>
+                  </a:lnTo>
+                  <a:lnTo>
+                    <a:pt x="6471693" y="1176889"/>
+                  </a:lnTo>
+                  <a:lnTo>
+                    <a:pt x="6542037" y="1179042"/>
+                  </a:lnTo>
+                  <a:lnTo>
+                    <a:pt x="6612382" y="1181137"/>
+                  </a:lnTo>
+                  <a:lnTo>
+                    <a:pt x="6682726" y="1183176"/>
+                  </a:lnTo>
+                  <a:lnTo>
+                    <a:pt x="6753071" y="1185160"/>
+                  </a:lnTo>
+                  <a:lnTo>
+                    <a:pt x="6823415" y="1187091"/>
+                  </a:lnTo>
+                  <a:lnTo>
+                    <a:pt x="6893760" y="1188970"/>
+                  </a:lnTo>
+                  <a:lnTo>
+                    <a:pt x="6964104" y="1190799"/>
+                  </a:lnTo>
+                  <a:lnTo>
+                    <a:pt x="6964104" y="1255963"/>
+                  </a:lnTo>
+                  <a:lnTo>
+                    <a:pt x="6893760" y="1255834"/>
+                  </a:lnTo>
+                  <a:lnTo>
+                    <a:pt x="6823415" y="1255692"/>
+                  </a:lnTo>
+                  <a:lnTo>
+                    <a:pt x="6753071" y="1255535"/>
+                  </a:lnTo>
+                  <a:lnTo>
+                    <a:pt x="6682726" y="1255361"/>
+                  </a:lnTo>
+                  <a:lnTo>
+                    <a:pt x="6612382" y="1255170"/>
+                  </a:lnTo>
+                  <a:lnTo>
+                    <a:pt x="6542037" y="1254958"/>
+                  </a:lnTo>
+                  <a:lnTo>
+                    <a:pt x="6471693" y="1254724"/>
+                  </a:lnTo>
+                  <a:lnTo>
+                    <a:pt x="6401348" y="1254467"/>
+                  </a:lnTo>
+                  <a:lnTo>
+                    <a:pt x="6331004" y="1254182"/>
+                  </a:lnTo>
+                  <a:lnTo>
+                    <a:pt x="6260659" y="1253868"/>
+                  </a:lnTo>
+                  <a:lnTo>
+                    <a:pt x="6190315" y="1253521"/>
+                  </a:lnTo>
+                  <a:lnTo>
+                    <a:pt x="6119970" y="1253138"/>
+                  </a:lnTo>
+                  <a:lnTo>
+                    <a:pt x="6049626" y="1252715"/>
+                  </a:lnTo>
+                  <a:lnTo>
+                    <a:pt x="5979281" y="1252248"/>
+                  </a:lnTo>
+                  <a:lnTo>
+                    <a:pt x="5908937" y="1251732"/>
+                  </a:lnTo>
+                  <a:lnTo>
+                    <a:pt x="5838592" y="1251163"/>
+                  </a:lnTo>
+                  <a:lnTo>
+                    <a:pt x="5768248" y="1250534"/>
+                  </a:lnTo>
+                  <a:lnTo>
+                    <a:pt x="5697903" y="1249840"/>
+                  </a:lnTo>
+                  <a:lnTo>
+                    <a:pt x="5627559" y="1249074"/>
+                  </a:lnTo>
+                  <a:lnTo>
+                    <a:pt x="5557214" y="1248228"/>
+                  </a:lnTo>
+                  <a:lnTo>
+                    <a:pt x="5486870" y="1247294"/>
+                  </a:lnTo>
+                  <a:lnTo>
+                    <a:pt x="5416525" y="1246263"/>
+                  </a:lnTo>
+                  <a:lnTo>
+                    <a:pt x="5346181" y="1245124"/>
+                  </a:lnTo>
+                  <a:lnTo>
+                    <a:pt x="5275836" y="1243867"/>
+                  </a:lnTo>
+                  <a:lnTo>
+                    <a:pt x="5205492" y="1242479"/>
+                  </a:lnTo>
+                  <a:lnTo>
+                    <a:pt x="5135147" y="1240947"/>
+                  </a:lnTo>
+                  <a:lnTo>
+                    <a:pt x="5064803" y="1239255"/>
+                  </a:lnTo>
+                  <a:lnTo>
+                    <a:pt x="4994458" y="1237388"/>
+                  </a:lnTo>
+                  <a:lnTo>
+                    <a:pt x="4924114" y="1235325"/>
+                  </a:lnTo>
+                  <a:lnTo>
+                    <a:pt x="4853769" y="1233049"/>
+                  </a:lnTo>
+                  <a:lnTo>
+                    <a:pt x="4783425" y="1230535"/>
+                  </a:lnTo>
+                  <a:lnTo>
+                    <a:pt x="4713080" y="1227759"/>
+                  </a:lnTo>
+                  <a:lnTo>
+                    <a:pt x="4642736" y="1224695"/>
+                  </a:lnTo>
+                  <a:lnTo>
+                    <a:pt x="4572391" y="1221312"/>
+                  </a:lnTo>
+                  <a:lnTo>
+                    <a:pt x="4502047" y="1217576"/>
+                  </a:lnTo>
+                  <a:lnTo>
+                    <a:pt x="4431702" y="1213452"/>
+                  </a:lnTo>
+                  <a:lnTo>
+                    <a:pt x="4361358" y="1208899"/>
+                  </a:lnTo>
+                  <a:lnTo>
+                    <a:pt x="4291013" y="1203872"/>
+                  </a:lnTo>
+                  <a:lnTo>
+                    <a:pt x="4220669" y="1198321"/>
+                  </a:lnTo>
+                  <a:lnTo>
+                    <a:pt x="4150324" y="1192193"/>
+                  </a:lnTo>
+                  <a:lnTo>
+                    <a:pt x="4079980" y="1185427"/>
+                  </a:lnTo>
+                  <a:lnTo>
+                    <a:pt x="4009635" y="1177957"/>
+                  </a:lnTo>
+                  <a:lnTo>
+                    <a:pt x="3939291" y="1169709"/>
+                  </a:lnTo>
+                  <a:lnTo>
+                    <a:pt x="3868946" y="1160603"/>
+                  </a:lnTo>
+                  <a:lnTo>
+                    <a:pt x="3798602" y="1150549"/>
+                  </a:lnTo>
+                  <a:lnTo>
+                    <a:pt x="3728257" y="1139449"/>
+                  </a:lnTo>
+                  <a:lnTo>
+                    <a:pt x="3657913" y="1127194"/>
+                  </a:lnTo>
+                  <a:lnTo>
+                    <a:pt x="3587569" y="1113663"/>
+                  </a:lnTo>
+                  <a:lnTo>
+                    <a:pt x="3517224" y="1098724"/>
+                  </a:lnTo>
+                  <a:lnTo>
+                    <a:pt x="3446880" y="1082230"/>
+                  </a:lnTo>
+                  <a:lnTo>
+                    <a:pt x="3376535" y="1064019"/>
+                  </a:lnTo>
+                  <a:lnTo>
+                    <a:pt x="3306191" y="1043913"/>
+                  </a:lnTo>
+                  <a:lnTo>
+                    <a:pt x="3235846" y="1021714"/>
+                  </a:lnTo>
+                  <a:lnTo>
+                    <a:pt x="3165502" y="997205"/>
+                  </a:lnTo>
+                  <a:lnTo>
+                    <a:pt x="3095157" y="970146"/>
+                  </a:lnTo>
+                  <a:lnTo>
+                    <a:pt x="3024813" y="953138"/>
+                  </a:lnTo>
+                  <a:lnTo>
+                    <a:pt x="2954468" y="944764"/>
+                  </a:lnTo>
+                  <a:lnTo>
+                    <a:pt x="2884124" y="936159"/>
+                  </a:lnTo>
+                  <a:lnTo>
+                    <a:pt x="2813779" y="927316"/>
+                  </a:lnTo>
+                  <a:lnTo>
+                    <a:pt x="2743435" y="918231"/>
+                  </a:lnTo>
+                  <a:lnTo>
+                    <a:pt x="2673090" y="908895"/>
+                  </a:lnTo>
+                  <a:lnTo>
+                    <a:pt x="2602746" y="899302"/>
+                  </a:lnTo>
+                  <a:lnTo>
+                    <a:pt x="2532401" y="889444"/>
+                  </a:lnTo>
+                  <a:lnTo>
+                    <a:pt x="2462057" y="879316"/>
+                  </a:lnTo>
+                  <a:lnTo>
+                    <a:pt x="2391712" y="868908"/>
+                  </a:lnTo>
+                  <a:lnTo>
+                    <a:pt x="2321368" y="858214"/>
+                  </a:lnTo>
+                  <a:lnTo>
+                    <a:pt x="2251023" y="847225"/>
+                  </a:lnTo>
+                  <a:lnTo>
+                    <a:pt x="2180679" y="835933"/>
+                  </a:lnTo>
+                  <a:lnTo>
+                    <a:pt x="2110334" y="824330"/>
+                  </a:lnTo>
+                  <a:lnTo>
+                    <a:pt x="2039990" y="812408"/>
+                  </a:lnTo>
+                  <a:lnTo>
+                    <a:pt x="1969645" y="800158"/>
+                  </a:lnTo>
+                  <a:lnTo>
+                    <a:pt x="1899301" y="787570"/>
+                  </a:lnTo>
+                  <a:lnTo>
+                    <a:pt x="1828956" y="774635"/>
+                  </a:lnTo>
+                  <a:lnTo>
+                    <a:pt x="1758612" y="761344"/>
+                  </a:lnTo>
+                  <a:lnTo>
+                    <a:pt x="1688267" y="747687"/>
+                  </a:lnTo>
+                  <a:lnTo>
+                    <a:pt x="1617923" y="733654"/>
+                  </a:lnTo>
+                  <a:lnTo>
+                    <a:pt x="1547578" y="719235"/>
+                  </a:lnTo>
+                  <a:lnTo>
+                    <a:pt x="1477234" y="704418"/>
+                  </a:lnTo>
+                  <a:lnTo>
+                    <a:pt x="1406889" y="689193"/>
+                  </a:lnTo>
+                  <a:lnTo>
+                    <a:pt x="1336545" y="673549"/>
+                  </a:lnTo>
+                  <a:lnTo>
+                    <a:pt x="1266200" y="657474"/>
+                  </a:lnTo>
+                  <a:lnTo>
+                    <a:pt x="1195856" y="640957"/>
+                  </a:lnTo>
+                  <a:lnTo>
+                    <a:pt x="1125511" y="623984"/>
+                  </a:lnTo>
+                  <a:lnTo>
+                    <a:pt x="1055167" y="606544"/>
+                  </a:lnTo>
+                  <a:lnTo>
+                    <a:pt x="984822" y="588623"/>
+                  </a:lnTo>
+                  <a:lnTo>
+                    <a:pt x="914478" y="570209"/>
+                  </a:lnTo>
+                  <a:lnTo>
+                    <a:pt x="844133" y="551288"/>
+                  </a:lnTo>
+                  <a:lnTo>
+                    <a:pt x="773789" y="531846"/>
+                  </a:lnTo>
+                  <a:lnTo>
+                    <a:pt x="703444" y="511868"/>
+                  </a:lnTo>
+                  <a:lnTo>
+                    <a:pt x="633100" y="491340"/>
+                  </a:lnTo>
+                  <a:lnTo>
+                    <a:pt x="562755" y="470247"/>
+                  </a:lnTo>
+                  <a:lnTo>
+                    <a:pt x="492411" y="448573"/>
+                  </a:lnTo>
+                  <a:lnTo>
+                    <a:pt x="422066" y="426301"/>
+                  </a:lnTo>
+                  <a:lnTo>
+                    <a:pt x="351722" y="403417"/>
+                  </a:lnTo>
+                  <a:lnTo>
+                    <a:pt x="281377" y="379902"/>
+                  </a:lnTo>
+                  <a:lnTo>
+                    <a:pt x="211033" y="355739"/>
+                  </a:lnTo>
+                  <a:lnTo>
+                    <a:pt x="140688" y="330911"/>
+                  </a:lnTo>
+                  <a:lnTo>
+                    <a:pt x="70344" y="305399"/>
+                  </a:lnTo>
+                  <a:lnTo>
+                    <a:pt x="0" y="279185"/>
+                  </a:lnTo>
+                  <a:close/>
+                </a:path>
+              </a:pathLst>
+            </a:custGeom>
+            <a:solidFill>
+              <a:srgbClr val="FF8C00">
+                <a:alpha val="20000"/>
+              </a:srgbClr>
+            </a:solidFill>
+          </p:spPr>
+          <p:txBody>
+            <a:bodyPr/>
+            <a:lstStyle/>
+            <a:p/>
+          </p:txBody>
+        </p:sp>
+        <p:sp>
+          <p:nvSpPr>
+            <p:cNvPr id="72" name="pl72"/>
+            <p:cNvSpPr/>
+            <p:nvPr/>
+          </p:nvSpPr>
+          <p:spPr>
+            <a:xfrm>
+              <a:off x="3281388" y="4336484"/>
+              <a:ext cx="4918028" cy="1190799"/>
+            </a:xfrm>
+            <a:custGeom>
+              <a:avLst/>
+              <a:pathLst>
+                <a:path w="4918028" h="1190799">
+                  <a:moveTo>
+                    <a:pt x="0" y="0"/>
+                  </a:moveTo>
+                  <a:lnTo>
+                    <a:pt x="64258" y="109149"/>
+                  </a:lnTo>
+                  <a:lnTo>
+                    <a:pt x="134603" y="217372"/>
+                  </a:lnTo>
+                  <a:lnTo>
+                    <a:pt x="204947" y="315393"/>
+                  </a:lnTo>
+                  <a:lnTo>
+                    <a:pt x="275291" y="404174"/>
+                  </a:lnTo>
+                  <a:lnTo>
+                    <a:pt x="345636" y="484586"/>
+                  </a:lnTo>
+                  <a:lnTo>
+                    <a:pt x="415980" y="557418"/>
+                  </a:lnTo>
+                  <a:lnTo>
+                    <a:pt x="486325" y="623384"/>
+                  </a:lnTo>
+                  <a:lnTo>
+                    <a:pt x="556669" y="683132"/>
+                  </a:lnTo>
+                  <a:lnTo>
+                    <a:pt x="627014" y="737248"/>
+                  </a:lnTo>
+                  <a:lnTo>
+                    <a:pt x="697358" y="786262"/>
+                  </a:lnTo>
+                  <a:lnTo>
+                    <a:pt x="767703" y="830656"/>
+                  </a:lnTo>
+                  <a:lnTo>
+                    <a:pt x="838047" y="870865"/>
+                  </a:lnTo>
+                  <a:lnTo>
+                    <a:pt x="908392" y="907284"/>
+                  </a:lnTo>
+                  <a:lnTo>
+                    <a:pt x="978736" y="940269"/>
+                  </a:lnTo>
+                  <a:lnTo>
+                    <a:pt x="1049081" y="961288"/>
+                  </a:lnTo>
+                  <a:lnTo>
+                    <a:pt x="1119425" y="969220"/>
+                  </a:lnTo>
+                  <a:lnTo>
+                    <a:pt x="1189770" y="976939"/>
+                  </a:lnTo>
+                  <a:lnTo>
+                    <a:pt x="1260114" y="984451"/>
+                  </a:lnTo>
+                  <a:lnTo>
+                    <a:pt x="1330459" y="991762"/>
+                  </a:lnTo>
+                  <a:lnTo>
+                    <a:pt x="1400803" y="998877"/>
+                  </a:lnTo>
+                  <a:lnTo>
+                    <a:pt x="1471148" y="1005801"/>
+                  </a:lnTo>
+                  <a:lnTo>
+                    <a:pt x="1541492" y="1012539"/>
+                  </a:lnTo>
+                  <a:lnTo>
+                    <a:pt x="1611837" y="1019097"/>
+                  </a:lnTo>
+                  <a:lnTo>
+                    <a:pt x="1682181" y="1025479"/>
+                  </a:lnTo>
+                  <a:lnTo>
+                    <a:pt x="1752526" y="1031690"/>
+                  </a:lnTo>
+                  <a:lnTo>
+                    <a:pt x="1822870" y="1037735"/>
+                  </a:lnTo>
+                  <a:lnTo>
+                    <a:pt x="1893215" y="1043617"/>
+                  </a:lnTo>
+                  <a:lnTo>
+                    <a:pt x="1963559" y="1049342"/>
+                  </a:lnTo>
+                  <a:lnTo>
+                    <a:pt x="2033904" y="1054914"/>
+                  </a:lnTo>
+                  <a:lnTo>
+                    <a:pt x="2104248" y="1060336"/>
+                  </a:lnTo>
+                  <a:lnTo>
+                    <a:pt x="2174593" y="1065613"/>
+                  </a:lnTo>
+                  <a:lnTo>
+                    <a:pt x="2244937" y="1070748"/>
+                  </a:lnTo>
+                  <a:lnTo>
+                    <a:pt x="2315282" y="1075746"/>
+                  </a:lnTo>
+                  <a:lnTo>
+                    <a:pt x="2385626" y="1080609"/>
+                  </a:lnTo>
+                  <a:lnTo>
+                    <a:pt x="2455971" y="1085343"/>
+                  </a:lnTo>
+                  <a:lnTo>
+                    <a:pt x="2526315" y="1089949"/>
+                  </a:lnTo>
+                  <a:lnTo>
+                    <a:pt x="2596660" y="1094432"/>
+                  </a:lnTo>
+                  <a:lnTo>
+                    <a:pt x="2667004" y="1098795"/>
+                  </a:lnTo>
+                  <a:lnTo>
+                    <a:pt x="2737349" y="1103041"/>
+                  </a:lnTo>
+                  <a:lnTo>
+                    <a:pt x="2807693" y="1107173"/>
+                  </a:lnTo>
+                  <a:lnTo>
+                    <a:pt x="2878038" y="1111194"/>
+                  </a:lnTo>
+                  <a:lnTo>
+                    <a:pt x="2948382" y="1115108"/>
+                  </a:lnTo>
+                  <a:lnTo>
+                    <a:pt x="3018727" y="1118916"/>
+                  </a:lnTo>
+                  <a:lnTo>
+                    <a:pt x="3089071" y="1122623"/>
+                  </a:lnTo>
+                  <a:lnTo>
+                    <a:pt x="3159416" y="1126230"/>
+                  </a:lnTo>
+                  <a:lnTo>
+                    <a:pt x="3229760" y="1129741"/>
+                  </a:lnTo>
+                  <a:lnTo>
+                    <a:pt x="3300105" y="1133157"/>
+                  </a:lnTo>
+                  <a:lnTo>
+                    <a:pt x="3370449" y="1136482"/>
+                  </a:lnTo>
+                  <a:lnTo>
+                    <a:pt x="3440794" y="1139718"/>
+                  </a:lnTo>
+                  <a:lnTo>
+                    <a:pt x="3511138" y="1142867"/>
+                  </a:lnTo>
+                  <a:lnTo>
+                    <a:pt x="3581483" y="1145931"/>
+                  </a:lnTo>
+                  <a:lnTo>
+                    <a:pt x="3651827" y="1148914"/>
+                  </a:lnTo>
+                  <a:lnTo>
+                    <a:pt x="3722172" y="1151816"/>
+                  </a:lnTo>
+                  <a:lnTo>
+                    <a:pt x="3792516" y="1154641"/>
+                  </a:lnTo>
+                  <a:lnTo>
+                    <a:pt x="3862861" y="1157390"/>
+                  </a:lnTo>
+                  <a:lnTo>
+                    <a:pt x="3933205" y="1160066"/>
+                  </a:lnTo>
+                  <a:lnTo>
+                    <a:pt x="4003549" y="1162669"/>
+                  </a:lnTo>
+                  <a:lnTo>
+                    <a:pt x="4073894" y="1165203"/>
+                  </a:lnTo>
+                  <a:lnTo>
+                    <a:pt x="4144238" y="1167669"/>
+                  </a:lnTo>
+                  <a:lnTo>
+                    <a:pt x="4214583" y="1170069"/>
+                  </a:lnTo>
+                  <a:lnTo>
+                    <a:pt x="4284927" y="1172404"/>
+                  </a:lnTo>
+                  <a:lnTo>
+                    <a:pt x="4355272" y="1174677"/>
+                  </a:lnTo>
+                  <a:lnTo>
+                    <a:pt x="4425616" y="1176889"/>
+                  </a:lnTo>
+                  <a:lnTo>
+                    <a:pt x="4495961" y="1179042"/>
+                  </a:lnTo>
+                  <a:lnTo>
+                    <a:pt x="4566305" y="1181137"/>
+                  </a:lnTo>
+                  <a:lnTo>
+                    <a:pt x="4636650" y="1183176"/>
+                  </a:lnTo>
+                  <a:lnTo>
+                    <a:pt x="4706994" y="1185160"/>
+                  </a:lnTo>
+                  <a:lnTo>
+                    <a:pt x="4777339" y="1187091"/>
+                  </a:lnTo>
+                  <a:lnTo>
+                    <a:pt x="4847683" y="1188970"/>
+                  </a:lnTo>
+                  <a:lnTo>
+                    <a:pt x="4918028" y="1190799"/>
+                  </a:lnTo>
+                </a:path>
+              </a:pathLst>
+            </a:custGeom>
+          </p:spPr>
+          <p:txBody>
+            <a:bodyPr/>
+            <a:lstStyle/>
+            <a:p/>
+          </p:txBody>
+        </p:sp>
+        <p:sp>
+          <p:nvSpPr>
+            <p:cNvPr id="73" name="pl73"/>
+            <p:cNvSpPr/>
+            <p:nvPr/>
+          </p:nvSpPr>
+          <p:spPr>
+            <a:xfrm>
+              <a:off x="1235312" y="4615669"/>
+              <a:ext cx="6964104" cy="976778"/>
+            </a:xfrm>
+            <a:custGeom>
+              <a:avLst/>
+              <a:pathLst>
+                <a:path w="6964104" h="976778">
+                  <a:moveTo>
+                    <a:pt x="6964104" y="976778"/>
+                  </a:moveTo>
+                  <a:lnTo>
+                    <a:pt x="6893760" y="976649"/>
+                  </a:lnTo>
+                  <a:lnTo>
+                    <a:pt x="6823415" y="976507"/>
+                  </a:lnTo>
+                  <a:lnTo>
+                    <a:pt x="6753071" y="976350"/>
+                  </a:lnTo>
+                  <a:lnTo>
+                    <a:pt x="6682726" y="976176"/>
+                  </a:lnTo>
+                  <a:lnTo>
+                    <a:pt x="6612382" y="975984"/>
+                  </a:lnTo>
+                  <a:lnTo>
+                    <a:pt x="6542037" y="975773"/>
+                  </a:lnTo>
+                  <a:lnTo>
+                    <a:pt x="6471693" y="975539"/>
+                  </a:lnTo>
+                  <a:lnTo>
+                    <a:pt x="6401348" y="975282"/>
+                  </a:lnTo>
+                  <a:lnTo>
+                    <a:pt x="6331004" y="974997"/>
+                  </a:lnTo>
+                  <a:lnTo>
+                    <a:pt x="6260659" y="974683"/>
+                  </a:lnTo>
+                  <a:lnTo>
+                    <a:pt x="6190315" y="974336"/>
+                  </a:lnTo>
+                  <a:lnTo>
+                    <a:pt x="6119970" y="973953"/>
+                  </a:lnTo>
+                  <a:lnTo>
+                    <a:pt x="6049626" y="973530"/>
+                  </a:lnTo>
+                  <a:lnTo>
+                    <a:pt x="5979281" y="973062"/>
+                  </a:lnTo>
+                  <a:lnTo>
+                    <a:pt x="5908937" y="972547"/>
+                  </a:lnTo>
+                  <a:lnTo>
+                    <a:pt x="5838592" y="971978"/>
+                  </a:lnTo>
+                  <a:lnTo>
+                    <a:pt x="5768248" y="971349"/>
+                  </a:lnTo>
+                  <a:lnTo>
+                    <a:pt x="5697903" y="970655"/>
+                  </a:lnTo>
+                  <a:lnTo>
+                    <a:pt x="5627559" y="969889"/>
+                  </a:lnTo>
+                  <a:lnTo>
+                    <a:pt x="5557214" y="969043"/>
+                  </a:lnTo>
+                  <a:lnTo>
+                    <a:pt x="5486870" y="968109"/>
+                  </a:lnTo>
+                  <a:lnTo>
+                    <a:pt x="5416525" y="967078"/>
+                  </a:lnTo>
+                  <a:lnTo>
+                    <a:pt x="5346181" y="965939"/>
+                  </a:lnTo>
+                  <a:lnTo>
+                    <a:pt x="5275836" y="964682"/>
+                  </a:lnTo>
+                  <a:lnTo>
+                    <a:pt x="5205492" y="963294"/>
+                  </a:lnTo>
+                  <a:lnTo>
+                    <a:pt x="5135147" y="961762"/>
+                  </a:lnTo>
+                  <a:lnTo>
+                    <a:pt x="5064803" y="960070"/>
+                  </a:lnTo>
+                  <a:lnTo>
+                    <a:pt x="4994458" y="958203"/>
+                  </a:lnTo>
+                  <a:lnTo>
+                    <a:pt x="4924114" y="956140"/>
+                  </a:lnTo>
+                  <a:lnTo>
+                    <a:pt x="4853769" y="953864"/>
+                  </a:lnTo>
+                  <a:lnTo>
+                    <a:pt x="4783425" y="951350"/>
+                  </a:lnTo>
+                  <a:lnTo>
+                    <a:pt x="4713080" y="948574"/>
+                  </a:lnTo>
+                  <a:lnTo>
+                    <a:pt x="4642736" y="945510"/>
+                  </a:lnTo>
+                  <a:lnTo>
+                    <a:pt x="4572391" y="942127"/>
+                  </a:lnTo>
+                  <a:lnTo>
+                    <a:pt x="4502047" y="938391"/>
+                  </a:lnTo>
+                  <a:lnTo>
+                    <a:pt x="4431702" y="934267"/>
+                  </a:lnTo>
+                  <a:lnTo>
+                    <a:pt x="4361358" y="929714"/>
+                  </a:lnTo>
+                  <a:lnTo>
+                    <a:pt x="4291013" y="924687"/>
+                  </a:lnTo>
+                  <a:lnTo>
+                    <a:pt x="4220669" y="919136"/>
+                  </a:lnTo>
+                  <a:lnTo>
+                    <a:pt x="4150324" y="913008"/>
+                  </a:lnTo>
+                  <a:lnTo>
+                    <a:pt x="4079980" y="906242"/>
+                  </a:lnTo>
+                  <a:lnTo>
+                    <a:pt x="4009635" y="898772"/>
+                  </a:lnTo>
+                  <a:lnTo>
+                    <a:pt x="3939291" y="890524"/>
+                  </a:lnTo>
+                  <a:lnTo>
+                    <a:pt x="3868946" y="881418"/>
+                  </a:lnTo>
+                  <a:lnTo>
+                    <a:pt x="3798602" y="871364"/>
+                  </a:lnTo>
+                  <a:lnTo>
+                    <a:pt x="3728257" y="860264"/>
+                  </a:lnTo>
+                  <a:lnTo>
+                    <a:pt x="3657913" y="848009"/>
+                  </a:lnTo>
+                  <a:lnTo>
+                    <a:pt x="3587569" y="834478"/>
+                  </a:lnTo>
+                  <a:lnTo>
+                    <a:pt x="3517224" y="819539"/>
+                  </a:lnTo>
+                  <a:lnTo>
+                    <a:pt x="3446880" y="803045"/>
+                  </a:lnTo>
+                  <a:lnTo>
+                    <a:pt x="3376535" y="784834"/>
+                  </a:lnTo>
+                  <a:lnTo>
+                    <a:pt x="3306191" y="764728"/>
+                  </a:lnTo>
+                  <a:lnTo>
+                    <a:pt x="3235846" y="742529"/>
+                  </a:lnTo>
+                  <a:lnTo>
+                    <a:pt x="3165502" y="718020"/>
+                  </a:lnTo>
+                  <a:lnTo>
+                    <a:pt x="3095157" y="690961"/>
+                  </a:lnTo>
+                  <a:lnTo>
+                    <a:pt x="3024813" y="673953"/>
+                  </a:lnTo>
+                  <a:lnTo>
+                    <a:pt x="2954468" y="665579"/>
+                  </a:lnTo>
+                  <a:lnTo>
+                    <a:pt x="2884124" y="656974"/>
+                  </a:lnTo>
+                  <a:lnTo>
+                    <a:pt x="2813779" y="648131"/>
+                  </a:lnTo>
+                  <a:lnTo>
+                    <a:pt x="2743435" y="639046"/>
+                  </a:lnTo>
+                  <a:lnTo>
+                    <a:pt x="2673090" y="629710"/>
+                  </a:lnTo>
+                  <a:lnTo>
+                    <a:pt x="2602746" y="620117"/>
+                  </a:lnTo>
+                  <a:lnTo>
+                    <a:pt x="2532401" y="610259"/>
+                  </a:lnTo>
+                  <a:lnTo>
+                    <a:pt x="2462057" y="600131"/>
+                  </a:lnTo>
+                  <a:lnTo>
+                    <a:pt x="2391712" y="589723"/>
+                  </a:lnTo>
+                  <a:lnTo>
+                    <a:pt x="2321368" y="579029"/>
+                  </a:lnTo>
+                  <a:lnTo>
+                    <a:pt x="2251023" y="568040"/>
+                  </a:lnTo>
+                  <a:lnTo>
+                    <a:pt x="2180679" y="556748"/>
+                  </a:lnTo>
+                  <a:lnTo>
+                    <a:pt x="2110334" y="545145"/>
+                  </a:lnTo>
+                  <a:lnTo>
+                    <a:pt x="2039990" y="533223"/>
+                  </a:lnTo>
+                  <a:lnTo>
+                    <a:pt x="1969645" y="520973"/>
+                  </a:lnTo>
+                  <a:lnTo>
+                    <a:pt x="1899301" y="508385"/>
+                  </a:lnTo>
+                  <a:lnTo>
+                    <a:pt x="1828956" y="495450"/>
+                  </a:lnTo>
+                  <a:lnTo>
+                    <a:pt x="1758612" y="482159"/>
+                  </a:lnTo>
+                  <a:lnTo>
+                    <a:pt x="1688267" y="468502"/>
+                  </a:lnTo>
+                  <a:lnTo>
+                    <a:pt x="1617923" y="454469"/>
+                  </a:lnTo>
+                  <a:lnTo>
+                    <a:pt x="1547578" y="440050"/>
+                  </a:lnTo>
+                  <a:lnTo>
+                    <a:pt x="1477234" y="425233"/>
+                  </a:lnTo>
+                  <a:lnTo>
+                    <a:pt x="1406889" y="410008"/>
+                  </a:lnTo>
+                  <a:lnTo>
+                    <a:pt x="1336545" y="394364"/>
+                  </a:lnTo>
+                  <a:lnTo>
+                    <a:pt x="1266200" y="378289"/>
+                  </a:lnTo>
+                  <a:lnTo>
+                    <a:pt x="1195856" y="361772"/>
+                  </a:lnTo>
+                  <a:lnTo>
+                    <a:pt x="1125511" y="344799"/>
+                  </a:lnTo>
+                  <a:lnTo>
+                    <a:pt x="1055167" y="327359"/>
+                  </a:lnTo>
+                  <a:lnTo>
+                    <a:pt x="984822" y="309438"/>
+                  </a:lnTo>
+                  <a:lnTo>
+                    <a:pt x="914478" y="291024"/>
+                  </a:lnTo>
+                  <a:lnTo>
+                    <a:pt x="844133" y="272103"/>
+                  </a:lnTo>
+                  <a:lnTo>
+                    <a:pt x="773789" y="252661"/>
+                  </a:lnTo>
+                  <a:lnTo>
+                    <a:pt x="703444" y="232683"/>
+                  </a:lnTo>
+                  <a:lnTo>
+                    <a:pt x="633100" y="212155"/>
+                  </a:lnTo>
+                  <a:lnTo>
+                    <a:pt x="562755" y="191062"/>
+                  </a:lnTo>
+                  <a:lnTo>
+                    <a:pt x="492411" y="169388"/>
+                  </a:lnTo>
+                  <a:lnTo>
+                    <a:pt x="422066" y="147116"/>
+                  </a:lnTo>
+                  <a:lnTo>
+                    <a:pt x="351722" y="124232"/>
+                  </a:lnTo>
+                  <a:lnTo>
+                    <a:pt x="281377" y="100717"/>
+                  </a:lnTo>
+                  <a:lnTo>
+                    <a:pt x="211033" y="76554"/>
+                  </a:lnTo>
+                  <a:lnTo>
+                    <a:pt x="140688" y="51726"/>
+                  </a:lnTo>
+                  <a:lnTo>
+                    <a:pt x="70344" y="26214"/>
+                  </a:lnTo>
+                  <a:lnTo>
+                    <a:pt x="0" y="0"/>
+                  </a:lnTo>
+                </a:path>
+              </a:pathLst>
+            </a:custGeom>
+          </p:spPr>
+          <p:txBody>
+            <a:bodyPr/>
+            <a:lstStyle/>
+            <a:p/>
+          </p:txBody>
+        </p:sp>
+        <p:sp>
+          <p:nvSpPr>
+            <p:cNvPr id="74" name="pl74"/>
+            <p:cNvSpPr/>
+            <p:nvPr/>
+          </p:nvSpPr>
+          <p:spPr>
+            <a:xfrm>
+              <a:off x="2700923" y="4336484"/>
+              <a:ext cx="5498493" cy="1248132"/>
+            </a:xfrm>
+            <a:custGeom>
+              <a:avLst/>
+              <a:pathLst>
+                <a:path w="5498493" h="1248132">
+                  <a:moveTo>
+                    <a:pt x="0" y="0"/>
+                  </a:moveTo>
+                  <a:lnTo>
+                    <a:pt x="11623" y="13383"/>
+                  </a:lnTo>
+                  <a:lnTo>
+                    <a:pt x="81967" y="89432"/>
+                  </a:lnTo>
+                  <a:lnTo>
+                    <a:pt x="152312" y="160830"/>
+                  </a:lnTo>
+                  <a:lnTo>
+                    <a:pt x="222656" y="227864"/>
+                  </a:lnTo>
+                  <a:lnTo>
+                    <a:pt x="293001" y="290798"/>
+                  </a:lnTo>
+                  <a:lnTo>
+                    <a:pt x="363345" y="349885"/>
+                  </a:lnTo>
+                  <a:lnTo>
+                    <a:pt x="433690" y="405359"/>
+                  </a:lnTo>
+                  <a:lnTo>
+                    <a:pt x="504034" y="457442"/>
+                  </a:lnTo>
+                  <a:lnTo>
+                    <a:pt x="574379" y="506340"/>
+                  </a:lnTo>
+                  <a:lnTo>
+                    <a:pt x="644723" y="552248"/>
+                  </a:lnTo>
+                  <a:lnTo>
+                    <a:pt x="715068" y="595350"/>
+                  </a:lnTo>
+                  <a:lnTo>
+                    <a:pt x="785412" y="635816"/>
+                  </a:lnTo>
+                  <a:lnTo>
+                    <a:pt x="855757" y="673808"/>
+                  </a:lnTo>
+                  <a:lnTo>
+                    <a:pt x="926101" y="709478"/>
+                  </a:lnTo>
+                  <a:lnTo>
+                    <a:pt x="996446" y="742966"/>
+                  </a:lnTo>
+                  <a:lnTo>
+                    <a:pt x="1066790" y="774407"/>
+                  </a:lnTo>
+                  <a:lnTo>
+                    <a:pt x="1137134" y="803925"/>
+                  </a:lnTo>
+                  <a:lnTo>
+                    <a:pt x="1207479" y="831639"/>
+                  </a:lnTo>
+                  <a:lnTo>
+                    <a:pt x="1277823" y="857658"/>
+                  </a:lnTo>
+                  <a:lnTo>
+                    <a:pt x="1348168" y="882087"/>
+                  </a:lnTo>
+                  <a:lnTo>
+                    <a:pt x="1418512" y="905022"/>
+                  </a:lnTo>
+                  <a:lnTo>
+                    <a:pt x="1488857" y="926554"/>
+                  </a:lnTo>
+                  <a:lnTo>
+                    <a:pt x="1559201" y="946771"/>
+                  </a:lnTo>
+                  <a:lnTo>
+                    <a:pt x="1629546" y="965751"/>
+                  </a:lnTo>
+                  <a:lnTo>
+                    <a:pt x="1699890" y="983570"/>
+                  </a:lnTo>
+                  <a:lnTo>
+                    <a:pt x="1770235" y="1000300"/>
+                  </a:lnTo>
+                  <a:lnTo>
+                    <a:pt x="1840579" y="1016008"/>
+                  </a:lnTo>
+                  <a:lnTo>
+                    <a:pt x="1910924" y="1030754"/>
+                  </a:lnTo>
+                  <a:lnTo>
+                    <a:pt x="1981268" y="1044600"/>
+                  </a:lnTo>
+                  <a:lnTo>
+                    <a:pt x="2051613" y="1057598"/>
+                  </a:lnTo>
+                  <a:lnTo>
+                    <a:pt x="2121957" y="1069802"/>
+                  </a:lnTo>
+                  <a:lnTo>
+                    <a:pt x="2192302" y="1081260"/>
+                  </a:lnTo>
+                  <a:lnTo>
+                    <a:pt x="2262646" y="1092017"/>
+                  </a:lnTo>
+                  <a:lnTo>
+                    <a:pt x="2332991" y="1102117"/>
+                  </a:lnTo>
+                  <a:lnTo>
+                    <a:pt x="2403335" y="1111599"/>
+                  </a:lnTo>
+                  <a:lnTo>
+                    <a:pt x="2473680" y="1120501"/>
+                  </a:lnTo>
+                  <a:lnTo>
+                    <a:pt x="2544024" y="1128859"/>
+                  </a:lnTo>
+                  <a:lnTo>
+                    <a:pt x="2614369" y="1136706"/>
+                  </a:lnTo>
+                  <a:lnTo>
+                    <a:pt x="2684713" y="1144073"/>
+                  </a:lnTo>
+                  <a:lnTo>
+                    <a:pt x="2755058" y="1150990"/>
+                  </a:lnTo>
+                  <a:lnTo>
+                    <a:pt x="2825402" y="1157484"/>
+                  </a:lnTo>
+                  <a:lnTo>
+                    <a:pt x="2895747" y="1163581"/>
+                  </a:lnTo>
+                  <a:lnTo>
+                    <a:pt x="2966091" y="1169305"/>
+                  </a:lnTo>
+                  <a:lnTo>
+                    <a:pt x="3036436" y="1174679"/>
+                  </a:lnTo>
+                  <a:lnTo>
+                    <a:pt x="3106780" y="1179725"/>
+                  </a:lnTo>
+                  <a:lnTo>
+                    <a:pt x="3177125" y="1184462"/>
+                  </a:lnTo>
+                  <a:lnTo>
+                    <a:pt x="3247469" y="1188909"/>
+                  </a:lnTo>
+                  <a:lnTo>
+                    <a:pt x="3317814" y="1193085"/>
+                  </a:lnTo>
+                  <a:lnTo>
+                    <a:pt x="3388158" y="1197005"/>
+                  </a:lnTo>
+                  <a:lnTo>
+                    <a:pt x="3458503" y="1200685"/>
+                  </a:lnTo>
+                  <a:lnTo>
+                    <a:pt x="3528847" y="1204141"/>
+                  </a:lnTo>
+                  <a:lnTo>
+                    <a:pt x="3599192" y="1207385"/>
+                  </a:lnTo>
+                  <a:lnTo>
+                    <a:pt x="3669536" y="1210431"/>
+                  </a:lnTo>
+                  <a:lnTo>
+                    <a:pt x="3739881" y="1213290"/>
+                  </a:lnTo>
+                  <a:lnTo>
+                    <a:pt x="3810225" y="1215975"/>
+                  </a:lnTo>
+                  <a:lnTo>
+                    <a:pt x="3880570" y="1218496"/>
+                  </a:lnTo>
+                  <a:lnTo>
+                    <a:pt x="3950914" y="1220862"/>
+                  </a:lnTo>
+                  <a:lnTo>
+                    <a:pt x="4021259" y="1223084"/>
+                  </a:lnTo>
+                  <a:lnTo>
+                    <a:pt x="4091603" y="1225170"/>
+                  </a:lnTo>
+                  <a:lnTo>
+                    <a:pt x="4161948" y="1227129"/>
+                  </a:lnTo>
+                  <a:lnTo>
+                    <a:pt x="4232292" y="1228967"/>
+                  </a:lnTo>
+                  <a:lnTo>
+                    <a:pt x="4302637" y="1230694"/>
+                  </a:lnTo>
+                  <a:lnTo>
+                    <a:pt x="4372981" y="1232314"/>
+                  </a:lnTo>
+                  <a:lnTo>
+                    <a:pt x="4443326" y="1233836"/>
+                  </a:lnTo>
+                  <a:lnTo>
+                    <a:pt x="4513670" y="1235265"/>
+                  </a:lnTo>
+                  <a:lnTo>
+                    <a:pt x="4584015" y="1236606"/>
+                  </a:lnTo>
+                  <a:lnTo>
+                    <a:pt x="4654359" y="1237865"/>
+                  </a:lnTo>
+                  <a:lnTo>
+                    <a:pt x="4724704" y="1239047"/>
+                  </a:lnTo>
+                  <a:lnTo>
+                    <a:pt x="4795048" y="1240157"/>
+                  </a:lnTo>
+                  <a:lnTo>
+                    <a:pt x="4865392" y="1241199"/>
+                  </a:lnTo>
+                  <a:lnTo>
+                    <a:pt x="4935737" y="1242178"/>
+                  </a:lnTo>
+                  <a:lnTo>
+                    <a:pt x="5006081" y="1243096"/>
+                  </a:lnTo>
+                  <a:lnTo>
+                    <a:pt x="5076426" y="1243959"/>
+                  </a:lnTo>
+                  <a:lnTo>
+                    <a:pt x="5146770" y="1244769"/>
+                  </a:lnTo>
+                  <a:lnTo>
+                    <a:pt x="5217115" y="1245529"/>
+                  </a:lnTo>
+                  <a:lnTo>
+                    <a:pt x="5287459" y="1246242"/>
+                  </a:lnTo>
+                  <a:lnTo>
+                    <a:pt x="5357804" y="1246912"/>
+                  </a:lnTo>
+                  <a:lnTo>
+                    <a:pt x="5428148" y="1247542"/>
+                  </a:lnTo>
+                  <a:lnTo>
+                    <a:pt x="5498493" y="1248132"/>
+                  </a:lnTo>
+                </a:path>
+              </a:pathLst>
+            </a:custGeom>
+            <a:ln w="27101" cap="flat">
+              <a:solidFill>
+                <a:srgbClr val="FF8C00">
+                  <a:alpha val="100000"/>
+                </a:srgbClr>
+              </a:solidFill>
+              <a:prstDash val="solid"/>
+              <a:round/>
+            </a:ln>
+          </p:spPr>
+          <p:txBody>
+            <a:bodyPr/>
+            <a:lstStyle/>
+            <a:p/>
+          </p:txBody>
+        </p:sp>
+        <p:sp>
+          <p:nvSpPr>
+            <p:cNvPr id="75" name="pl75"/>
+            <p:cNvSpPr/>
+            <p:nvPr/>
+          </p:nvSpPr>
+          <p:spPr>
+            <a:xfrm>
+              <a:off x="887106" y="5294352"/>
+              <a:ext cx="7660515" cy="0"/>
+            </a:xfrm>
+            <a:custGeom>
+              <a:avLst/>
+              <a:pathLst>
+                <a:path w="7660515" h="0">
+                  <a:moveTo>
+                    <a:pt x="0" y="0"/>
+                  </a:moveTo>
+                  <a:lnTo>
+                    <a:pt x="7660515" y="0"/>
+                  </a:lnTo>
+                  <a:lnTo>
+                    <a:pt x="7660515" y="0"/>
+                  </a:lnTo>
+                </a:path>
+              </a:pathLst>
+            </a:custGeom>
+            <a:ln w="13550" cap="flat">
+              <a:solidFill>
+                <a:srgbClr val="7F7F7F">
+                  <a:alpha val="100000"/>
+                </a:srgbClr>
+              </a:solidFill>
+              <a:prstDash val="dash"/>
+              <a:round/>
+            </a:ln>
+          </p:spPr>
+          <p:txBody>
+            <a:bodyPr/>
+            <a:lstStyle/>
+            <a:p/>
+          </p:txBody>
+        </p:sp>
+        <p:sp>
+          <p:nvSpPr>
+            <p:cNvPr id="76" name="pl76"/>
+            <p:cNvSpPr/>
+            <p:nvPr/>
+          </p:nvSpPr>
+          <p:spPr>
+            <a:xfrm>
+              <a:off x="4300713" y="4336484"/>
+              <a:ext cx="0" cy="1317069"/>
+            </a:xfrm>
+            <a:custGeom>
+              <a:avLst/>
+              <a:pathLst>
+                <a:path w="0" h="1317069">
+                  <a:moveTo>
+                    <a:pt x="0" y="1317069"/>
+                  </a:moveTo>
+                  <a:lnTo>
+                    <a:pt x="0" y="0"/>
+                  </a:lnTo>
+                  <a:lnTo>
+                    <a:pt x="0" y="0"/>
+                  </a:lnTo>
+                </a:path>
+              </a:pathLst>
+            </a:custGeom>
+            <a:ln w="13550" cap="flat">
+              <a:solidFill>
+                <a:srgbClr val="666666">
+                  <a:alpha val="100000"/>
+                </a:srgbClr>
+              </a:solidFill>
+              <a:prstDash val="dot"/>
+              <a:round/>
+            </a:ln>
+          </p:spPr>
+          <p:txBody>
+            <a:bodyPr/>
+            <a:lstStyle/>
+            <a:p/>
+          </p:txBody>
+        </p:sp>
+        <p:sp>
+          <p:nvSpPr>
+            <p:cNvPr id="77" name="pl77"/>
+            <p:cNvSpPr/>
+            <p:nvPr/>
+          </p:nvSpPr>
+          <p:spPr>
+            <a:xfrm>
+              <a:off x="3103710" y="4336484"/>
+              <a:ext cx="0" cy="1317069"/>
+            </a:xfrm>
+            <a:custGeom>
+              <a:avLst/>
+              <a:pathLst>
+                <a:path w="0" h="1317069">
+                  <a:moveTo>
+                    <a:pt x="0" y="1317069"/>
+                  </a:moveTo>
+                  <a:lnTo>
+                    <a:pt x="0" y="0"/>
+                  </a:lnTo>
+                  <a:lnTo>
+                    <a:pt x="0" y="0"/>
+                  </a:lnTo>
+                </a:path>
+              </a:pathLst>
+            </a:custGeom>
+            <a:ln w="13550" cap="flat">
+              <a:solidFill>
+                <a:srgbClr val="4682B4">
+                  <a:alpha val="69803"/>
+                </a:srgbClr>
+              </a:solidFill>
+              <a:prstDash val="dash"/>
+              <a:round/>
+            </a:ln>
+          </p:spPr>
+          <p:txBody>
+            <a:bodyPr/>
+            <a:lstStyle/>
+            <a:p/>
+          </p:txBody>
+        </p:sp>
+        <p:sp>
+          <p:nvSpPr>
+            <p:cNvPr id="78" name="pl78"/>
+            <p:cNvSpPr/>
+            <p:nvPr/>
+          </p:nvSpPr>
+          <p:spPr>
+            <a:xfrm>
+              <a:off x="5504283" y="4336484"/>
+              <a:ext cx="0" cy="1317069"/>
+            </a:xfrm>
+            <a:custGeom>
+              <a:avLst/>
+              <a:pathLst>
+                <a:path w="0" h="1317069">
+                  <a:moveTo>
+                    <a:pt x="0" y="1317069"/>
+                  </a:moveTo>
+                  <a:lnTo>
+                    <a:pt x="0" y="0"/>
+                  </a:lnTo>
+                  <a:lnTo>
+                    <a:pt x="0" y="0"/>
+                  </a:lnTo>
+                </a:path>
+              </a:pathLst>
+            </a:custGeom>
+            <a:ln w="13550" cap="flat">
+              <a:solidFill>
+                <a:srgbClr val="4682B4">
+                  <a:alpha val="69803"/>
+                </a:srgbClr>
+              </a:solidFill>
+              <a:prstDash val="dash"/>
+              <a:round/>
+            </a:ln>
+          </p:spPr>
+          <p:txBody>
+            <a:bodyPr/>
+            <a:lstStyle/>
+            <a:p/>
+          </p:txBody>
+        </p:sp>
+        <p:sp>
+          <p:nvSpPr>
+            <p:cNvPr id="79" name="tx79"/>
+            <p:cNvSpPr/>
+            <p:nvPr/>
+          </p:nvSpPr>
+          <p:spPr>
+            <a:xfrm>
+              <a:off x="762297" y="5553636"/>
+              <a:ext cx="62179" cy="80101"/>
+            </a:xfrm>
+            <a:prstGeom prst="rect">
+              <a:avLst/>
+            </a:prstGeom>
+            <a:noFill/>
+          </p:spPr>
+          <p:txBody>
+            <a:bodyPr lIns="0" rIns="0" tIns="0" bIns="0" anchorCtr="1" anchor="ctr" wrap="none"/>
+            <a:lstStyle/>
+            <a:p>
+              <a:pPr algn="l" marL="0" marR="0" indent="0">
+                <a:lnSpc>
+                  <a:spcPts val="880"/>
+                </a:lnSpc>
+                <a:spcBef>
+                  <a:spcPts val="0"/>
+                </a:spcBef>
+                <a:spcAft>
+                  <a:spcPts val="0"/>
+                </a:spcAft>
+              </a:pPr>
+              <a:r>
+                <a:rPr sz="880">
+                  <a:solidFill>
+                    <a:srgbClr val="4D4D4D">
+                      <a:alpha val="100000"/>
+                    </a:srgbClr>
+                  </a:solidFill>
+                  <a:latin typeface="Helvetica"/>
+                  <a:cs typeface="Helvetica"/>
+                </a:rPr>
+                <a:t>0</a:t>
+              </a:r>
+            </a:p>
+          </p:txBody>
+        </p:sp>
+        <p:sp>
+          <p:nvSpPr>
+            <p:cNvPr id="80" name="tx80"/>
+            <p:cNvSpPr/>
+            <p:nvPr/>
+          </p:nvSpPr>
+          <p:spPr>
+            <a:xfrm>
+              <a:off x="762297" y="5254302"/>
+              <a:ext cx="62179" cy="80101"/>
+            </a:xfrm>
+            <a:prstGeom prst="rect">
+              <a:avLst/>
+            </a:prstGeom>
+            <a:noFill/>
+          </p:spPr>
+          <p:txBody>
+            <a:bodyPr lIns="0" rIns="0" tIns="0" bIns="0" anchorCtr="1" anchor="ctr" wrap="none"/>
+            <a:lstStyle/>
+            <a:p>
+              <a:pPr algn="l" marL="0" marR="0" indent="0">
+                <a:lnSpc>
+                  <a:spcPts val="880"/>
+                </a:lnSpc>
+                <a:spcBef>
+                  <a:spcPts val="0"/>
+                </a:spcBef>
+                <a:spcAft>
+                  <a:spcPts val="0"/>
+                </a:spcAft>
+              </a:pPr>
+              <a:r>
+                <a:rPr sz="880">
+                  <a:solidFill>
+                    <a:srgbClr val="4D4D4D">
+                      <a:alpha val="100000"/>
+                    </a:srgbClr>
+                  </a:solidFill>
+                  <a:latin typeface="Helvetica"/>
+                  <a:cs typeface="Helvetica"/>
+                </a:rPr>
+                <a:t>1</a:t>
+              </a:r>
+            </a:p>
+          </p:txBody>
+        </p:sp>
+        <p:sp>
+          <p:nvSpPr>
+            <p:cNvPr id="81" name="tx81"/>
+            <p:cNvSpPr/>
+            <p:nvPr/>
+          </p:nvSpPr>
+          <p:spPr>
+            <a:xfrm>
+              <a:off x="762297" y="4954968"/>
+              <a:ext cx="62179" cy="80101"/>
+            </a:xfrm>
+            <a:prstGeom prst="rect">
+              <a:avLst/>
+            </a:prstGeom>
+            <a:noFill/>
+          </p:spPr>
+          <p:txBody>
+            <a:bodyPr lIns="0" rIns="0" tIns="0" bIns="0" anchorCtr="1" anchor="ctr" wrap="none"/>
+            <a:lstStyle/>
+            <a:p>
+              <a:pPr algn="l" marL="0" marR="0" indent="0">
+                <a:lnSpc>
+                  <a:spcPts val="880"/>
+                </a:lnSpc>
+                <a:spcBef>
+                  <a:spcPts val="0"/>
+                </a:spcBef>
+                <a:spcAft>
+                  <a:spcPts val="0"/>
+                </a:spcAft>
+              </a:pPr>
+              <a:r>
+                <a:rPr sz="880">
+                  <a:solidFill>
+                    <a:srgbClr val="4D4D4D">
+                      <a:alpha val="100000"/>
+                    </a:srgbClr>
+                  </a:solidFill>
+                  <a:latin typeface="Helvetica"/>
+                  <a:cs typeface="Helvetica"/>
+                </a:rPr>
+                <a:t>2</a:t>
+              </a:r>
+            </a:p>
+          </p:txBody>
+        </p:sp>
+        <p:sp>
+          <p:nvSpPr>
+            <p:cNvPr id="82" name="tx82"/>
+            <p:cNvSpPr/>
+            <p:nvPr/>
+          </p:nvSpPr>
+          <p:spPr>
+            <a:xfrm>
+              <a:off x="762297" y="4655634"/>
+              <a:ext cx="62179" cy="80101"/>
+            </a:xfrm>
+            <a:prstGeom prst="rect">
+              <a:avLst/>
+            </a:prstGeom>
+            <a:noFill/>
+          </p:spPr>
+          <p:txBody>
+            <a:bodyPr lIns="0" rIns="0" tIns="0" bIns="0" anchorCtr="1" anchor="ctr" wrap="none"/>
+            <a:lstStyle/>
+            <a:p>
+              <a:pPr algn="l" marL="0" marR="0" indent="0">
+                <a:lnSpc>
+                  <a:spcPts val="880"/>
+                </a:lnSpc>
+                <a:spcBef>
+                  <a:spcPts val="0"/>
+                </a:spcBef>
+                <a:spcAft>
+                  <a:spcPts val="0"/>
+                </a:spcAft>
+              </a:pPr>
+              <a:r>
+                <a:rPr sz="880">
+                  <a:solidFill>
+                    <a:srgbClr val="4D4D4D">
+                      <a:alpha val="100000"/>
+                    </a:srgbClr>
+                  </a:solidFill>
+                  <a:latin typeface="Helvetica"/>
+                  <a:cs typeface="Helvetica"/>
+                </a:rPr>
+                <a:t>3</a:t>
+              </a:r>
+            </a:p>
+          </p:txBody>
+        </p:sp>
+        <p:sp>
+          <p:nvSpPr>
+            <p:cNvPr id="83" name="tx83"/>
+            <p:cNvSpPr/>
+            <p:nvPr/>
+          </p:nvSpPr>
+          <p:spPr>
+            <a:xfrm>
+              <a:off x="762297" y="4356300"/>
+              <a:ext cx="62179" cy="80101"/>
+            </a:xfrm>
+            <a:prstGeom prst="rect">
+              <a:avLst/>
+            </a:prstGeom>
+            <a:noFill/>
+          </p:spPr>
+          <p:txBody>
+            <a:bodyPr lIns="0" rIns="0" tIns="0" bIns="0" anchorCtr="1" anchor="ctr" wrap="none"/>
+            <a:lstStyle/>
+            <a:p>
+              <a:pPr algn="l" marL="0" marR="0" indent="0">
+                <a:lnSpc>
+                  <a:spcPts val="880"/>
+                </a:lnSpc>
+                <a:spcBef>
+                  <a:spcPts val="0"/>
+                </a:spcBef>
+                <a:spcAft>
+                  <a:spcPts val="0"/>
+                </a:spcAft>
+              </a:pPr>
+              <a:r>
+                <a:rPr sz="880">
+                  <a:solidFill>
+                    <a:srgbClr val="4D4D4D">
+                      <a:alpha val="100000"/>
+                    </a:srgbClr>
+                  </a:solidFill>
+                  <a:latin typeface="Helvetica"/>
+                  <a:cs typeface="Helvetica"/>
+                </a:rPr>
+                <a:t>4</a:t>
+              </a:r>
+            </a:p>
+          </p:txBody>
+        </p:sp>
+        <p:sp>
+          <p:nvSpPr>
+            <p:cNvPr id="84" name="tx84"/>
+            <p:cNvSpPr/>
+            <p:nvPr/>
+          </p:nvSpPr>
+          <p:spPr>
+            <a:xfrm>
+              <a:off x="1324230" y="5716183"/>
+              <a:ext cx="161574" cy="80101"/>
+            </a:xfrm>
+            <a:prstGeom prst="rect">
+              <a:avLst/>
+            </a:prstGeom>
+            <a:noFill/>
+          </p:spPr>
+          <p:txBody>
+            <a:bodyPr lIns="0" rIns="0" tIns="0" bIns="0" anchorCtr="1" anchor="ctr" wrap="none"/>
+            <a:lstStyle/>
+            <a:p>
+              <a:pPr algn="l" marL="0" marR="0" indent="0">
+                <a:lnSpc>
+                  <a:spcPts val="880"/>
+                </a:lnSpc>
+                <a:spcBef>
+                  <a:spcPts val="0"/>
+                </a:spcBef>
+                <a:spcAft>
+                  <a:spcPts val="0"/>
+                </a:spcAft>
+              </a:pPr>
+              <a:r>
+                <a:rPr sz="880">
+                  <a:solidFill>
+                    <a:srgbClr val="4D4D4D">
+                      <a:alpha val="100000"/>
+                    </a:srgbClr>
+                  </a:solidFill>
+                  <a:latin typeface="Helvetica"/>
+                  <a:cs typeface="Helvetica"/>
+                </a:rPr>
+                <a:t>-50</a:t>
+              </a:r>
+            </a:p>
+          </p:txBody>
+        </p:sp>
+        <p:sp>
+          <p:nvSpPr>
+            <p:cNvPr id="85" name="tx85"/>
+            <p:cNvSpPr/>
+            <p:nvPr/>
+          </p:nvSpPr>
+          <p:spPr>
+            <a:xfrm>
+              <a:off x="2179256" y="5716183"/>
+              <a:ext cx="161574" cy="80101"/>
+            </a:xfrm>
+            <a:prstGeom prst="rect">
+              <a:avLst/>
+            </a:prstGeom>
+            <a:noFill/>
+          </p:spPr>
+          <p:txBody>
+            <a:bodyPr lIns="0" rIns="0" tIns="0" bIns="0" anchorCtr="1" anchor="ctr" wrap="none"/>
+            <a:lstStyle/>
+            <a:p>
+              <a:pPr algn="l" marL="0" marR="0" indent="0">
+                <a:lnSpc>
+                  <a:spcPts val="880"/>
+                </a:lnSpc>
+                <a:spcBef>
+                  <a:spcPts val="0"/>
+                </a:spcBef>
+                <a:spcAft>
+                  <a:spcPts val="0"/>
+                </a:spcAft>
+              </a:pPr>
+              <a:r>
+                <a:rPr sz="880">
+                  <a:solidFill>
+                    <a:srgbClr val="4D4D4D">
+                      <a:alpha val="100000"/>
+                    </a:srgbClr>
+                  </a:solidFill>
+                  <a:latin typeface="Helvetica"/>
+                  <a:cs typeface="Helvetica"/>
+                </a:rPr>
+                <a:t>-40</a:t>
+              </a:r>
+            </a:p>
+          </p:txBody>
+        </p:sp>
+        <p:sp>
+          <p:nvSpPr>
+            <p:cNvPr id="86" name="tx86"/>
+            <p:cNvSpPr/>
+            <p:nvPr/>
+          </p:nvSpPr>
+          <p:spPr>
+            <a:xfrm>
+              <a:off x="3034282" y="5716183"/>
+              <a:ext cx="161574" cy="80101"/>
+            </a:xfrm>
+            <a:prstGeom prst="rect">
+              <a:avLst/>
+            </a:prstGeom>
+            <a:noFill/>
+          </p:spPr>
+          <p:txBody>
+            <a:bodyPr lIns="0" rIns="0" tIns="0" bIns="0" anchorCtr="1" anchor="ctr" wrap="none"/>
+            <a:lstStyle/>
+            <a:p>
+              <a:pPr algn="l" marL="0" marR="0" indent="0">
+                <a:lnSpc>
+                  <a:spcPts val="880"/>
+                </a:lnSpc>
+                <a:spcBef>
+                  <a:spcPts val="0"/>
+                </a:spcBef>
+                <a:spcAft>
+                  <a:spcPts val="0"/>
+                </a:spcAft>
+              </a:pPr>
+              <a:r>
+                <a:rPr sz="880">
+                  <a:solidFill>
+                    <a:srgbClr val="4D4D4D">
+                      <a:alpha val="100000"/>
+                    </a:srgbClr>
+                  </a:solidFill>
+                  <a:latin typeface="Helvetica"/>
+                  <a:cs typeface="Helvetica"/>
+                </a:rPr>
+                <a:t>-30</a:t>
+              </a:r>
+            </a:p>
+          </p:txBody>
+        </p:sp>
+        <p:sp>
+          <p:nvSpPr>
+            <p:cNvPr id="87" name="tx87"/>
+            <p:cNvSpPr/>
+            <p:nvPr/>
+          </p:nvSpPr>
+          <p:spPr>
+            <a:xfrm>
+              <a:off x="3889308" y="5716183"/>
+              <a:ext cx="161574" cy="80101"/>
+            </a:xfrm>
+            <a:prstGeom prst="rect">
+              <a:avLst/>
+            </a:prstGeom>
+            <a:noFill/>
+          </p:spPr>
+          <p:txBody>
+            <a:bodyPr lIns="0" rIns="0" tIns="0" bIns="0" anchorCtr="1" anchor="ctr" wrap="none"/>
+            <a:lstStyle/>
+            <a:p>
+              <a:pPr algn="l" marL="0" marR="0" indent="0">
+                <a:lnSpc>
+                  <a:spcPts val="880"/>
+                </a:lnSpc>
+                <a:spcBef>
+                  <a:spcPts val="0"/>
+                </a:spcBef>
+                <a:spcAft>
+                  <a:spcPts val="0"/>
+                </a:spcAft>
+              </a:pPr>
+              <a:r>
+                <a:rPr sz="880">
+                  <a:solidFill>
+                    <a:srgbClr val="4D4D4D">
+                      <a:alpha val="100000"/>
+                    </a:srgbClr>
+                  </a:solidFill>
+                  <a:latin typeface="Helvetica"/>
+                  <a:cs typeface="Helvetica"/>
+                </a:rPr>
+                <a:t>-20</a:t>
+              </a:r>
+            </a:p>
+          </p:txBody>
+        </p:sp>
+        <p:sp>
+          <p:nvSpPr>
+            <p:cNvPr id="88" name="tx88"/>
+            <p:cNvSpPr/>
+            <p:nvPr/>
+          </p:nvSpPr>
+          <p:spPr>
+            <a:xfrm>
+              <a:off x="4744334" y="5716183"/>
+              <a:ext cx="161574" cy="80101"/>
+            </a:xfrm>
+            <a:prstGeom prst="rect">
+              <a:avLst/>
+            </a:prstGeom>
+            <a:noFill/>
+          </p:spPr>
+          <p:txBody>
+            <a:bodyPr lIns="0" rIns="0" tIns="0" bIns="0" anchorCtr="1" anchor="ctr" wrap="none"/>
+            <a:lstStyle/>
+            <a:p>
+              <a:pPr algn="l" marL="0" marR="0" indent="0">
+                <a:lnSpc>
+                  <a:spcPts val="880"/>
+                </a:lnSpc>
+                <a:spcBef>
+                  <a:spcPts val="0"/>
+                </a:spcBef>
+                <a:spcAft>
+                  <a:spcPts val="0"/>
+                </a:spcAft>
+              </a:pPr>
+              <a:r>
+                <a:rPr sz="880">
+                  <a:solidFill>
+                    <a:srgbClr val="4D4D4D">
+                      <a:alpha val="100000"/>
+                    </a:srgbClr>
+                  </a:solidFill>
+                  <a:latin typeface="Helvetica"/>
+                  <a:cs typeface="Helvetica"/>
+                </a:rPr>
+                <a:t>-10</a:t>
+              </a:r>
+            </a:p>
+          </p:txBody>
+        </p:sp>
+        <p:sp>
+          <p:nvSpPr>
+            <p:cNvPr id="89" name="tx89"/>
+            <p:cNvSpPr/>
+            <p:nvPr/>
+          </p:nvSpPr>
+          <p:spPr>
+            <a:xfrm>
+              <a:off x="5649057" y="5716183"/>
+              <a:ext cx="62179" cy="80101"/>
+            </a:xfrm>
+            <a:prstGeom prst="rect">
+              <a:avLst/>
+            </a:prstGeom>
+            <a:noFill/>
+          </p:spPr>
+          <p:txBody>
+            <a:bodyPr lIns="0" rIns="0" tIns="0" bIns="0" anchorCtr="1" anchor="ctr" wrap="none"/>
+            <a:lstStyle/>
+            <a:p>
+              <a:pPr algn="l" marL="0" marR="0" indent="0">
+                <a:lnSpc>
+                  <a:spcPts val="880"/>
+                </a:lnSpc>
+                <a:spcBef>
+                  <a:spcPts val="0"/>
+                </a:spcBef>
+                <a:spcAft>
+                  <a:spcPts val="0"/>
+                </a:spcAft>
+              </a:pPr>
+              <a:r>
+                <a:rPr sz="880">
+                  <a:solidFill>
+                    <a:srgbClr val="4D4D4D">
+                      <a:alpha val="100000"/>
+                    </a:srgbClr>
+                  </a:solidFill>
+                  <a:latin typeface="Helvetica"/>
+                  <a:cs typeface="Helvetica"/>
+                </a:rPr>
+                <a:t>0</a:t>
+              </a:r>
+            </a:p>
+          </p:txBody>
+        </p:sp>
+        <p:sp>
+          <p:nvSpPr>
+            <p:cNvPr id="90" name="tx90"/>
+            <p:cNvSpPr/>
+            <p:nvPr/>
+          </p:nvSpPr>
+          <p:spPr>
+            <a:xfrm>
+              <a:off x="6472994" y="5716183"/>
+              <a:ext cx="124358" cy="80101"/>
+            </a:xfrm>
+            <a:prstGeom prst="rect">
+              <a:avLst/>
+            </a:prstGeom>
+            <a:noFill/>
+          </p:spPr>
+          <p:txBody>
+            <a:bodyPr lIns="0" rIns="0" tIns="0" bIns="0" anchorCtr="1" anchor="ctr" wrap="none"/>
+            <a:lstStyle/>
+            <a:p>
+              <a:pPr algn="l" marL="0" marR="0" indent="0">
+                <a:lnSpc>
+                  <a:spcPts val="880"/>
+                </a:lnSpc>
+                <a:spcBef>
+                  <a:spcPts val="0"/>
+                </a:spcBef>
+                <a:spcAft>
+                  <a:spcPts val="0"/>
+                </a:spcAft>
+              </a:pPr>
+              <a:r>
+                <a:rPr sz="880">
+                  <a:solidFill>
+                    <a:srgbClr val="4D4D4D">
+                      <a:alpha val="100000"/>
+                    </a:srgbClr>
+                  </a:solidFill>
+                  <a:latin typeface="Helvetica"/>
+                  <a:cs typeface="Helvetica"/>
+                </a:rPr>
+                <a:t>10</a:t>
+              </a:r>
+            </a:p>
+          </p:txBody>
+        </p:sp>
+        <p:sp>
+          <p:nvSpPr>
+            <p:cNvPr id="91" name="tx91"/>
+            <p:cNvSpPr/>
+            <p:nvPr/>
+          </p:nvSpPr>
+          <p:spPr>
+            <a:xfrm>
+              <a:off x="7328020" y="5716183"/>
+              <a:ext cx="124358" cy="80101"/>
+            </a:xfrm>
+            <a:prstGeom prst="rect">
+              <a:avLst/>
+            </a:prstGeom>
+            <a:noFill/>
+          </p:spPr>
+          <p:txBody>
+            <a:bodyPr lIns="0" rIns="0" tIns="0" bIns="0" anchorCtr="1" anchor="ctr" wrap="none"/>
+            <a:lstStyle/>
+            <a:p>
+              <a:pPr algn="l" marL="0" marR="0" indent="0">
+                <a:lnSpc>
+                  <a:spcPts val="880"/>
+                </a:lnSpc>
+                <a:spcBef>
+                  <a:spcPts val="0"/>
+                </a:spcBef>
+                <a:spcAft>
+                  <a:spcPts val="0"/>
+                </a:spcAft>
+              </a:pPr>
+              <a:r>
+                <a:rPr sz="880">
+                  <a:solidFill>
+                    <a:srgbClr val="4D4D4D">
+                      <a:alpha val="100000"/>
+                    </a:srgbClr>
+                  </a:solidFill>
+                  <a:latin typeface="Helvetica"/>
+                  <a:cs typeface="Helvetica"/>
+                </a:rPr>
+                <a:t>20</a:t>
+              </a:r>
+            </a:p>
+          </p:txBody>
+        </p:sp>
+        <p:sp>
+          <p:nvSpPr>
+            <p:cNvPr id="92" name="tx92"/>
+            <p:cNvSpPr/>
+            <p:nvPr/>
+          </p:nvSpPr>
+          <p:spPr>
+            <a:xfrm>
+              <a:off x="8183046" y="5716183"/>
+              <a:ext cx="124358" cy="80101"/>
+            </a:xfrm>
+            <a:prstGeom prst="rect">
+              <a:avLst/>
+            </a:prstGeom>
+            <a:noFill/>
+          </p:spPr>
+          <p:txBody>
+            <a:bodyPr lIns="0" rIns="0" tIns="0" bIns="0" anchorCtr="1" anchor="ctr" wrap="none"/>
+            <a:lstStyle/>
+            <a:p>
+              <a:pPr algn="l" marL="0" marR="0" indent="0">
+                <a:lnSpc>
+                  <a:spcPts val="880"/>
+                </a:lnSpc>
+                <a:spcBef>
+                  <a:spcPts val="0"/>
+                </a:spcBef>
+                <a:spcAft>
+                  <a:spcPts val="0"/>
+                </a:spcAft>
+              </a:pPr>
+              <a:r>
+                <a:rPr sz="880">
+                  <a:solidFill>
+                    <a:srgbClr val="4D4D4D">
+                      <a:alpha val="100000"/>
+                    </a:srgbClr>
+                  </a:solidFill>
+                  <a:latin typeface="Helvetica"/>
+                  <a:cs typeface="Helvetica"/>
+                </a:rPr>
+                <a:t>30</a:t>
+              </a:r>
+            </a:p>
+          </p:txBody>
+        </p:sp>
+        <p:sp>
+          <p:nvSpPr>
+            <p:cNvPr id="93" name="tx93"/>
+            <p:cNvSpPr/>
+            <p:nvPr/>
+          </p:nvSpPr>
+          <p:spPr>
+            <a:xfrm>
+              <a:off x="1561815" y="5855859"/>
+              <a:ext cx="6311097" cy="100218"/>
+            </a:xfrm>
+            <a:prstGeom prst="rect">
+              <a:avLst/>
+            </a:prstGeom>
+            <a:noFill/>
+          </p:spPr>
+          <p:txBody>
+            <a:bodyPr lIns="0" rIns="0" tIns="0" bIns="0" anchorCtr="1" anchor="ctr" wrap="none"/>
+            <a:lstStyle/>
+            <a:p>
+              <a:pPr algn="l" marL="0" marR="0" indent="0">
+                <a:lnSpc>
+                  <a:spcPts val="1100"/>
+                </a:lnSpc>
+                <a:spcBef>
+                  <a:spcPts val="0"/>
+                </a:spcBef>
+                <a:spcAft>
+                  <a:spcPts val="0"/>
+                </a:spcAft>
+              </a:pPr>
+              <a:r>
+                <a:rPr sz="1100">
+                  <a:solidFill>
+                    <a:srgbClr val="000000">
+                      <a:alpha val="100000"/>
+                    </a:srgbClr>
+                  </a:solidFill>
+                  <a:latin typeface="Helvetica"/>
+                  <a:cs typeface="Helvetica"/>
+                </a:rPr>
+                <a:t>Sensitivity eGFR Difference (%): 100 × (CKD-EPI 2012 CysC − CKD-EPI 2021 Cr) / CKD-EPI 2021 Cr</a:t>
+              </a:r>
+            </a:p>
+          </p:txBody>
+        </p:sp>
+        <p:sp>
+          <p:nvSpPr>
+            <p:cNvPr id="94" name="tx94"/>
+            <p:cNvSpPr/>
+            <p:nvPr/>
+          </p:nvSpPr>
+          <p:spPr>
+            <a:xfrm rot="-5400000">
+              <a:off x="138035" y="4944909"/>
+              <a:ext cx="1016904" cy="100218"/>
+            </a:xfrm>
+            <a:prstGeom prst="rect">
+              <a:avLst/>
+            </a:prstGeom>
+            <a:noFill/>
+          </p:spPr>
+          <p:txBody>
+            <a:bodyPr lIns="0" rIns="0" tIns="0" bIns="0" anchorCtr="1" anchor="ctr" wrap="none"/>
+            <a:lstStyle/>
+            <a:p>
+              <a:pPr algn="l" marL="0" marR="0" indent="0">
+                <a:lnSpc>
+                  <a:spcPts val="1100"/>
+                </a:lnSpc>
+                <a:spcBef>
+                  <a:spcPts val="0"/>
+                </a:spcBef>
+                <a:spcAft>
+                  <a:spcPts val="0"/>
+                </a:spcAft>
+              </a:pPr>
+              <a:r>
+                <a:rPr sz="1100">
+                  <a:solidFill>
+                    <a:srgbClr val="000000">
+                      <a:alpha val="100000"/>
+                    </a:srgbClr>
+                  </a:solidFill>
+                  <a:latin typeface="Helvetica"/>
+                  <a:cs typeface="Helvetica"/>
+                </a:rPr>
+                <a:t>subHR (95% CI)</a:t>
+              </a:r>
+            </a:p>
+          </p:txBody>
+        </p:sp>
+        <p:sp>
+          <p:nvSpPr>
+            <p:cNvPr id="95" name="tx95"/>
+            <p:cNvSpPr/>
+            <p:nvPr/>
+          </p:nvSpPr>
+          <p:spPr>
+            <a:xfrm>
+              <a:off x="887106" y="4159544"/>
+              <a:ext cx="7023414" cy="82021"/>
+            </a:xfrm>
+            <a:prstGeom prst="rect">
+              <a:avLst/>
+            </a:prstGeom>
+            <a:noFill/>
+          </p:spPr>
+          <p:txBody>
+            <a:bodyPr lIns="0" rIns="0" tIns="0" bIns="0" anchorCtr="1" anchor="ctr" wrap="none"/>
+            <a:lstStyle/>
+            <a:p>
+              <a:pPr algn="l" marL="0" marR="0" indent="0">
+                <a:lnSpc>
+                  <a:spcPts val="900"/>
+                </a:lnSpc>
+                <a:spcBef>
+                  <a:spcPts val="0"/>
+                </a:spcBef>
+                <a:spcAft>
+                  <a:spcPts val="0"/>
+                </a:spcAft>
+              </a:pPr>
+              <a:r>
+                <a:rPr sz="900">
+                  <a:solidFill>
+                    <a:srgbClr val="404040">
+                      <a:alpha val="100000"/>
+                    </a:srgbClr>
+                  </a:solidFill>
+                  <a:latin typeface="Helvetica"/>
+                  <a:cs typeface="Helvetica"/>
+                </a:rPr>
+                <a:t>subHR per 10 % decline: 2.15 (1.39-3.33), p_Bonf = 0.003 (n = 6)  |  per IQR decline (Δ = 28.1 %): 8.61 (2.53-29.34)  |  IQR: [-30.1, -2.1] %</a:t>
+              </a:r>
+            </a:p>
+          </p:txBody>
+        </p:sp>
+        <p:sp>
+          <p:nvSpPr>
+            <p:cNvPr id="96" name="tx96"/>
+            <p:cNvSpPr/>
+            <p:nvPr/>
+          </p:nvSpPr>
+          <p:spPr>
+            <a:xfrm>
+              <a:off x="887106" y="3932770"/>
               <a:ext cx="4579863" cy="120152"/>
             </a:xfrm>
             <a:prstGeom prst="rect">
